--- a/docs/proposal/bid-deck/smart-office-client-proposal.pptx
+++ b/docs/proposal/bid-deck/smart-office-client-proposal.pptx
@@ -240,7 +240,7 @@
               <a:rPr lang="de-DE" sz="800" smtClean="0">
                 <a:latin typeface="AA Zuehlke" panose="02000503060000020004" pitchFamily="2" charset="0"/>
               </a:rPr>
-              <a:t>24.09.26</a:t>
+              <a:t>25.09.26</a:t>
             </a:fld>
             <a:endParaRPr lang="de-DE" sz="800" dirty="0">
               <a:latin typeface="AA Zuehlke" panose="02000503060000020004" pitchFamily="2" charset="0"/>
@@ -554,7 +554,7 @@
             <a:fld id="{5320D358-F853-4E66-A71E-3A9A01236113}" type="datetimeFigureOut">
               <a:rPr lang="de-DE" smtClean="0"/>
               <a:pPr/>
-              <a:t>24.09.26</a:t>
+              <a:t>25.09.26</a:t>
             </a:fld>
             <a:endParaRPr lang="de-DE" dirty="0"/>
           </a:p>
@@ -1205,7 +1205,7 @@
           <a:p>
             <a:fld id="{AAA7C611-BE2C-487E-B362-870675A1E528}" type="datetime1">
               <a:rPr lang="de-DE" smtClean="0"/>
-              <a:t>24.09.26</a:t>
+              <a:t>25.09.26</a:t>
             </a:fld>
             <a:endParaRPr lang="en-GB" dirty="0"/>
           </a:p>
@@ -2208,7 +2208,7 @@
           <a:p>
             <a:fld id="{DAD19536-35C4-4C44-89D7-A067FE2064AD}" type="datetime1">
               <a:rPr lang="de-DE" smtClean="0"/>
-              <a:t>24.09.26</a:t>
+              <a:t>25.09.26</a:t>
             </a:fld>
             <a:endParaRPr lang="en-GB" dirty="0"/>
           </a:p>
@@ -2911,7 +2911,7 @@
           <a:p>
             <a:fld id="{3C501631-473F-4ACB-8089-3AAD7088E980}" type="datetime1">
               <a:rPr lang="de-DE" smtClean="0"/>
-              <a:t>24.09.26</a:t>
+              <a:t>25.09.26</a:t>
             </a:fld>
             <a:endParaRPr lang="en-GB" dirty="0"/>
           </a:p>
@@ -3819,7 +3819,7 @@
           <a:p>
             <a:fld id="{05A38EC8-C8D0-4664-B568-A70185B74B70}" type="datetime1">
               <a:rPr lang="de-DE" smtClean="0"/>
-              <a:t>24.09.26</a:t>
+              <a:t>25.09.26</a:t>
             </a:fld>
             <a:endParaRPr lang="en-GB" dirty="0"/>
           </a:p>
@@ -4512,7 +4512,7 @@
           <a:p>
             <a:fld id="{5F20DE3A-4448-44A2-BE15-949A36CC104F}" type="datetime1">
               <a:rPr lang="de-DE" smtClean="0"/>
-              <a:t>24.09.26</a:t>
+              <a:t>25.09.26</a:t>
             </a:fld>
             <a:endParaRPr lang="en-GB" dirty="0"/>
           </a:p>
@@ -5515,7 +5515,7 @@
           <a:p>
             <a:fld id="{6820D18C-5CDC-42F2-AD92-0EF6F4BDD0B1}" type="datetime1">
               <a:rPr lang="de-DE" smtClean="0"/>
-              <a:t>24.09.26</a:t>
+              <a:t>25.09.26</a:t>
             </a:fld>
             <a:endParaRPr lang="en-GB" dirty="0"/>
           </a:p>
@@ -6210,7 +6210,7 @@
           <a:p>
             <a:fld id="{99EDFA5E-E6B0-4665-86E2-7F9A6420200A}" type="datetime1">
               <a:rPr lang="de-DE" smtClean="0"/>
-              <a:t>24.09.26</a:t>
+              <a:t>25.09.26</a:t>
             </a:fld>
             <a:endParaRPr lang="en-GB" dirty="0"/>
           </a:p>
@@ -6441,7 +6441,7 @@
           <a:p>
             <a:fld id="{47207C87-E617-4556-B2B1-65325AEB9580}" type="datetime1">
               <a:rPr lang="de-DE" smtClean="0"/>
-              <a:t>24.09.26</a:t>
+              <a:t>25.09.26</a:t>
             </a:fld>
             <a:endParaRPr lang="en-GB" dirty="0"/>
           </a:p>
@@ -7006,7 +7006,7 @@
           <a:p>
             <a:fld id="{F9DF5CCC-2C60-4EBF-9601-F0CCD62763C7}" type="datetime1">
               <a:rPr lang="de-DE" smtClean="0"/>
-              <a:t>24.09.26</a:t>
+              <a:t>25.09.26</a:t>
             </a:fld>
             <a:endParaRPr lang="en-GB" dirty="0"/>
           </a:p>
@@ -7561,7 +7561,7 @@
           <a:p>
             <a:fld id="{186544D5-B4BB-45DA-8501-7153536FE838}" type="datetime1">
               <a:rPr lang="de-DE" smtClean="0"/>
-              <a:t>24.09.26</a:t>
+              <a:t>25.09.26</a:t>
             </a:fld>
             <a:endParaRPr lang="en-GB" dirty="0"/>
           </a:p>
@@ -8089,7 +8089,7 @@
           <a:p>
             <a:fld id="{601A8999-8019-4F5A-AA27-84590FE0CD29}" type="datetime1">
               <a:rPr lang="de-DE" smtClean="0"/>
-              <a:t>24.09.26</a:t>
+              <a:t>25.09.26</a:t>
             </a:fld>
             <a:endParaRPr lang="en-GB" dirty="0"/>
           </a:p>
@@ -9094,7 +9094,7 @@
           <a:p>
             <a:fld id="{D08BA402-EB53-4DA8-B231-4A9D3A9EFA0A}" type="datetime1">
               <a:rPr lang="de-DE" smtClean="0"/>
-              <a:t>24.09.26</a:t>
+              <a:t>25.09.26</a:t>
             </a:fld>
             <a:endParaRPr lang="en-GB" dirty="0"/>
           </a:p>
@@ -9248,7 +9248,7 @@
           <a:p>
             <a:fld id="{D5E28CE1-0B72-4313-948D-739C0AFD0496}" type="datetime1">
               <a:rPr lang="de-DE" smtClean="0"/>
-              <a:t>24.09.26</a:t>
+              <a:t>25.09.26</a:t>
             </a:fld>
             <a:endParaRPr lang="en-GB" dirty="0"/>
           </a:p>
@@ -9983,7 +9983,7 @@
           <a:p>
             <a:fld id="{B801B58C-E68F-4A2C-8460-19CB9C6986B2}" type="datetime1">
               <a:rPr lang="de-DE" smtClean="0"/>
-              <a:t>24.09.26</a:t>
+              <a:t>25.09.26</a:t>
             </a:fld>
             <a:endParaRPr lang="en-GB" dirty="0"/>
           </a:p>
@@ -10762,7 +10762,7 @@
           <a:p>
             <a:fld id="{DBCCA08F-ABF1-4BB5-A1A1-0E3E5D26A9D5}" type="datetime1">
               <a:rPr lang="de-DE" smtClean="0"/>
-              <a:t>24.09.26</a:t>
+              <a:t>25.09.26</a:t>
             </a:fld>
             <a:endParaRPr lang="en-GB" dirty="0"/>
           </a:p>
@@ -11779,7 +11779,7 @@
           <a:p>
             <a:fld id="{E010391A-BC12-4434-9F29-5CF521ED1ECA}" type="datetime1">
               <a:rPr lang="de-DE" smtClean="0"/>
-              <a:t>24.09.26</a:t>
+              <a:t>25.09.26</a:t>
             </a:fld>
             <a:endParaRPr lang="en-GB" dirty="0"/>
           </a:p>
@@ -12919,7 +12919,7 @@
           <a:p>
             <a:fld id="{30477CB0-95D3-4BB8-A40B-0B1588BFA1D8}" type="datetime1">
               <a:rPr lang="de-DE" smtClean="0"/>
-              <a:t>24.09.26</a:t>
+              <a:t>25.09.26</a:t>
             </a:fld>
             <a:endParaRPr lang="en-GB" dirty="0"/>
           </a:p>
@@ -13504,7 +13504,7 @@
             <a:pPr algn="r"/>
             <a:fld id="{99FDD5A6-E234-364D-BF53-77E46CEAF13B}" type="datetime1">
               <a:rPr lang="de-CH" smtClean="0"/>
-              <a:t>24.09.26</a:t>
+              <a:t>25.09.26</a:t>
             </a:fld>
             <a:endParaRPr lang="en-GB"/>
           </a:p>
@@ -14143,7 +14143,7 @@
           <a:p>
             <a:fld id="{7C5BAB06-F901-456A-B17C-6C85207B6452}" type="datetime1">
               <a:rPr lang="de-DE" smtClean="0"/>
-              <a:t>24.09.26</a:t>
+              <a:t>25.09.26</a:t>
             </a:fld>
             <a:endParaRPr lang="en-GB" dirty="0"/>
           </a:p>
@@ -15078,7 +15078,7 @@
           <a:p>
             <a:fld id="{8874E82A-B776-4F48-A676-1C2EF16A82EB}" type="datetime1">
               <a:rPr lang="de-DE" smtClean="0"/>
-              <a:t>24.09.26</a:t>
+              <a:t>25.09.26</a:t>
             </a:fld>
             <a:endParaRPr lang="en-GB" dirty="0"/>
           </a:p>
@@ -15864,7 +15864,7 @@
           <a:p>
             <a:fld id="{B1C4C974-51FB-4C4B-910E-CCD81FBB4E24}" type="datetime1">
               <a:rPr lang="de-DE" smtClean="0"/>
-              <a:t>24.09.26</a:t>
+              <a:t>25.09.26</a:t>
             </a:fld>
             <a:endParaRPr lang="en-GB" dirty="0"/>
           </a:p>
@@ -16983,7 +16983,7 @@
           <a:p>
             <a:fld id="{D27F4C84-B94E-461A-86D1-B00C5C2F1F2F}" type="datetime1">
               <a:rPr lang="de-DE" smtClean="0"/>
-              <a:t>24.09.26</a:t>
+              <a:t>25.09.26</a:t>
             </a:fld>
             <a:endParaRPr lang="en-GB" dirty="0"/>
           </a:p>
@@ -17712,7 +17712,7 @@
           <a:p>
             <a:fld id="{9B14C448-EA8E-411E-A5C1-EB33961C9505}" type="datetime1">
               <a:rPr lang="de-DE" smtClean="0"/>
-              <a:t>24.09.26</a:t>
+              <a:t>25.09.26</a:t>
             </a:fld>
             <a:endParaRPr lang="en-GB" dirty="0"/>
           </a:p>
@@ -18446,7 +18446,7 @@
           <a:p>
             <a:fld id="{25B0135A-2B8C-468D-8015-6F69290C986F}" type="datetime1">
               <a:rPr lang="de-DE" smtClean="0"/>
-              <a:t>24.09.26</a:t>
+              <a:t>25.09.26</a:t>
             </a:fld>
             <a:endParaRPr lang="en-GB" dirty="0"/>
           </a:p>
@@ -19278,7 +19278,7 @@
           <a:p>
             <a:fld id="{5EC03CBB-C59D-4859-BA4D-A2B4DA34069A}" type="datetime1">
               <a:rPr lang="de-DE" smtClean="0"/>
-              <a:t>24.09.26</a:t>
+              <a:t>25.09.26</a:t>
             </a:fld>
             <a:endParaRPr lang="en-GB" dirty="0"/>
           </a:p>
@@ -21823,7 +21823,7 @@
           <a:p>
             <a:fld id="{99EDFA5E-E6B0-4665-86E2-7F9A6420200A}" type="datetime1">
               <a:rPr lang="de-DE" smtClean="0"/>
-              <a:t>24.09.26</a:t>
+              <a:t>25.09.26</a:t>
             </a:fld>
             <a:endParaRPr lang="en-GB" dirty="0"/>
           </a:p>
@@ -22651,7 +22651,7 @@
             <a:fld id="{46E9DCF7-A317-BE45-95FD-FD168885E917}" type="datetime1">
               <a:rPr lang="de-CH" smtClean="0"/>
               <a:pPr/>
-              <a:t>24.09.26</a:t>
+              <a:t>25.09.26</a:t>
             </a:fld>
             <a:endParaRPr lang="en-GB"/>
           </a:p>
@@ -27354,7 +27354,7 @@
           <a:p>
             <a:fld id="{E35F1F96-2AAB-2040-B876-7B73F0B2E90B}" type="datetime1">
               <a:rPr lang="de-CH" smtClean="0"/>
-              <a:t>24.09.26</a:t>
+              <a:t>25.09.26</a:t>
             </a:fld>
             <a:endParaRPr lang="en-GB"/>
           </a:p>
@@ -27726,7 +27726,7 @@
           <a:p>
             <a:fld id="{48FD5481-016D-A642-8038-50D033A7CCF4}" type="datetime1">
               <a:rPr lang="en-GB" noProof="0" smtClean="0"/>
-              <a:t>24.09.26</a:t>
+              <a:t>25/09/2026</a:t>
             </a:fld>
             <a:endParaRPr lang="en-GB" noProof="0" dirty="0"/>
           </a:p>
@@ -28144,7 +28144,15 @@
           <a:p>
             <a:r>
               <a:rPr lang="en-GB" sz="1400" noProof="0" dirty="0"/>
-              <a:t>Three value-carrying features, already proven in a working two-day PoC: auto-release backed by hardware, booking via map or Teams/Slack, and an Agentic SDLC delivery model.</a:t>
+              <a:t>Three value-carrying features, already proven in a working two-day PoC: booking via map (teams/slack),</a:t>
+            </a:r>
+            <a:r>
+              <a:rPr lang="en-GB" sz="1400" dirty="0"/>
+              <a:t> auto release backed by hardware</a:t>
+            </a:r>
+            <a:r>
+              <a:rPr lang="en-GB" sz="1400" noProof="0" dirty="0"/>
+              <a:t> and an Agentic SDLC delivery model.</a:t>
             </a:r>
           </a:p>
         </p:txBody>
@@ -28320,7 +28328,7 @@
               <a:rPr lang="en-GB" noProof="0" dirty="0">
                 <a:latin typeface="+mn-lt"/>
               </a:rPr>
-              <a:t>Stop paying for space nobody uses. Zero-friction booking through the channels employees already use. A governed, predictable delivery model that scales without a rewrite.</a:t>
+              <a:t>Stop paying for space nobody uses. Booking through the channels employees already use. A governed, predictable delivery model that scales without a rewrite.</a:t>
             </a:r>
           </a:p>
         </p:txBody>
@@ -29370,7 +29378,7 @@
           <a:p>
             <a:fld id="{91329F2F-17EB-AD43-8AC8-16F2F6698179}" type="datetime1">
               <a:rPr lang="de-CH" smtClean="0"/>
-              <a:t>24.09.26</a:t>
+              <a:t>25.09.26</a:t>
             </a:fld>
             <a:endParaRPr lang="en-GB"/>
           </a:p>
@@ -31406,7 +31414,7 @@
                   <a:schemeClr val="bg1"/>
                 </a:solidFill>
               </a:rPr>
-              <a:t>24.09.26</a:t>
+              <a:t>25/09/2026</a:t>
             </a:fld>
             <a:endParaRPr lang="en-GB" noProof="0" dirty="0">
               <a:solidFill>
@@ -33696,7 +33704,7 @@
                   <a:schemeClr val="bg1"/>
                 </a:solidFill>
               </a:rPr>
-              <a:t>24/09/2026</a:t>
+              <a:t>25/09/2026</a:t>
             </a:fld>
             <a:endParaRPr lang="en-GB" dirty="0">
               <a:solidFill>
@@ -34159,7 +34167,7 @@
         <p:fade/>
       </p:transition>
     </mc:Choice>
-    <mc:Fallback xmlns="" xmlns:a16="http://schemas.microsoft.com/office/drawing/2014/main" xmlns:v="urn:schemas-microsoft-com:vml" xmlns:adec="http://schemas.microsoft.com/office/drawing/2017/decorative" xmlns:asvg="http://schemas.microsoft.com/office/drawing/2016/SVG/main">
+    <mc:Fallback xmlns:asvg="http://schemas.microsoft.com/office/drawing/2016/SVG/main" xmlns:adec="http://schemas.microsoft.com/office/drawing/2017/decorative" xmlns:v="urn:schemas-microsoft-com:vml" xmlns:a16="http://schemas.microsoft.com/office/drawing/2014/main" xmlns="">
       <p:transition spd="med">
         <p:fade/>
       </p:transition>
@@ -34506,7 +34514,7 @@
           <a:p>
             <a:fld id="{FD20AE32-A224-F549-B573-3E7F3C15EE73}" type="datetime1">
               <a:rPr lang="de-CH" smtClean="0"/>
-              <a:t>24.09.26</a:t>
+              <a:t>25.09.26</a:t>
             </a:fld>
             <a:endParaRPr lang="en-GB"/>
           </a:p>
@@ -36297,7 +36305,7 @@
           <a:p>
             <a:fld id="{6EBD1B98-77B8-504A-AC12-E37150047F93}" type="datetime1">
               <a:rPr lang="de-CH" smtClean="0"/>
-              <a:t>24.09.26</a:t>
+              <a:t>25.09.26</a:t>
             </a:fld>
             <a:endParaRPr lang="en-GB"/>
           </a:p>
@@ -36563,7 +36571,7 @@
           <a:p>
             <a:fld id="{AD307158-29EF-0247-8A8D-896A559BB729}" type="datetime1">
               <a:rPr lang="de-CH" smtClean="0"/>
-              <a:t>24.09.26</a:t>
+              <a:t>25.09.26</a:t>
             </a:fld>
             <a:endParaRPr lang="en-GB"/>
           </a:p>
@@ -38313,7 +38321,7 @@
                   <a:schemeClr val="bg1"/>
                 </a:solidFill>
               </a:rPr>
-              <a:t>24.09.26</a:t>
+              <a:t>25.09.26</a:t>
             </a:fld>
             <a:endParaRPr lang="en-GB">
               <a:solidFill>
@@ -39366,15 +39374,15 @@
 </file>
 
 <file path=customXml/item1.xml><?xml version="1.0" encoding="utf-8"?>
-<TemplafySlideTemplateConfiguration><![CDATA[{"slideVersion":1,"isValidatorEnabled":false,"isLocked":false,"elementsMetadata":[],"slideId":"1480204099429072961","enableDocumentContentUpdater":false,"version":"2.0"}]]></TemplafySlideTemplateConfiguration>
+<TemplafySlideTemplateConfiguration><![CDATA[{"slideVersion":1,"isValidatorEnabled":false,"isLocked":false,"elementsMetadata":[],"slideId":"1480204099429072917","enableDocumentContentUpdater":false,"version":"2.0"}]]></TemplafySlideTemplateConfiguration>
 </file>
 
 <file path=customXml/item10.xml><?xml version="1.0" encoding="utf-8"?>
-<TemplafySlideTemplateConfiguration><![CDATA[{"slideVersion":1,"isValidatorEnabled":false,"isLocked":false,"elementsMetadata":[],"slideId":"1480204099429072952","enableDocumentContentUpdater":false,"version":"2.0"}]]></TemplafySlideTemplateConfiguration>
+<TemplafySlideFormConfiguration><![CDATA[{"formFields":[],"formDataEntries":[]}]]></TemplafySlideFormConfiguration>
 </file>
 
 <file path=customXml/item100.xml><?xml version="1.0" encoding="utf-8"?>
-<TemplafySlideTemplateConfiguration><![CDATA[{"slideVersion":1,"isValidatorEnabled":false,"isLocked":false,"elementsMetadata":[],"slideId":"1480204099429072958","enableDocumentContentUpdater":false,"version":"2.0"}]]></TemplafySlideTemplateConfiguration>
+<TemplafySlideFormConfiguration><![CDATA[{"formFields":[{"distinct":false,"hideIfNoUserInteractionRequired":false,"required":true,"autoSelectFirstOption":false,"shareValue":false,"type":"dropDown","dataSourceName":"PrivacyInformation","dataSourceFieldName":"PrivacyInformation","name":"Privacy_Information","label":"Privacy"}],"formDataEntries":[]}]]></TemplafySlideFormConfiguration>
 </file>
 
 <file path=customXml/item101.xml><?xml version="1.0" encoding="utf-8"?>
@@ -39382,239 +39390,54 @@
 </file>
 
 <file path=customXml/item102.xml><?xml version="1.0" encoding="utf-8"?>
-<p:properties xmlns:p="http://schemas.microsoft.com/office/2006/metadata/properties" xmlns:xsi="http://www.w3.org/2001/XMLSchema-instance" xmlns:pc="http://schemas.microsoft.com/office/infopath/2007/PartnerControls">
-  <documentManagement>
-    <TaxCatchAll xmlns="6b2685c3-cb74-402e-89a3-cd359bd59e48" xsi:nil="true"/>
-    <lcf76f155ced4ddcb4097134ff3c332f xmlns="2f7262f3-19e3-4c38-834c-996e2cec5b6c">
-      <Terms xmlns="http://schemas.microsoft.com/office/infopath/2007/PartnerControls"/>
-    </lcf76f155ced4ddcb4097134ff3c332f>
-    <Behandelaar xmlns="2f7262f3-19e3-4c38-834c-996e2cec5b6c" xsi:nil="true"/>
-    <Onderwerp xmlns="2f7262f3-19e3-4c38-834c-996e2cec5b6c" xsi:nil="true"/>
-  </documentManagement>
-</p:properties>
+<TemplafySlideTemplateConfiguration><![CDATA[{"slideVersion":1,"isValidatorEnabled":false,"isLocked":false,"elementsMetadata":[],"slideId":"1480204099429072968","enableDocumentContentUpdater":false,"version":"2.0"}]]></TemplafySlideTemplateConfiguration>
 </file>
 
 <file path=customXml/item103.xml><?xml version="1.0" encoding="utf-8"?>
-<TemplafyFormConfiguration><![CDATA[{"formFields":[{"distinct":false,"hideIfNoUserInteractionRequired":false,"required":true,"autoSelectFirstOption":false,"shareValue":false,"type":"dropDown","dataSourceName":"PrivacyInformation","dataSourceFieldName":"PrivacyInformation","name":"Privacy_Information","label":"Privacy"}],"formDataEntries":[{"name":"Privacy_Information","value":"XAYoe5dzaxU1JjBtc348v4o4O1GY/px7eReQLaCzkaw="}]}]]></TemplafyFormConfiguration>
+<TemplafySlideTemplateConfiguration><![CDATA[{"slideVersion":1,"isValidatorEnabled":false,"isLocked":false,"elementsMetadata":[],"slideId":"1480204099429072945","enableDocumentContentUpdater":false,"version":"2.0"}]]></TemplafySlideTemplateConfiguration>
 </file>
 
 <file path=customXml/item104.xml><?xml version="1.0" encoding="utf-8"?>
-<TemplafySlideTemplateConfiguration><![CDATA[{"slideVersion":1,"isValidatorEnabled":false,"isLocked":false,"elementsMetadata":[],"slideId":"1480204099429072962","enableDocumentContentUpdater":false,"version":"2.0"}]]></TemplafySlideTemplateConfiguration>
+<TemplafySlideTemplateConfiguration><![CDATA[{"slideVersion":1,"isValidatorEnabled":false,"isLocked":false,"elementsMetadata":[],"slideId":"1480204099429072921","enableDocumentContentUpdater":false,"version":"2.0"}]]></TemplafySlideTemplateConfiguration>
 </file>
 
 <file path=customXml/item105.xml><?xml version="1.0" encoding="utf-8"?>
-<TemplafySlideTemplateConfiguration><![CDATA[{"slideVersion":1,"isValidatorEnabled":false,"isLocked":false,"elementsMetadata":[],"slideId":"1480204099429072963","enableDocumentContentUpdater":false,"version":"2.0"}]]></TemplafySlideTemplateConfiguration>
+<TemplafySlideFormConfiguration><![CDATA[{"formFields":[],"formDataEntries":[]}]]></TemplafySlideFormConfiguration>
 </file>
 
 <file path=customXml/item106.xml><?xml version="1.0" encoding="utf-8"?>
+<TemplafySlideTemplateConfiguration><![CDATA[{"slideVersion":1,"isValidatorEnabled":false,"isLocked":false,"elementsMetadata":[],"slideId":"1480204099429072956","enableDocumentContentUpdater":false,"version":"2.0"}]]></TemplafySlideTemplateConfiguration>
+</file>
+
+<file path=customXml/item107.xml><?xml version="1.0" encoding="utf-8"?>
 <TemplafySlideFormConfiguration><![CDATA[{"formFields":[],"formDataEntries":[]}]]></TemplafySlideFormConfiguration>
 </file>
 
-<file path=customXml/item107.xml><?xml version="1.0" encoding="utf-8"?>
-<TemplafySlideTemplateConfiguration><![CDATA[{"slideVersion":1,"isValidatorEnabled":false,"isLocked":false,"elementsMetadata":[],"slideId":"1480204099429072940","enableDocumentContentUpdater":false,"version":"2.0"}]]></TemplafySlideTemplateConfiguration>
-</file>
-
 <file path=customXml/item108.xml><?xml version="1.0" encoding="utf-8"?>
-<TemplafySlideTemplateConfiguration><![CDATA[{"slideVersion":1,"isValidatorEnabled":false,"isLocked":false,"elementsMetadata":[],"slideId":"1480204099429072943","enableDocumentContentUpdater":false,"version":"2.0"}]]></TemplafySlideTemplateConfiguration>
+<TemplafySlideFormConfiguration><![CDATA[{"formFields":[],"formDataEntries":[]}]]></TemplafySlideFormConfiguration>
 </file>
 
 <file path=customXml/item109.xml><?xml version="1.0" encoding="utf-8"?>
+<TemplafySlideTemplateConfiguration><![CDATA[{"slideVersion":1,"isValidatorEnabled":false,"isLocked":false,"elementsMetadata":[],"slideId":"1480204099429072944","enableDocumentContentUpdater":false,"version":"2.0"}]]></TemplafySlideTemplateConfiguration>
+</file>
+
+<file path=customXml/item11.xml><?xml version="1.0" encoding="utf-8"?>
+<TemplafySlideTemplateConfiguration><![CDATA[{"slideVersion":1,"isValidatorEnabled":false,"isLocked":false,"elementsMetadata":[],"slideId":"1480204099429072977","enableDocumentContentUpdater":false,"version":"2.0"}]]></TemplafySlideTemplateConfiguration>
+</file>
+
+<file path=customXml/item110.xml><?xml version="1.0" encoding="utf-8"?>
 <TemplafySlideFormConfiguration><![CDATA[{"formFields":[],"formDataEntries":[]}]]></TemplafySlideFormConfiguration>
 </file>
 
-<file path=customXml/item11.xml><?xml version="1.0" encoding="utf-8"?>
-<TemplafySlideFormConfiguration><![CDATA[{"formFields":[],"formDataEntries":[]}]]></TemplafySlideFormConfiguration>
-</file>
-
-<file path=customXml/item110.xml><?xml version="1.0" encoding="utf-8"?>
-<TemplafySlideTemplateConfiguration><![CDATA[{"slideVersion":1,"isValidatorEnabled":false,"isLocked":false,"elementsMetadata":[],"slideId":"1480204099429072942","enableDocumentContentUpdater":false,"version":"2.0"}]]></TemplafySlideTemplateConfiguration>
-</file>
-
 <file path=customXml/item111.xml><?xml version="1.0" encoding="utf-8"?>
-<TemplafySlideFormConfiguration><![CDATA[{"formFields":[],"formDataEntries":[]}]]></TemplafySlideFormConfiguration>
+<TemplafySlideTemplateConfiguration><![CDATA[{"slideVersion":1,"isValidatorEnabled":false,"isLocked":false,"elementsMetadata":[],"slideId":"1480204099429072955","enableDocumentContentUpdater":false,"version":"2.0"}]]></TemplafySlideTemplateConfiguration>
 </file>
 
 <file path=customXml/item112.xml><?xml version="1.0" encoding="utf-8"?>
-<TemplafySlideFormConfiguration><![CDATA[{"formFields":[],"formDataEntries":[]}]]></TemplafySlideFormConfiguration>
+<TemplafySlideTemplateConfiguration><![CDATA[{"slideVersion":1,"isValidatorEnabled":false,"isLocked":false,"elementsMetadata":[],"slideId":"1480204099429072952","enableDocumentContentUpdater":false,"version":"2.0"}]]></TemplafySlideTemplateConfiguration>
 </file>
 
 <file path=customXml/item113.xml><?xml version="1.0" encoding="utf-8"?>
-<TemplafySlideFormConfiguration><![CDATA[{"formFields":[],"formDataEntries":[]}]]></TemplafySlideFormConfiguration>
-</file>
-
-<file path=customXml/item114.xml><?xml version="1.0" encoding="utf-8"?>
-<TemplafySlideFormConfiguration><![CDATA[{"formFields":[],"formDataEntries":[]}]]></TemplafySlideFormConfiguration>
-</file>
-
-<file path=customXml/item115.xml><?xml version="1.0" encoding="utf-8"?>
-<TemplafySlideTemplateConfiguration><![CDATA[{"slideVersion":1,"isValidatorEnabled":false,"isLocked":false,"elementsMetadata":[],"slideId":"1480204099429072920","enableDocumentContentUpdater":false,"version":"2.0"}]]></TemplafySlideTemplateConfiguration>
-</file>
-
-<file path=customXml/item116.xml><?xml version="1.0" encoding="utf-8"?>
-<TemplafySlideFormConfiguration><![CDATA[{"formFields":[],"formDataEntries":[]}]]></TemplafySlideFormConfiguration>
-</file>
-
-<file path=customXml/item117.xml><?xml version="1.0" encoding="utf-8"?>
-<TemplafySlideTemplateConfiguration><![CDATA[{"slideVersion":1,"isValidatorEnabled":false,"isLocked":false,"elementsMetadata":[],"slideId":"1480204099429072917","enableDocumentContentUpdater":false,"version":"2.0"}]]></TemplafySlideTemplateConfiguration>
-</file>
-
-<file path=customXml/item118.xml><?xml version="1.0" encoding="utf-8"?>
-<TemplafySlideTemplateConfiguration><![CDATA[{"slideVersion":1,"isValidatorEnabled":false,"isLocked":false,"elementsMetadata":[],"slideId":"1480204099429072980","enableDocumentContentUpdater":false,"version":"2.0"}]]></TemplafySlideTemplateConfiguration>
-</file>
-
-<file path=customXml/item119.xml><?xml version="1.0" encoding="utf-8"?>
-<TemplafySlideFormConfiguration><![CDATA[{"formFields":[],"formDataEntries":[]}]]></TemplafySlideFormConfiguration>
-</file>
-
-<file path=customXml/item12.xml><?xml version="1.0" encoding="utf-8"?>
-<TemplafySlideFormConfiguration><![CDATA[{"formFields":[],"formDataEntries":[]}]]></TemplafySlideFormConfiguration>
-</file>
-
-<file path=customXml/item120.xml><?xml version="1.0" encoding="utf-8"?>
-<TemplafySlideTemplateConfiguration><![CDATA[{"slideVersion":1,"isValidatorEnabled":false,"isLocked":false,"elementsMetadata":[],"slideId":"1480204099429072970","enableDocumentContentUpdater":false,"version":"2.0"}]]></TemplafySlideTemplateConfiguration>
-</file>
-
-<file path=customXml/item121.xml><?xml version="1.0" encoding="utf-8"?>
-<TemplafySlideFormConfiguration><![CDATA[{"formFields":[],"formDataEntries":[]}]]></TemplafySlideFormConfiguration>
-</file>
-
-<file path=customXml/item122.xml><?xml version="1.0" encoding="utf-8"?>
-<TemplafySlideFormConfiguration><![CDATA[{"formFields":[],"formDataEntries":[]}]]></TemplafySlideFormConfiguration>
-</file>
-
-<file path=customXml/item123.xml><?xml version="1.0" encoding="utf-8"?>
-<TemplafySlideFormConfiguration><![CDATA[{"formFields":[],"formDataEntries":[]}]]></TemplafySlideFormConfiguration>
-</file>
-
-<file path=customXml/item124.xml><?xml version="1.0" encoding="utf-8"?>
-<TemplafySlideTemplateConfiguration><![CDATA[{"slideVersion":1,"isValidatorEnabled":false,"isLocked":false,"elementsMetadata":[],"slideId":"1480204099429072972","enableDocumentContentUpdater":false,"version":"2.0"}]]></TemplafySlideTemplateConfiguration>
-</file>
-
-<file path=customXml/item125.xml><?xml version="1.0" encoding="utf-8"?>
-<TemplafySlideFormConfiguration><![CDATA[{"formFields":[],"formDataEntries":[]}]]></TemplafySlideFormConfiguration>
-</file>
-
-<file path=customXml/item126.xml><?xml version="1.0" encoding="utf-8"?>
-<TemplafySlideFormConfiguration><![CDATA[{"formFields":[],"formDataEntries":[]}]]></TemplafySlideFormConfiguration>
-</file>
-
-<file path=customXml/item127.xml><?xml version="1.0" encoding="utf-8"?>
-<TemplafySlideTemplateConfiguration><![CDATA[{"slideVersion":1,"isValidatorEnabled":false,"isLocked":false,"elementsMetadata":[],"slideId":"1480204099429072955","enableDocumentContentUpdater":false,"version":"2.0"}]]></TemplafySlideTemplateConfiguration>
-</file>
-
-<file path=customXml/item128.xml><?xml version="1.0" encoding="utf-8"?>
-<TemplafySlideTemplateConfiguration><![CDATA[{"slideVersion":1,"isValidatorEnabled":false,"isLocked":false,"elementsMetadata":[],"slideId":"1480204099429072977","enableDocumentContentUpdater":false,"version":"2.0"}]]></TemplafySlideTemplateConfiguration>
-</file>
-
-<file path=customXml/item129.xml><?xml version="1.0" encoding="utf-8"?>
-<TemplafySlideTemplateConfiguration><![CDATA[{"slideVersion":1,"isValidatorEnabled":false,"isLocked":false,"elementsMetadata":[],"slideId":"1480204099429072919","enableDocumentContentUpdater":false,"version":"2.0"}]]></TemplafySlideTemplateConfiguration>
-</file>
-
-<file path=customXml/item13.xml><?xml version="1.0" encoding="utf-8"?>
-<TemplafySlideTemplateConfiguration><![CDATA[{"slideVersion":1,"isValidatorEnabled":false,"isLocked":false,"elementsMetadata":[],"slideId":"1480204099429072967","enableDocumentContentUpdater":false,"version":"2.0"}]]></TemplafySlideTemplateConfiguration>
-</file>
-
-<file path=customXml/item130.xml><?xml version="1.0" encoding="utf-8"?>
-<TemplafySlideFormConfiguration><![CDATA[{"formFields":[],"formDataEntries":[]}]]></TemplafySlideFormConfiguration>
-</file>
-
-<file path=customXml/item131.xml><?xml version="1.0" encoding="utf-8"?>
-<TemplafySlideFormConfiguration><![CDATA[{"formFields":[],"formDataEntries":[]}]]></TemplafySlideFormConfiguration>
-</file>
-
-<file path=customXml/item132.xml><?xml version="1.0" encoding="utf-8"?>
-<TemplafySlideTemplateConfiguration><![CDATA[{"slideVersion":1,"isValidatorEnabled":false,"isLocked":false,"elementsMetadata":[],"slideId":"1480204099429072956","enableDocumentContentUpdater":false,"version":"2.0"}]]></TemplafySlideTemplateConfiguration>
-</file>
-
-<file path=customXml/item133.xml><?xml version="1.0" encoding="utf-8"?>
-<TemplafySlideFormConfiguration><![CDATA[{"formFields":[],"formDataEntries":[]}]]></TemplafySlideFormConfiguration>
-</file>
-
-<file path=customXml/item134.xml><?xml version="1.0" encoding="utf-8"?>
-<TemplafySlideFormConfiguration><![CDATA[{"formFields":[{"distinct":false,"hideIfNoUserInteractionRequired":false,"required":true,"autoSelectFirstOption":false,"shareValue":false,"type":"dropDown","dataSourceName":"PrivacyInformation","dataSourceFieldName":"PrivacyInformation","name":"Privacy_Information","label":"Privacy"}],"formDataEntries":[]}]]></TemplafySlideFormConfiguration>
-</file>
-
-<file path=customXml/item135.xml><?xml version="1.0" encoding="utf-8"?>
-<TemplafySlideTemplateConfiguration><![CDATA[{"slideVersion":1,"isValidatorEnabled":false,"isLocked":false,"elementsMetadata":[{"type":"shape","elementConfiguration":{"visibility":"{{IfElse(Equals(Form.Privacy_Information.Name, \"Highly Confidential\"), VisibilityType.Visible, VisibilityType.Hidden)}}","type":"text","disableUpdates":false}},{"type":"shape","elementConfiguration":{"visibility":"{{IfElse(Equals(Form.Privacy_Information.Name, \"Confidential\"), VisibilityType.Visible, VisibilityType.Hidden)}}","type":"text","disableUpdates":false}},{"type":"shape","elementConfiguration":{"visibility":"{{IfElse(Equals(Form.Privacy_Information.Name, \"General\"), VisibilityType.Visible, VisibilityType.Hidden)}}","type":"text","disableUpdates":false}},{"type":"shape","elementConfiguration":{"visibility":"{{IfElse(Equals(Form.Privacy_Information.Name, \"Public\"), VisibilityType.Visible, VisibilityType.Hidden)}}","type":"text","disableUpdates":false}}],"slideId":"1480204099429072900","enableDocumentContentUpdater":false,"version":"2.0"}]]></TemplafySlideTemplateConfiguration>
-</file>
-
-<file path=customXml/item14.xml><?xml version="1.0" encoding="utf-8"?>
-<TemplafySlideTemplateConfiguration><![CDATA[{"slideVersion":1,"isValidatorEnabled":false,"isLocked":false,"elementsMetadata":[],"slideId":"1480204099429072913","enableDocumentContentUpdater":false,"version":"2.0"}]]></TemplafySlideTemplateConfiguration>
-</file>
-
-<file path=customXml/item15.xml><?xml version="1.0" encoding="utf-8"?>
-<TemplafySlideFormConfiguration><![CDATA[{"formFields":[],"formDataEntries":[]}]]></TemplafySlideFormConfiguration>
-</file>
-
-<file path=customXml/item16.xml><?xml version="1.0" encoding="utf-8"?>
-<TemplafySlideFormConfiguration><![CDATA[{"formFields":[],"formDataEntries":[]}]]></TemplafySlideFormConfiguration>
-</file>
-
-<file path=customXml/item17.xml><?xml version="1.0" encoding="utf-8"?>
-<TemplafySlideTemplateConfiguration><![CDATA[{"slideVersion":1,"isValidatorEnabled":false,"isLocked":false,"elementsMetadata":[],"slideId":"1480204099429072926","enableDocumentContentUpdater":false,"version":"2.0"}]]></TemplafySlideTemplateConfiguration>
-</file>
-
-<file path=customXml/item18.xml><?xml version="1.0" encoding="utf-8"?>
-<TemplafySlideTemplateConfiguration><![CDATA[{"slideVersion":1,"isValidatorEnabled":false,"isLocked":false,"elementsMetadata":[],"slideId":"1480204099429072978","enableDocumentContentUpdater":false,"version":"2.0"}]]></TemplafySlideTemplateConfiguration>
-</file>
-
-<file path=customXml/item19.xml><?xml version="1.0" encoding="utf-8"?>
-<TemplafySlideTemplateConfiguration><![CDATA[{"slideVersion":1,"isValidatorEnabled":false,"isLocked":false,"elementsMetadata":[],"slideId":"1480204099429072937","enableDocumentContentUpdater":false,"version":"2.0"}]]></TemplafySlideTemplateConfiguration>
-</file>
-
-<file path=customXml/item2.xml><?xml version="1.0" encoding="utf-8"?>
-<TemplafySlideFormConfiguration><![CDATA[{"formFields":[],"formDataEntries":[]}]]></TemplafySlideFormConfiguration>
-</file>
-
-<file path=customXml/item20.xml><?xml version="1.0" encoding="utf-8"?>
-<TemplafySlideFormConfiguration><![CDATA[{"formFields":[{"distinct":false,"hideIfNoUserInteractionRequired":false,"required":true,"autoSelectFirstOption":false,"shareValue":false,"type":"dropDown","dataSourceName":"PrivacyInformation","dataSourceFieldName":"PrivacyInformation","name":"Privacy_Information","label":"Privacy"}],"formDataEntries":[]}]]></TemplafySlideFormConfiguration>
-</file>
-
-<file path=customXml/item21.xml><?xml version="1.0" encoding="utf-8"?>
-<TemplafySlideFormConfiguration><![CDATA[{"formFields":[],"formDataEntries":[]}]]></TemplafySlideFormConfiguration>
-</file>
-
-<file path=customXml/item22.xml><?xml version="1.0" encoding="utf-8"?>
-<TemplafySlideFormConfiguration><![CDATA[{"formFields":[],"formDataEntries":[]}]]></TemplafySlideFormConfiguration>
-</file>
-
-<file path=customXml/item23.xml><?xml version="1.0" encoding="utf-8"?>
-<TemplafySlideTemplateConfiguration><![CDATA[{"slideVersion":1,"isValidatorEnabled":false,"isLocked":false,"elementsMetadata":[],"slideId":"1480204099429072931","enableDocumentContentUpdater":false,"version":"2.0"}]]></TemplafySlideTemplateConfiguration>
-</file>
-
-<file path=customXml/item24.xml><?xml version="1.0" encoding="utf-8"?>
-<TemplafySlideFormConfiguration><![CDATA[{"formFields":[],"formDataEntries":[]}]]></TemplafySlideFormConfiguration>
-</file>
-
-<file path=customXml/item25.xml><?xml version="1.0" encoding="utf-8"?>
-<TemplafySlideTemplateConfiguration><![CDATA[{"slideVersion":1,"isValidatorEnabled":false,"isLocked":false,"elementsMetadata":[],"slideId":"1480204099429072946","enableDocumentContentUpdater":false,"version":"2.0"}]]></TemplafySlideTemplateConfiguration>
-</file>
-
-<file path=customXml/item26.xml><?xml version="1.0" encoding="utf-8"?>
-<TemplafySlideTemplateConfiguration><![CDATA[{"slideVersion":1,"isValidatorEnabled":false,"isLocked":false,"elementsMetadata":[],"slideId":"1480204099429072969","enableDocumentContentUpdater":false,"version":"2.0"}]]></TemplafySlideTemplateConfiguration>
-</file>
-
-<file path=customXml/item27.xml><?xml version="1.0" encoding="utf-8"?>
-<TemplafySlideFormConfiguration><![CDATA[{"formFields":[],"formDataEntries":[]}]]></TemplafySlideFormConfiguration>
-</file>
-
-<file path=customXml/item28.xml><?xml version="1.0" encoding="utf-8"?>
-<TemplafySlideFormConfiguration><![CDATA[{"formFields":[],"formDataEntries":[]}]]></TemplafySlideFormConfiguration>
-</file>
-
-<file path=customXml/item29.xml><?xml version="1.0" encoding="utf-8"?>
-<TemplafySlideFormConfiguration><![CDATA[{"formFields":[],"formDataEntries":[]}]]></TemplafySlideFormConfiguration>
-</file>
-
-<file path=customXml/item3.xml><?xml version="1.0" encoding="utf-8"?>
-<TemplafySlideTemplateConfiguration><![CDATA[{"slideVersion":1,"isValidatorEnabled":false,"isLocked":false,"elementsMetadata":[],"slideId":"1480204099429072933","enableDocumentContentUpdater":false,"version":"2.0"}]]></TemplafySlideTemplateConfiguration>
-</file>
-
-<file path=customXml/item30.xml><?xml version="1.0" encoding="utf-8"?>
-<TemplafySlideTemplateConfiguration><![CDATA[{"slideVersion":1,"isValidatorEnabled":false,"isLocked":false,"elementsMetadata":[],"slideId":"1480204099429072949","enableDocumentContentUpdater":false,"version":"2.0"}]]></TemplafySlideTemplateConfiguration>
-</file>
-
-<file path=customXml/item31.xml><?xml version="1.0" encoding="utf-8"?>
 <ct:contentTypeSchema xmlns:ct="http://schemas.microsoft.com/office/2006/metadata/contentType" xmlns:ma="http://schemas.microsoft.com/office/2006/metadata/properties/metaAttributes" ct:_="" ma:_="" ma:contentTypeName="Document" ma:contentTypeID="0x010100AED8E6AD952BA74A855EB02C79D83CD1" ma:contentTypeVersion="21" ma:contentTypeDescription="Een nieuw document maken." ma:contentTypeScope="" ma:versionID="70c7e8f7f8dec0797a309982e418a14f">
   <xsd:schema xmlns:xsd="http://www.w3.org/2001/XMLSchema" xmlns:xs="http://www.w3.org/2001/XMLSchema" xmlns:p="http://schemas.microsoft.com/office/2006/metadata/properties" xmlns:ns2="2f7262f3-19e3-4c38-834c-996e2cec5b6c" xmlns:ns3="6b2685c3-cb74-402e-89a3-cd359bd59e48" targetNamespace="http://schemas.microsoft.com/office/2006/metadata/properties" ma:root="true" ma:fieldsID="dcf1b6941baf25605f9a06755b8e3dd4" ns2:_="" ns3:_="">
     <xsd:import namespace="2f7262f3-19e3-4c38-834c-996e2cec5b6c"/>
@@ -39885,12 +39708,197 @@
 </ct:contentTypeSchema>
 </file>
 
+<file path=customXml/item114.xml><?xml version="1.0" encoding="utf-8"?>
+<TemplafySlideFormConfiguration><![CDATA[{"formFields":[],"formDataEntries":[]}]]></TemplafySlideFormConfiguration>
+</file>
+
+<file path=customXml/item115.xml><?xml version="1.0" encoding="utf-8"?>
+<TemplafySlideTemplateConfiguration><![CDATA[{"slideVersion":1,"isValidatorEnabled":false,"isLocked":false,"elementsMetadata":[],"slideId":"1480204099429072902","enableDocumentContentUpdater":false,"version":"2.0"}]]></TemplafySlideTemplateConfiguration>
+</file>
+
+<file path=customXml/item116.xml><?xml version="1.0" encoding="utf-8"?>
+<TemplafySlideTemplateConfiguration><![CDATA[{"slideVersion":1,"isValidatorEnabled":false,"isLocked":false,"elementsMetadata":[],"slideId":"1480204099429072966","enableDocumentContentUpdater":false,"version":"2.0"}]]></TemplafySlideTemplateConfiguration>
+</file>
+
+<file path=customXml/item117.xml><?xml version="1.0" encoding="utf-8"?>
+<TemplafySlideFormConfiguration><![CDATA[{"formFields":[],"formDataEntries":[]}]]></TemplafySlideFormConfiguration>
+</file>
+
+<file path=customXml/item118.xml><?xml version="1.0" encoding="utf-8"?>
+<TemplafySlideTemplateConfiguration><![CDATA[{"slideVersion":1,"isValidatorEnabled":false,"isLocked":false,"elementsMetadata":[],"slideId":"1480204099429072974","enableDocumentContentUpdater":false,"version":"2.0"}]]></TemplafySlideTemplateConfiguration>
+</file>
+
+<file path=customXml/item119.xml><?xml version="1.0" encoding="utf-8"?>
+<TemplafySlideFormConfiguration><![CDATA[{"formFields":[],"formDataEntries":[]}]]></TemplafySlideFormConfiguration>
+</file>
+
+<file path=customXml/item12.xml><?xml version="1.0" encoding="utf-8"?>
+<TemplafySlideTemplateConfiguration><![CDATA[{"slideVersion":1,"isValidatorEnabled":false,"isLocked":false,"elementsMetadata":[],"slideId":"1480204099429072964","enableDocumentContentUpdater":false,"version":"2.0"}]]></TemplafySlideTemplateConfiguration>
+</file>
+
+<file path=customXml/item120.xml><?xml version="1.0" encoding="utf-8"?>
+<TemplafySlideFormConfiguration><![CDATA[{"formFields":[],"formDataEntries":[]}]]></TemplafySlideFormConfiguration>
+</file>
+
+<file path=customXml/item121.xml><?xml version="1.0" encoding="utf-8"?>
+<TemplafySlideFormConfiguration><![CDATA[{"formFields":[],"formDataEntries":[]}]]></TemplafySlideFormConfiguration>
+</file>
+
+<file path=customXml/item122.xml><?xml version="1.0" encoding="utf-8"?>
+<TemplafySlideTemplateConfiguration><![CDATA[{"slideVersion":1,"isValidatorEnabled":false,"isLocked":false,"elementsMetadata":[],"slideId":"1480204099429072923","enableDocumentContentUpdater":false,"version":"2.0"}]]></TemplafySlideTemplateConfiguration>
+</file>
+
+<file path=customXml/item123.xml><?xml version="1.0" encoding="utf-8"?>
+<TemplafySlideTemplateConfiguration><![CDATA[{"slideVersion":1,"isValidatorEnabled":false,"isLocked":false,"elementsMetadata":[],"slideId":"1480204099429072969","enableDocumentContentUpdater":false,"version":"2.0"}]]></TemplafySlideTemplateConfiguration>
+</file>
+
+<file path=customXml/item124.xml><?xml version="1.0" encoding="utf-8"?>
+<TemplafySlideTemplateConfiguration><![CDATA[{"slideVersion":1,"isValidatorEnabled":false,"isLocked":false,"elementsMetadata":[],"slideId":"1480204099429072965","enableDocumentContentUpdater":false,"version":"2.0"}]]></TemplafySlideTemplateConfiguration>
+</file>
+
+<file path=customXml/item125.xml><?xml version="1.0" encoding="utf-8"?>
+<TemplafySlideFormConfiguration><![CDATA[{"formFields":[],"formDataEntries":[]}]]></TemplafySlideFormConfiguration>
+</file>
+
+<file path=customXml/item126.xml><?xml version="1.0" encoding="utf-8"?>
+<TemplafySlideTemplateConfiguration><![CDATA[{"slideVersion":1,"isValidatorEnabled":false,"isLocked":false,"elementsMetadata":[],"slideId":"1480204099429072928","enableDocumentContentUpdater":false,"version":"2.0"}]]></TemplafySlideTemplateConfiguration>
+</file>
+
+<file path=customXml/item127.xml><?xml version="1.0" encoding="utf-8"?>
+<TemplafySlideFormConfiguration><![CDATA[{"formFields":[],"formDataEntries":[]}]]></TemplafySlideFormConfiguration>
+</file>
+
+<file path=customXml/item128.xml><?xml version="1.0" encoding="utf-8"?>
+<TemplafySlideFormConfiguration><![CDATA[{"formFields":[],"formDataEntries":[]}]]></TemplafySlideFormConfiguration>
+</file>
+
+<file path=customXml/item129.xml><?xml version="1.0" encoding="utf-8"?>
+<TemplafySlideFormConfiguration><![CDATA[{"formFields":[],"formDataEntries":[]}]]></TemplafySlideFormConfiguration>
+</file>
+
+<file path=customXml/item13.xml><?xml version="1.0" encoding="utf-8"?>
+<TemplafySlideTemplateConfiguration><![CDATA[{"slideVersion":1,"isValidatorEnabled":false,"isLocked":false,"elementsMetadata":[],"slideId":"1480204099429072971","enableDocumentContentUpdater":false,"version":"2.0"}]]></TemplafySlideTemplateConfiguration>
+</file>
+
+<file path=customXml/item130.xml><?xml version="1.0" encoding="utf-8"?>
+<TemplafySlideTemplateConfiguration><![CDATA[{"slideVersion":1,"isValidatorEnabled":false,"isLocked":false,"elementsMetadata":[],"slideId":"1480204099429072975","enableDocumentContentUpdater":false,"version":"2.0"}]]></TemplafySlideTemplateConfiguration>
+</file>
+
+<file path=customXml/item131.xml><?xml version="1.0" encoding="utf-8"?>
+<TemplafySlideTemplateConfiguration><![CDATA[{"slideVersion":1,"isValidatorEnabled":false,"isLocked":false,"elementsMetadata":[],"slideId":"1480204099429072954","enableDocumentContentUpdater":false,"version":"2.0"}]]></TemplafySlideTemplateConfiguration>
+</file>
+
+<file path=customXml/item132.xml><?xml version="1.0" encoding="utf-8"?>
+<TemplafySlideTemplateConfiguration><![CDATA[{"slideVersion":1,"isValidatorEnabled":false,"isLocked":false,"elementsMetadata":[],"slideId":"1480204099429072918","enableDocumentContentUpdater":false,"version":"2.0"}]]></TemplafySlideTemplateConfiguration>
+</file>
+
+<file path=customXml/item133.xml><?xml version="1.0" encoding="utf-8"?>
+<p:properties xmlns:p="http://schemas.microsoft.com/office/2006/metadata/properties" xmlns:xsi="http://www.w3.org/2001/XMLSchema-instance" xmlns:pc="http://schemas.microsoft.com/office/infopath/2007/PartnerControls">
+  <documentManagement>
+    <TaxCatchAll xmlns="6b2685c3-cb74-402e-89a3-cd359bd59e48" xsi:nil="true"/>
+    <lcf76f155ced4ddcb4097134ff3c332f xmlns="2f7262f3-19e3-4c38-834c-996e2cec5b6c">
+      <Terms xmlns="http://schemas.microsoft.com/office/infopath/2007/PartnerControls"/>
+    </lcf76f155ced4ddcb4097134ff3c332f>
+    <Behandelaar xmlns="2f7262f3-19e3-4c38-834c-996e2cec5b6c" xsi:nil="true"/>
+    <Onderwerp xmlns="2f7262f3-19e3-4c38-834c-996e2cec5b6c" xsi:nil="true"/>
+  </documentManagement>
+</p:properties>
+</file>
+
+<file path=customXml/item134.xml><?xml version="1.0" encoding="utf-8"?>
+<TemplafySlideFormConfiguration><![CDATA[{"formFields":[],"formDataEntries":[]}]]></TemplafySlideFormConfiguration>
+</file>
+
+<file path=customXml/item135.xml><?xml version="1.0" encoding="utf-8"?>
+<TemplafySlideFormConfiguration><![CDATA[{"formFields":[],"formDataEntries":[]}]]></TemplafySlideFormConfiguration>
+</file>
+
+<file path=customXml/item14.xml><?xml version="1.0" encoding="utf-8"?>
+<TemplafySlideFormConfiguration><![CDATA[{"formFields":[],"formDataEntries":[]}]]></TemplafySlideFormConfiguration>
+</file>
+
+<file path=customXml/item15.xml><?xml version="1.0" encoding="utf-8"?>
+<TemplafySlideFormConfiguration><![CDATA[{"formFields":[],"formDataEntries":[]}]]></TemplafySlideFormConfiguration>
+</file>
+
+<file path=customXml/item16.xml><?xml version="1.0" encoding="utf-8"?>
+<TemplafySlideTemplateConfiguration><![CDATA[{"slideVersion":1,"isValidatorEnabled":false,"isLocked":false,"elementsMetadata":[],"slideId":"1480204099429072959","enableDocumentContentUpdater":false,"version":"2.0"}]]></TemplafySlideTemplateConfiguration>
+</file>
+
+<file path=customXml/item17.xml><?xml version="1.0" encoding="utf-8"?>
+<TemplafySlideFormConfiguration><![CDATA[{"formFields":[],"formDataEntries":[]}]]></TemplafySlideFormConfiguration>
+</file>
+
+<file path=customXml/item18.xml><?xml version="1.0" encoding="utf-8"?>
+<TemplafySlideFormConfiguration><![CDATA[{"formFields":[],"formDataEntries":[]}]]></TemplafySlideFormConfiguration>
+</file>
+
+<file path=customXml/item19.xml><?xml version="1.0" encoding="utf-8"?>
+<TemplafySlideFormConfiguration><![CDATA[{"formFields":[],"formDataEntries":[]}]]></TemplafySlideFormConfiguration>
+</file>
+
+<file path=customXml/item2.xml><?xml version="1.0" encoding="utf-8"?>
+<TemplafySlideFormConfiguration><![CDATA[{"formFields":[],"formDataEntries":[]}]]></TemplafySlideFormConfiguration>
+</file>
+
+<file path=customXml/item20.xml><?xml version="1.0" encoding="utf-8"?>
+<TemplafySlideFormConfiguration><![CDATA[{"formFields":[],"formDataEntries":[]}]]></TemplafySlideFormConfiguration>
+</file>
+
+<file path=customXml/item21.xml><?xml version="1.0" encoding="utf-8"?>
+<TemplafySlideTemplateConfiguration><![CDATA[{"slideVersion":1,"isValidatorEnabled":false,"isLocked":false,"elementsMetadata":[],"slideId":"1480204099429072980","enableDocumentContentUpdater":false,"version":"2.0"}]]></TemplafySlideTemplateConfiguration>
+</file>
+
+<file path=customXml/item22.xml><?xml version="1.0" encoding="utf-8"?>
+<TemplafySlideFormConfiguration><![CDATA[{"formFields":[{"distinct":false,"hideIfNoUserInteractionRequired":false,"required":true,"autoSelectFirstOption":false,"shareValue":false,"type":"dropDown","dataSourceName":"PrivacyInformation","dataSourceFieldName":"PrivacyInformation","name":"Privacy_Information","label":"Privacy"}],"formDataEntries":[]}]]></TemplafySlideFormConfiguration>
+</file>
+
+<file path=customXml/item23.xml><?xml version="1.0" encoding="utf-8"?>
+<TemplafySlideFormConfiguration><![CDATA[{"formFields":[],"formDataEntries":[]}]]></TemplafySlideFormConfiguration>
+</file>
+
+<file path=customXml/item24.xml><?xml version="1.0" encoding="utf-8"?>
+<TemplafySlideTemplateConfiguration><![CDATA[{"slideVersion":1,"isValidatorEnabled":false,"isLocked":false,"elementsMetadata":[],"slideId":"1480204099429072976","enableDocumentContentUpdater":false,"version":"2.0"}]]></TemplafySlideTemplateConfiguration>
+</file>
+
+<file path=customXml/item25.xml><?xml version="1.0" encoding="utf-8"?>
+<TemplafySlideFormConfiguration><![CDATA[{"formFields":[],"formDataEntries":[]}]]></TemplafySlideFormConfiguration>
+</file>
+
+<file path=customXml/item26.xml><?xml version="1.0" encoding="utf-8"?>
+<TemplafySlideTemplateConfiguration><![CDATA[{"slideVersion":1,"isValidatorEnabled":false,"isLocked":false,"elementsMetadata":[],"slideId":"1480204099429072926","enableDocumentContentUpdater":false,"version":"2.0"}]]></TemplafySlideTemplateConfiguration>
+</file>
+
+<file path=customXml/item27.xml><?xml version="1.0" encoding="utf-8"?>
+<TemplafySlideFormConfiguration><![CDATA[{"formFields":[],"formDataEntries":[]}]]></TemplafySlideFormConfiguration>
+</file>
+
+<file path=customXml/item28.xml><?xml version="1.0" encoding="utf-8"?>
+<TemplafySlideTemplateConfiguration><![CDATA[{"slideVersion":1,"isValidatorEnabled":false,"isLocked":false,"elementsMetadata":[],"slideId":"1480204099429072929","enableDocumentContentUpdater":false,"version":"2.0"}]]></TemplafySlideTemplateConfiguration>
+</file>
+
+<file path=customXml/item29.xml><?xml version="1.0" encoding="utf-8"?>
+<TemplafySlideFormConfiguration><![CDATA[{"formFields":[],"formDataEntries":[]}]]></TemplafySlideFormConfiguration>
+</file>
+
+<file path=customXml/item3.xml><?xml version="1.0" encoding="utf-8"?>
+<TemplafySlideFormConfiguration><![CDATA[{"formFields":[],"formDataEntries":[]}]]></TemplafySlideFormConfiguration>
+</file>
+
+<file path=customXml/item30.xml><?xml version="1.0" encoding="utf-8"?>
+<TemplafyFormConfiguration><![CDATA[{"formFields":[{"distinct":false,"hideIfNoUserInteractionRequired":false,"required":true,"autoSelectFirstOption":false,"shareValue":false,"type":"dropDown","dataSourceName":"PrivacyInformation","dataSourceFieldName":"PrivacyInformation","name":"Privacy_Information","label":"Privacy"}],"formDataEntries":[{"name":"Privacy_Information","value":"XAYoe5dzaxU1JjBtc348v4o4O1GY/px7eReQLaCzkaw="}]}]]></TemplafyFormConfiguration>
+</file>
+
+<file path=customXml/item31.xml><?xml version="1.0" encoding="utf-8"?>
+<TemplafySlideTemplateConfiguration><![CDATA[{"slideVersion":1,"isValidatorEnabled":false,"isLocked":false,"elementsMetadata":[],"slideId":"1480204099429072943","enableDocumentContentUpdater":false,"version":"2.0"}]]></TemplafySlideTemplateConfiguration>
+</file>
+
 <file path=customXml/item32.xml><?xml version="1.0" encoding="utf-8"?>
-<TemplafySlideTemplateConfiguration><![CDATA[{"slideVersion":1,"isValidatorEnabled":false,"isLocked":false,"elementsMetadata":[],"slideId":"1480204099429072950","enableDocumentContentUpdater":false,"version":"2.0"}]]></TemplafySlideTemplateConfiguration>
+<TemplafySlideTemplateConfiguration><![CDATA[{"slideVersion":1,"isValidatorEnabled":false,"isLocked":false,"elementsMetadata":[],"slideId":"1480204099429072972","enableDocumentContentUpdater":false,"version":"2.0"}]]></TemplafySlideTemplateConfiguration>
 </file>
 
 <file path=customXml/item33.xml><?xml version="1.0" encoding="utf-8"?>
-<TemplafySlideFormConfiguration><![CDATA[{"formFields":[],"formDataEntries":[]}]]></TemplafySlideFormConfiguration>
+<TemplafySlideTemplateConfiguration><![CDATA[{"slideVersion":1,"isValidatorEnabled":false,"isLocked":false,"elementsMetadata":[],"slideId":"1480204099429072919","enableDocumentContentUpdater":false,"version":"2.0"}]]></TemplafySlideTemplateConfiguration>
 </file>
 
 <file path=customXml/item34.xml><?xml version="1.0" encoding="utf-8"?>
@@ -39898,7 +39906,7 @@
 </file>
 
 <file path=customXml/item35.xml><?xml version="1.0" encoding="utf-8"?>
-<TemplafySlideTemplateConfiguration><![CDATA[{"slideVersion":1,"isValidatorEnabled":false,"isLocked":false,"elementsMetadata":[],"slideId":"1480204099429072896","enableDocumentContentUpdater":false,"version":"2.0"}]]></TemplafySlideTemplateConfiguration>
+<TemplafySlideTemplateConfiguration><![CDATA[{"slideVersion":1,"isValidatorEnabled":false,"isLocked":false,"elementsMetadata":[],"slideId":"1480204099429072957","enableDocumentContentUpdater":false,"version":"2.0"}]]></TemplafySlideTemplateConfiguration>
 </file>
 
 <file path=customXml/item36.xml><?xml version="1.0" encoding="utf-8"?>
@@ -39906,15 +39914,15 @@
 </file>
 
 <file path=customXml/item37.xml><?xml version="1.0" encoding="utf-8"?>
-<TemplafySlideTemplateConfiguration><![CDATA[{"slideVersion":1,"isValidatorEnabled":false,"isLocked":false,"elementsMetadata":[],"slideId":"1480204099429072975","enableDocumentContentUpdater":false,"version":"2.0"}]]></TemplafySlideTemplateConfiguration>
+<TemplafySlideTemplateConfiguration><![CDATA[{"slideVersion":1,"isValidatorEnabled":false,"isLocked":false,"elementsMetadata":[],"slideId":"1480204099429072948","enableDocumentContentUpdater":false,"version":"2.0"}]]></TemplafySlideTemplateConfiguration>
 </file>
 
 <file path=customXml/item38.xml><?xml version="1.0" encoding="utf-8"?>
-<TemplafySlideTemplateConfiguration><![CDATA[{"slideVersion":1,"isValidatorEnabled":false,"isLocked":false,"elementsMetadata":[],"slideId":"1480204099429072929","enableDocumentContentUpdater":false,"version":"2.0"}]]></TemplafySlideTemplateConfiguration>
+<TemplafySlideFormConfiguration><![CDATA[{"formFields":[],"formDataEntries":[]}]]></TemplafySlideFormConfiguration>
 </file>
 
 <file path=customXml/item39.xml><?xml version="1.0" encoding="utf-8"?>
-<TemplafySlideFormConfiguration><![CDATA[{"formFields":[],"formDataEntries":[]}]]></TemplafySlideFormConfiguration>
+<TemplafySlideTemplateConfiguration><![CDATA[{"slideVersion":1,"isValidatorEnabled":false,"isLocked":false,"elementsMetadata":[],"slideId":"1480204099429072961","enableDocumentContentUpdater":false,"version":"2.0"}]]></TemplafySlideTemplateConfiguration>
 </file>
 
 <file path=customXml/item4.xml><?xml version="1.0" encoding="utf-8"?>
@@ -39926,7 +39934,7 @@
 </file>
 
 <file path=customXml/item41.xml><?xml version="1.0" encoding="utf-8"?>
-<TemplafySlideFormConfiguration><![CDATA[{"formFields":[],"formDataEntries":[]}]]></TemplafySlideFormConfiguration>
+<TemplafySlideTemplateConfiguration><![CDATA[{"slideVersion":1,"isValidatorEnabled":false,"isLocked":false,"elementsMetadata":[],"slideId":"1480204099429072931","enableDocumentContentUpdater":false,"version":"2.0"}]]></TemplafySlideTemplateConfiguration>
 </file>
 
 <file path=customXml/item42.xml><?xml version="1.0" encoding="utf-8"?>
@@ -39934,11 +39942,11 @@
 </file>
 
 <file path=customXml/item43.xml><?xml version="1.0" encoding="utf-8"?>
-<TemplafySlideTemplateConfiguration><![CDATA[{"slideVersion":1,"isValidatorEnabled":false,"isLocked":false,"elementsMetadata":[],"slideId":"1480204099429072959","enableDocumentContentUpdater":false,"version":"2.0"}]]></TemplafySlideTemplateConfiguration>
+<TemplafySlideTemplateConfiguration><![CDATA[{"slideVersion":1,"isValidatorEnabled":false,"isLocked":false,"elementsMetadata":[],"slideId":"1480204099429072953","enableDocumentContentUpdater":false,"version":"2.0"}]]></TemplafySlideTemplateConfiguration>
 </file>
 
 <file path=customXml/item44.xml><?xml version="1.0" encoding="utf-8"?>
-<TemplafySlideTemplateConfiguration><![CDATA[{"slideVersion":1,"isValidatorEnabled":false,"isLocked":false,"elementsMetadata":[],"slideId":"1480204099429072910","enableDocumentContentUpdater":false,"version":"2.0"}]]></TemplafySlideTemplateConfiguration>
+<TemplafySlideFormConfiguration><![CDATA[{"formFields":[],"formDataEntries":[]}]]></TemplafySlideFormConfiguration>
 </file>
 
 <file path=customXml/item45.xml><?xml version="1.0" encoding="utf-8"?>
@@ -39946,11 +39954,11 @@
 </file>
 
 <file path=customXml/item46.xml><?xml version="1.0" encoding="utf-8"?>
-<TemplafySlideTemplateConfiguration><![CDATA[{"slideVersion":1,"isValidatorEnabled":false,"isLocked":false,"elementsMetadata":[],"slideId":"1480204099429072951","enableDocumentContentUpdater":false,"version":"2.0"}]]></TemplafySlideTemplateConfiguration>
+<TemplafySlideTemplateConfiguration><![CDATA[{"slideVersion":1,"isValidatorEnabled":false,"isLocked":false,"elementsMetadata":[],"slideId":"1480204099429072910","enableDocumentContentUpdater":false,"version":"2.0"}]]></TemplafySlideTemplateConfiguration>
 </file>
 
 <file path=customXml/item47.xml><?xml version="1.0" encoding="utf-8"?>
-<TemplafySlideTemplateConfiguration><![CDATA[{"slideVersion":1,"isValidatorEnabled":false,"isLocked":false,"elementsMetadata":[],"slideId":"1480204099429072965","enableDocumentContentUpdater":false,"version":"2.0"}]]></TemplafySlideTemplateConfiguration>
+<TemplafySlideTemplateConfiguration><![CDATA[{"slideVersion":1,"isValidatorEnabled":false,"isLocked":false,"elementsMetadata":[],"slideId":"1480204099429072936","enableDocumentContentUpdater":false,"version":"2.0"}]]></TemplafySlideTemplateConfiguration>
 </file>
 
 <file path=customXml/item48.xml><?xml version="1.0" encoding="utf-8"?>
@@ -39958,20 +39966,15 @@
 </file>
 
 <file path=customXml/item49.xml><?xml version="1.0" encoding="utf-8"?>
-<TemplafySlideTemplateConfiguration><![CDATA[{"slideVersion":1,"isValidatorEnabled":false,"isLocked":false,"elementsMetadata":[],"slideId":"1480204099429072953","enableDocumentContentUpdater":false,"version":"2.0"}]]></TemplafySlideTemplateConfiguration>
+<TemplafySlideTemplateConfiguration><![CDATA[{"slideVersion":1,"isValidatorEnabled":false,"isLocked":false,"elementsMetadata":[],"slideId":"1480204099429072939","enableDocumentContentUpdater":false,"version":"2.0"}]]></TemplafySlideTemplateConfiguration>
 </file>
 
 <file path=customXml/item5.xml><?xml version="1.0" encoding="utf-8"?>
-<TemplafySlideTemplateConfiguration><![CDATA[{"slideVersion":1,"isValidatorEnabled":false,"isLocked":false,"elementsMetadata":[],"slideId":"1480204099429072964","enableDocumentContentUpdater":false,"version":"2.0"}]]></TemplafySlideTemplateConfiguration>
+<TemplafySlideTemplateConfiguration><![CDATA[{"slideVersion":1,"isValidatorEnabled":false,"isLocked":false,"elementsMetadata":[],"slideId":"1480204099429072947","enableDocumentContentUpdater":false,"version":"2.0"}]]></TemplafySlideTemplateConfiguration>
 </file>
 
 <file path=customXml/item50.xml><?xml version="1.0" encoding="utf-8"?>
-<?mso-contentType ?>
-<FormTemplates xmlns="http://schemas.microsoft.com/sharepoint/v3/contenttype/forms">
-  <Display>DocumentLibraryForm</Display>
-  <Edit>DocumentLibraryForm</Edit>
-  <New>DocumentLibraryForm</New>
-</FormTemplates>
+<TemplafySlideFormConfiguration><![CDATA[{"formFields":[],"formDataEntries":[]}]]></TemplafySlideFormConfiguration>
 </file>
 
 <file path=customXml/item51.xml><?xml version="1.0" encoding="utf-8"?>
@@ -39979,15 +39982,15 @@
 </file>
 
 <file path=customXml/item52.xml><?xml version="1.0" encoding="utf-8"?>
-<TemplafySlideFormConfiguration><![CDATA[{"formFields":[],"formDataEntries":[]}]]></TemplafySlideFormConfiguration>
+<TemplafySlideTemplateConfiguration><![CDATA[{"slideVersion":1,"isValidatorEnabled":false,"isLocked":false,"elementsMetadata":[{"type":"shape","elementConfiguration":{"visibility":"{{IfElse(Equals(Form.Privacy_Information.Name, \"Highly Confidential\"), VisibilityType.Visible, VisibilityType.Hidden)}}","type":"text","disableUpdates":false}},{"type":"shape","elementConfiguration":{"visibility":"{{IfElse(Equals(Form.Privacy_Information.Name, \"Confidential\"), VisibilityType.Visible, VisibilityType.Hidden)}}","type":"text","disableUpdates":false}},{"type":"shape","elementConfiguration":{"visibility":"{{IfElse(Equals(Form.Privacy_Information.Name, \"General\"), VisibilityType.Visible, VisibilityType.Hidden)}}","type":"text","disableUpdates":false}},{"type":"shape","elementConfiguration":{"visibility":"{{IfElse(Equals(Form.Privacy_Information.Name, \"Public\"), VisibilityType.Visible, VisibilityType.Hidden)}}","type":"text","disableUpdates":false}}],"slideId":"1480204099429072900","enableDocumentContentUpdater":false,"version":"2.0"}]]></TemplafySlideTemplateConfiguration>
 </file>
 
 <file path=customXml/item53.xml><?xml version="1.0" encoding="utf-8"?>
-<TemplafySlideFormConfiguration><![CDATA[{"formFields":[],"formDataEntries":[]}]]></TemplafySlideFormConfiguration>
+<TemplafySlideTemplateConfiguration><![CDATA[{"slideVersion":1,"isValidatorEnabled":false,"isLocked":false,"elementsMetadata":[],"slideId":"1480204099429072967","enableDocumentContentUpdater":false,"version":"2.0"}]]></TemplafySlideTemplateConfiguration>
 </file>
 
 <file path=customXml/item54.xml><?xml version="1.0" encoding="utf-8"?>
-<TemplafySlideFormConfiguration><![CDATA[{"formFields":[],"formDataEntries":[]}]]></TemplafySlideFormConfiguration>
+<TemplafySlideTemplateConfiguration><![CDATA[{"slideVersion":1,"isValidatorEnabled":false,"isLocked":false,"elementsMetadata":[],"slideId":"1480204099429072978","enableDocumentContentUpdater":false,"version":"2.0"}]]></TemplafySlideTemplateConfiguration>
 </file>
 
 <file path=customXml/item55.xml><?xml version="1.0" encoding="utf-8"?>
@@ -39999,11 +40002,16 @@
 </file>
 
 <file path=customXml/item57.xml><?xml version="1.0" encoding="utf-8"?>
-<TemplafySlideTemplateConfiguration><![CDATA[{"slideVersion":1,"isValidatorEnabled":false,"isLocked":false,"elementsMetadata":[],"slideId":"1480204099429072944","enableDocumentContentUpdater":false,"version":"2.0"}]]></TemplafySlideTemplateConfiguration>
+<TemplafySlideFormConfiguration><![CDATA[{"formFields":[],"formDataEntries":[]}]]></TemplafySlideFormConfiguration>
 </file>
 
 <file path=customXml/item58.xml><?xml version="1.0" encoding="utf-8"?>
-<TemplafySlideTemplateConfiguration><![CDATA[{"slideVersion":1,"isValidatorEnabled":false,"isLocked":false,"elementsMetadata":[],"slideId":"1480204099429072954","enableDocumentContentUpdater":false,"version":"2.0"}]]></TemplafySlideTemplateConfiguration>
+<?mso-contentType ?>
+<FormTemplates xmlns="http://schemas.microsoft.com/sharepoint/v3/contenttype/forms">
+  <Display>DocumentLibraryForm</Display>
+  <Edit>DocumentLibraryForm</Edit>
+  <New>DocumentLibraryForm</New>
+</FormTemplates>
 </file>
 
 <file path=customXml/item59.xml><?xml version="1.0" encoding="utf-8"?>
@@ -40011,23 +40019,23 @@
 </file>
 
 <file path=customXml/item6.xml><?xml version="1.0" encoding="utf-8"?>
+<TemplafySlideTemplateConfiguration><![CDATA[{"slideVersion":1,"isValidatorEnabled":false,"isLocked":false,"elementsMetadata":[],"slideId":"1480204099429072940","enableDocumentContentUpdater":false,"version":"2.0"}]]></TemplafySlideTemplateConfiguration>
+</file>
+
+<file path=customXml/item60.xml><?xml version="1.0" encoding="utf-8"?>
 <TemplafySlideFormConfiguration><![CDATA[{"formFields":[],"formDataEntries":[]}]]></TemplafySlideFormConfiguration>
 </file>
 
-<file path=customXml/item60.xml><?xml version="1.0" encoding="utf-8"?>
-<TemplafySlideTemplateConfiguration><![CDATA[{"slideVersion":1,"isValidatorEnabled":false,"isLocked":false,"elementsMetadata":[],"slideId":"1480204099429072936","enableDocumentContentUpdater":false,"version":"2.0"}]]></TemplafySlideTemplateConfiguration>
-</file>
-
 <file path=customXml/item61.xml><?xml version="1.0" encoding="utf-8"?>
-<TemplafySlideTemplateConfiguration><![CDATA[{"slideVersion":1,"isValidatorEnabled":false,"isLocked":false,"elementsMetadata":[],"slideId":"1480204099429072979","enableDocumentContentUpdater":false,"version":"2.0"}]]></TemplafySlideTemplateConfiguration>
+<TemplafySlideTemplateConfiguration><![CDATA[{"slideVersion":1,"isValidatorEnabled":false,"isLocked":false,"elementsMetadata":[],"slideId":"1480204099429072960","enableDocumentContentUpdater":false,"version":"2.0"}]]></TemplafySlideTemplateConfiguration>
 </file>
 
 <file path=customXml/item62.xml><?xml version="1.0" encoding="utf-8"?>
-<TemplafySlideTemplateConfiguration><![CDATA[{"slideVersion":1,"isValidatorEnabled":false,"isLocked":false,"elementsMetadata":[],"slideId":"1480204099429072968","enableDocumentContentUpdater":false,"version":"2.0"}]]></TemplafySlideTemplateConfiguration>
+<TemplafySlideTemplateConfiguration><![CDATA[{"slideVersion":1,"isValidatorEnabled":false,"isLocked":false,"elementsMetadata":[],"slideId":"1480204099429072962","enableDocumentContentUpdater":false,"version":"2.0"}]]></TemplafySlideTemplateConfiguration>
 </file>
 
 <file path=customXml/item63.xml><?xml version="1.0" encoding="utf-8"?>
-<TemplafySlideFormConfiguration><![CDATA[{"formFields":[],"formDataEntries":[]}]]></TemplafySlideFormConfiguration>
+<TemplafySlideTemplateConfiguration><![CDATA[{"slideVersion":1,"isValidatorEnabled":false,"isLocked":false,"elementsMetadata":[],"slideId":"1480204099429072970","enableDocumentContentUpdater":false,"version":"2.0"}]]></TemplafySlideTemplateConfiguration>
 </file>
 
 <file path=customXml/item64.xml><?xml version="1.0" encoding="utf-8"?>
@@ -40035,15 +40043,15 @@
 </file>
 
 <file path=customXml/item65.xml><?xml version="1.0" encoding="utf-8"?>
-<TemplafySlideFormConfiguration><![CDATA[{"formFields":[],"formDataEntries":[]}]]></TemplafySlideFormConfiguration>
+<TemplafyTemplateConfiguration><![CDATA[{"elementsMetadata":[{"type":"shape","id":"b9c9f60e-a202-41c6-977a-2c50b6b6bbba","elementConfiguration":{"type":"text","disableUpdates":false}},{"type":"shape","id":"35d0ee82-b9c0-4e37-b31b-01896c88a511","elementConfiguration":{"binding":"{{FormatDateTime(Now(),Translate(\"Format_CustomD\",UserProfile.DocumentLanguage.Language.Language),UserProfile.DocumentLanguage.Language.Language)}}","visibility":"","type":"text","disableUpdates":false}},{"type":"shape","id":"af04734d-5c8b-4284-babb-4c50e3a59b4c","elementConfiguration":{"binding":"{{UserProfile.Name}}","type":"text","disableUpdates":false}},{"type":"shape","id":"558fe9e8-a2db-4854-9d7e-7c25ff21ab0b","elementConfiguration":{"visibility":"{{IfElse(Equals(Form.Privacy_Information.Name, \"Highly Confidential\"), VisibilityType.Visible, VisibilityType.Hidden)}}","type":"text","disableUpdates":false}},{"type":"shape","id":"1efe108f-4c60-4820-bf02-2e53e7a42884","elementConfiguration":{"visibility":"{{IfElse(Equals(Form.Privacy_Information.Name, \"Confidential\"), VisibilityType.Visible, VisibilityType.Hidden)}}","type":"text","disableUpdates":false}},{"type":"shape","id":"7abd068b-a4ce-4f78-b201-191b1d5ff397","elementConfiguration":{"visibility":"{{IfElse(Equals(Form.Privacy_Information.Name, \"General\"), VisibilityType.Visible, VisibilityType.Hidden)}}","type":"text","disableUpdates":false}},{"type":"shape","id":"842a7cf7-f29e-40d2-8d65-efb4a78c89e9","elementConfiguration":{"visibility":"{{IfElse(Equals(Form.Privacy_Information.Name, \"Public\"), VisibilityType.Visible, VisibilityType.Hidden)}}","type":"text","disableUpdates":false}},{"type":"shape","id":"425d340e-7bfc-4685-b2d0-ed996d007090","elementConfiguration":{"visibility":"{{IfElse(Equals(Form.Privacy_Information.Name, \"Highly Confidential\"), VisibilityType.Visible, VisibilityType.Hidden)}}","type":"text","disableUpdates":false}},{"type":"shape","id":"b3fe5475-1c13-49cc-9f86-d88c4995a354","elementConfiguration":{"visibility":"{{IfElse(Equals(Form.Privacy_Information.Name, \"Confidential\"), VisibilityType.Visible, VisibilityType.Hidden)}}","type":"text","disableUpdates":false}},{"type":"shape","id":"f5eea981-aefe-4cb0-8211-b918a14b5a15","elementConfiguration":{"visibility":"{{IfElse(Equals(Form.Privacy_Information.Name, \"General\"), VisibilityType.Visible, VisibilityType.Hidden)}}","type":"text","disableUpdates":false}},{"type":"shape","id":"9081ab6c-a915-48f5-ad45-6e1e44995221","elementConfiguration":{"visibility":"{{IfElse(Equals(Form.Privacy_Information.Name, \"Public\"), VisibilityType.Visible, VisibilityType.Hidden)}}","type":"text","disableUpdates":false}},{"type":"shape","id":"610251bb-1c41-4bb4-a4e4-b687da0fa0e8","elementConfiguration":{"visibility":"{{IfElse(Equals(Form.Privacy_Information.Name, \"Highly Confidential\"), VisibilityType.Visible, VisibilityType.Hidden)}}","type":"text","disableUpdates":false}},{"type":"shape","id":"685e317d-51da-495e-bcf5-d295d2e808c4","elementConfiguration":{"visibility":"{{IfElse(Equals(Form.Privacy_Information.Name, \"Confidential\"), VisibilityType.Visible, VisibilityType.Hidden)}}","type":"text","disableUpdates":false}},{"type":"shape","id":"f0eea027-2678-433b-92ea-b18caffa0dce","elementConfiguration":{"visibility":"{{IfElse(Equals(Form.Privacy_Information.Name, \"General\"), VisibilityType.Visible, VisibilityType.Hidden)}}","type":"text","disableUpdates":false}},{"type":"shape","id":"c5a58f47-aef3-41fa-87bd-3f28932c068d","elementConfiguration":{"visibility":"{{IfElse(Equals(Form.Privacy_Information.Name, \"Public\"), VisibilityType.Visible, VisibilityType.Hidden)}}","type":"text","disableUpdates":false}},{"type":"shape","id":"fa6eb347-6f1a-41a5-86ab-f3ed2331dc4f","elementConfiguration":{"binding":"{{FormatDateTime(Now(),Translate(\"Format_CustomD\",UserProfile.DocumentLanguage.Language.Language),UserProfile.DocumentLanguage.Language.Language)}}","visibility":"","type":"text","disableUpdates":false}},{"type":"shape","id":"1c996d7c-1d8e-4a3f-b2e1-cfce78d0281c","elementConfiguration":{"type":"text","disableUpdates":false}},{"type":"shape","id":"bbc6435c-78b3-4e83-82f4-fa97de65b29d","elementConfiguration":{"binding":"{{UserProfile.Name}}","type":"text","disableUpdates":false}},{"type":"shape","id":"df2bbf1d-a17f-446d-b874-21c0cad9b214","elementConfiguration":{"binding":"{{FormatDateTime(Now(),Translate(\"Format_CustomD\",UserProfile.DocumentLanguage.Language.Language),UserProfile.DocumentLanguage.Language.Language)}}","visibility":"","type":"text","disableUpdates":false}},{"type":"shape","id":"7453f512-fe25-448d-aeca-165ef7d1bc6f","elementConfiguration":{"type":"text","disableUpdates":false}},{"type":"shape","id":"14eb11d6-1d84-46b2-9faa-f33aade495f4","elementConfiguration":{"binding":"{{UserProfile.Name}}","type":"text","disableUpdates":false}},{"type":"shape","id":"2aadfe5e-eee6-4d34-951d-2572b44727d5","elementConfiguration":{"visibility":"{{IfElse(Equals(Form.Privacy_Information.Name, \"Highly Confidential\"), VisibilityType.Visible, VisibilityType.Hidden)}}","type":"text","disableUpdates":false}},{"type":"shape","id":"22f04441-80bc-4991-b41e-277bd813d087","elementConfiguration":{"visibility":"{{IfElse(Equals(Form.Privacy_Information.Name, \"Confidential\"), VisibilityType.Visible, VisibilityType.Hidden)}}","type":"text","disableUpdates":false}},{"type":"shape","id":"fba74629-e33a-4ee7-aaac-8211618a892a","elementConfiguration":{"visibility":"{{IfElse(Equals(Form.Privacy_Information.Name, \"General\"), VisibilityType.Visible, VisibilityType.Hidden)}}","type":"text","disableUpdates":false}},{"type":"shape","id":"7180391f-48c2-43de-ab25-c7939b6c8cd9","elementConfiguration":{"visibility":"{{IfElse(Equals(Form.Privacy_Information.Name, \"Public\"), VisibilityType.Visible, VisibilityType.Hidden)}}","type":"text","disableUpdates":false}},{"type":"shape","id":"7b3ad3c9-70c3-4447-a8b0-776bcfaae48f","elementConfiguration":{"binding":"{{FormatDateTime(Now(),Translate(\"Format_CustomD\",UserProfile.DocumentLanguage.Language.Language),UserProfile.DocumentLanguage.Language.Language)}}","visibility":"","type":"text","disableUpdates":false}},{"type":"shape","id":"b1874bbb-97ef-4e61-ad5f-36dc19b7f989","elementConfiguration":{"type":"text","disableUpdates":false}},{"type":"shape","id":"b1d832d3-6988-4aa1-ba8c-433387221732","elementConfiguration":{"binding":"{{UserProfile.Name}}","type":"text","disableUpdates":false}},{"type":"shape","id":"75ff590f-65b8-4387-a61a-3d297c149663","elementConfiguration":{"visibility":"{{IfElse(Equals(Form.Privacy_Information.Name, \"Highly Confidential\"), VisibilityType.Visible, VisibilityType.Hidden)}}","type":"text","disableUpdates":false}},{"type":"shape","id":"3db42456-7fb4-43c3-b013-ca7f0cd76140","elementConfiguration":{"visibility":"{{IfElse(Equals(Form.Privacy_Information.Name, \"Confidential\"), VisibilityType.Visible, VisibilityType.Hidden)}}","type":"text","disableUpdates":false}},{"type":"shape","id":"8ef51664-341b-46dd-9894-c9c052ef2031","elementConfiguration":{"visibility":"{{IfElse(Equals(Form.Privacy_Information.Name, \"General\"), VisibilityType.Visible, VisibilityType.Hidden)}}","type":"text","disableUpdates":false}},{"type":"shape","id":"9df4ba84-cc1c-40ea-abfe-7db786986830","elementConfiguration":{"visibility":"{{IfElse(Equals(Form.Privacy_Information.Name, \"Public\"), VisibilityType.Visible, VisibilityType.Hidden)}}","type":"text","disableUpdates":false}}],"transformationConfigurations":[],"templateName":"Bid_Template_EN_2025","templateDescription":"V.1.2","enableDocumentContentUpdater":true,"version":"2.0"}]]></TemplafyTemplateConfiguration>
 </file>
 
 <file path=customXml/item66.xml><?xml version="1.0" encoding="utf-8"?>
-<TemplafySlideTemplateConfiguration><![CDATA[{"slideVersion":1,"isValidatorEnabled":false,"isLocked":false,"elementsMetadata":[],"slideId":"1480204099429072973","enableDocumentContentUpdater":false,"version":"2.0"}]]></TemplafySlideTemplateConfiguration>
+<TemplafySlideTemplateConfiguration><![CDATA[{"slideVersion":1,"isValidatorEnabled":false,"isLocked":false,"elementsMetadata":[],"slideId":"1480204099429072906","enableDocumentContentUpdater":false,"version":"2.0"}]]></TemplafySlideTemplateConfiguration>
 </file>
 
 <file path=customXml/item67.xml><?xml version="1.0" encoding="utf-8"?>
-<TemplafySlideTemplateConfiguration><![CDATA[{"slideVersion":1,"isValidatorEnabled":false,"isLocked":false,"elementsMetadata":[],"slideId":"1480204099429072897","enableDocumentContentUpdater":false,"version":"2.0"}]]></TemplafySlideTemplateConfiguration>
+<TemplafySlideTemplateConfiguration><![CDATA[{"slideVersion":1,"isValidatorEnabled":false,"isLocked":false,"elementsMetadata":[{"type":"shape","elementConfiguration":{"visibility":"{{IfElse(Equals(Form.Privacy_Information.Name, \"Highly Confidential\"), VisibilityType.Visible, VisibilityType.Hidden)}}","type":"text","disableUpdates":false}},{"type":"shape","elementConfiguration":{"visibility":"{{IfElse(Equals(Form.Privacy_Information.Name, \"Confidential\"), VisibilityType.Visible, VisibilityType.Hidden)}}","type":"text","disableUpdates":false}},{"type":"shape","elementConfiguration":{"visibility":"{{IfElse(Equals(Form.Privacy_Information.Name, \"General\"), VisibilityType.Visible, VisibilityType.Hidden)}}","type":"text","disableUpdates":false}},{"type":"shape","elementConfiguration":{"visibility":"{{IfElse(Equals(Form.Privacy_Information.Name, \"Public\"), VisibilityType.Visible, VisibilityType.Hidden)}}","type":"text","disableUpdates":false}}],"slideId":"1480204099429072900","enableDocumentContentUpdater":false,"version":"2.0"}]]></TemplafySlideTemplateConfiguration>
 </file>
 
 <file path=customXml/item68.xml><?xml version="1.0" encoding="utf-8"?>
@@ -40055,15 +40063,15 @@
 </file>
 
 <file path=customXml/item7.xml><?xml version="1.0" encoding="utf-8"?>
-<TemplafyTemplateConfiguration><![CDATA[{"elementsMetadata":[{"type":"shape","id":"b9c9f60e-a202-41c6-977a-2c50b6b6bbba","elementConfiguration":{"type":"text","disableUpdates":false}},{"type":"shape","id":"35d0ee82-b9c0-4e37-b31b-01896c88a511","elementConfiguration":{"binding":"{{FormatDateTime(Now(),Translate(\"Format_CustomD\",UserProfile.DocumentLanguage.Language.Language),UserProfile.DocumentLanguage.Language.Language)}}","visibility":"","type":"text","disableUpdates":false}},{"type":"shape","id":"af04734d-5c8b-4284-babb-4c50e3a59b4c","elementConfiguration":{"binding":"{{UserProfile.Name}}","type":"text","disableUpdates":false}},{"type":"shape","id":"558fe9e8-a2db-4854-9d7e-7c25ff21ab0b","elementConfiguration":{"visibility":"{{IfElse(Equals(Form.Privacy_Information.Name, \"Highly Confidential\"), VisibilityType.Visible, VisibilityType.Hidden)}}","type":"text","disableUpdates":false}},{"type":"shape","id":"1efe108f-4c60-4820-bf02-2e53e7a42884","elementConfiguration":{"visibility":"{{IfElse(Equals(Form.Privacy_Information.Name, \"Confidential\"), VisibilityType.Visible, VisibilityType.Hidden)}}","type":"text","disableUpdates":false}},{"type":"shape","id":"7abd068b-a4ce-4f78-b201-191b1d5ff397","elementConfiguration":{"visibility":"{{IfElse(Equals(Form.Privacy_Information.Name, \"General\"), VisibilityType.Visible, VisibilityType.Hidden)}}","type":"text","disableUpdates":false}},{"type":"shape","id":"842a7cf7-f29e-40d2-8d65-efb4a78c89e9","elementConfiguration":{"visibility":"{{IfElse(Equals(Form.Privacy_Information.Name, \"Public\"), VisibilityType.Visible, VisibilityType.Hidden)}}","type":"text","disableUpdates":false}},{"type":"shape","id":"425d340e-7bfc-4685-b2d0-ed996d007090","elementConfiguration":{"visibility":"{{IfElse(Equals(Form.Privacy_Information.Name, \"Highly Confidential\"), VisibilityType.Visible, VisibilityType.Hidden)}}","type":"text","disableUpdates":false}},{"type":"shape","id":"b3fe5475-1c13-49cc-9f86-d88c4995a354","elementConfiguration":{"visibility":"{{IfElse(Equals(Form.Privacy_Information.Name, \"Confidential\"), VisibilityType.Visible, VisibilityType.Hidden)}}","type":"text","disableUpdates":false}},{"type":"shape","id":"f5eea981-aefe-4cb0-8211-b918a14b5a15","elementConfiguration":{"visibility":"{{IfElse(Equals(Form.Privacy_Information.Name, \"General\"), VisibilityType.Visible, VisibilityType.Hidden)}}","type":"text","disableUpdates":false}},{"type":"shape","id":"9081ab6c-a915-48f5-ad45-6e1e44995221","elementConfiguration":{"visibility":"{{IfElse(Equals(Form.Privacy_Information.Name, \"Public\"), VisibilityType.Visible, VisibilityType.Hidden)}}","type":"text","disableUpdates":false}},{"type":"shape","id":"610251bb-1c41-4bb4-a4e4-b687da0fa0e8","elementConfiguration":{"visibility":"{{IfElse(Equals(Form.Privacy_Information.Name, \"Highly Confidential\"), VisibilityType.Visible, VisibilityType.Hidden)}}","type":"text","disableUpdates":false}},{"type":"shape","id":"685e317d-51da-495e-bcf5-d295d2e808c4","elementConfiguration":{"visibility":"{{IfElse(Equals(Form.Privacy_Information.Name, \"Confidential\"), VisibilityType.Visible, VisibilityType.Hidden)}}","type":"text","disableUpdates":false}},{"type":"shape","id":"f0eea027-2678-433b-92ea-b18caffa0dce","elementConfiguration":{"visibility":"{{IfElse(Equals(Form.Privacy_Information.Name, \"General\"), VisibilityType.Visible, VisibilityType.Hidden)}}","type":"text","disableUpdates":false}},{"type":"shape","id":"c5a58f47-aef3-41fa-87bd-3f28932c068d","elementConfiguration":{"visibility":"{{IfElse(Equals(Form.Privacy_Information.Name, \"Public\"), VisibilityType.Visible, VisibilityType.Hidden)}}","type":"text","disableUpdates":false}},{"type":"shape","id":"fa6eb347-6f1a-41a5-86ab-f3ed2331dc4f","elementConfiguration":{"binding":"{{FormatDateTime(Now(),Translate(\"Format_CustomD\",UserProfile.DocumentLanguage.Language.Language),UserProfile.DocumentLanguage.Language.Language)}}","visibility":"","type":"text","disableUpdates":false}},{"type":"shape","id":"1c996d7c-1d8e-4a3f-b2e1-cfce78d0281c","elementConfiguration":{"type":"text","disableUpdates":false}},{"type":"shape","id":"bbc6435c-78b3-4e83-82f4-fa97de65b29d","elementConfiguration":{"binding":"{{UserProfile.Name}}","type":"text","disableUpdates":false}},{"type":"shape","id":"df2bbf1d-a17f-446d-b874-21c0cad9b214","elementConfiguration":{"binding":"{{FormatDateTime(Now(),Translate(\"Format_CustomD\",UserProfile.DocumentLanguage.Language.Language),UserProfile.DocumentLanguage.Language.Language)}}","visibility":"","type":"text","disableUpdates":false}},{"type":"shape","id":"7453f512-fe25-448d-aeca-165ef7d1bc6f","elementConfiguration":{"type":"text","disableUpdates":false}},{"type":"shape","id":"14eb11d6-1d84-46b2-9faa-f33aade495f4","elementConfiguration":{"binding":"{{UserProfile.Name}}","type":"text","disableUpdates":false}},{"type":"shape","id":"2aadfe5e-eee6-4d34-951d-2572b44727d5","elementConfiguration":{"visibility":"{{IfElse(Equals(Form.Privacy_Information.Name, \"Highly Confidential\"), VisibilityType.Visible, VisibilityType.Hidden)}}","type":"text","disableUpdates":false}},{"type":"shape","id":"22f04441-80bc-4991-b41e-277bd813d087","elementConfiguration":{"visibility":"{{IfElse(Equals(Form.Privacy_Information.Name, \"Confidential\"), VisibilityType.Visible, VisibilityType.Hidden)}}","type":"text","disableUpdates":false}},{"type":"shape","id":"fba74629-e33a-4ee7-aaac-8211618a892a","elementConfiguration":{"visibility":"{{IfElse(Equals(Form.Privacy_Information.Name, \"General\"), VisibilityType.Visible, VisibilityType.Hidden)}}","type":"text","disableUpdates":false}},{"type":"shape","id":"7180391f-48c2-43de-ab25-c7939b6c8cd9","elementConfiguration":{"visibility":"{{IfElse(Equals(Form.Privacy_Information.Name, \"Public\"), VisibilityType.Visible, VisibilityType.Hidden)}}","type":"text","disableUpdates":false}},{"type":"shape","id":"7b3ad3c9-70c3-4447-a8b0-776bcfaae48f","elementConfiguration":{"binding":"{{FormatDateTime(Now(),Translate(\"Format_CustomD\",UserProfile.DocumentLanguage.Language.Language),UserProfile.DocumentLanguage.Language.Language)}}","visibility":"","type":"text","disableUpdates":false}},{"type":"shape","id":"b1874bbb-97ef-4e61-ad5f-36dc19b7f989","elementConfiguration":{"type":"text","disableUpdates":false}},{"type":"shape","id":"b1d832d3-6988-4aa1-ba8c-433387221732","elementConfiguration":{"binding":"{{UserProfile.Name}}","type":"text","disableUpdates":false}},{"type":"shape","id":"75ff590f-65b8-4387-a61a-3d297c149663","elementConfiguration":{"visibility":"{{IfElse(Equals(Form.Privacy_Information.Name, \"Highly Confidential\"), VisibilityType.Visible, VisibilityType.Hidden)}}","type":"text","disableUpdates":false}},{"type":"shape","id":"3db42456-7fb4-43c3-b013-ca7f0cd76140","elementConfiguration":{"visibility":"{{IfElse(Equals(Form.Privacy_Information.Name, \"Confidential\"), VisibilityType.Visible, VisibilityType.Hidden)}}","type":"text","disableUpdates":false}},{"type":"shape","id":"8ef51664-341b-46dd-9894-c9c052ef2031","elementConfiguration":{"visibility":"{{IfElse(Equals(Form.Privacy_Information.Name, \"General\"), VisibilityType.Visible, VisibilityType.Hidden)}}","type":"text","disableUpdates":false}},{"type":"shape","id":"9df4ba84-cc1c-40ea-abfe-7db786986830","elementConfiguration":{"visibility":"{{IfElse(Equals(Form.Privacy_Information.Name, \"Public\"), VisibilityType.Visible, VisibilityType.Hidden)}}","type":"text","disableUpdates":false}}],"transformationConfigurations":[],"templateName":"Bid_Template_EN_2025","templateDescription":"V.1.2","enableDocumentContentUpdater":true,"version":"2.0"}]]></TemplafyTemplateConfiguration>
+<TemplafySlideFormConfiguration><![CDATA[{"formFields":[],"formDataEntries":[]}]]></TemplafySlideFormConfiguration>
 </file>
 
 <file path=customXml/item70.xml><?xml version="1.0" encoding="utf-8"?>
-<TemplafySlideTemplateConfiguration><![CDATA[{"slideVersion":1,"isValidatorEnabled":false,"isLocked":false,"elementsMetadata":[],"slideId":"1480204099429072957","enableDocumentContentUpdater":false,"version":"2.0"}]]></TemplafySlideTemplateConfiguration>
+<TemplafySlideFormConfiguration><![CDATA[{"formFields":[],"formDataEntries":[]}]]></TemplafySlideFormConfiguration>
 </file>
 
 <file path=customXml/item71.xml><?xml version="1.0" encoding="utf-8"?>
-<TemplafySlideTemplateConfiguration><![CDATA[{"slideVersion":1,"isValidatorEnabled":false,"isLocked":false,"elementsMetadata":[],"slideId":"1480204099429072906","enableDocumentContentUpdater":false,"version":"2.0"}]]></TemplafySlideTemplateConfiguration>
+<TemplafySlideFormConfiguration><![CDATA[{"formFields":[],"formDataEntries":[]}]]></TemplafySlideFormConfiguration>
 </file>
 
 <file path=customXml/item72.xml><?xml version="1.0" encoding="utf-8"?>
@@ -40071,19 +40079,19 @@
 </file>
 
 <file path=customXml/item73.xml><?xml version="1.0" encoding="utf-8"?>
-<TemplafySlideTemplateConfiguration><![CDATA[{"slideVersion":1,"isValidatorEnabled":false,"isLocked":false,"elementsMetadata":[],"slideId":"1480204099429072902","enableDocumentContentUpdater":false,"version":"2.0"}]]></TemplafySlideTemplateConfiguration>
+<TemplafySlideTemplateConfiguration><![CDATA[{"slideVersion":1,"isValidatorEnabled":false,"isLocked":false,"elementsMetadata":[],"slideId":"1480204099429072973","enableDocumentContentUpdater":false,"version":"2.0"}]]></TemplafySlideTemplateConfiguration>
 </file>
 
 <file path=customXml/item74.xml><?xml version="1.0" encoding="utf-8"?>
-<TemplafySlideFormConfiguration><![CDATA[{"formFields":[],"formDataEntries":[]}]]></TemplafySlideFormConfiguration>
+<TemplafySlideTemplateConfiguration><![CDATA[{"slideVersion":1,"isValidatorEnabled":false,"isLocked":false,"elementsMetadata":[],"slideId":"1480204099429072941","enableDocumentContentUpdater":false,"version":"2.0"}]]></TemplafySlideTemplateConfiguration>
 </file>
 
 <file path=customXml/item75.xml><?xml version="1.0" encoding="utf-8"?>
-<TemplafySlideFormConfiguration><![CDATA[{"formFields":[],"formDataEntries":[]}]]></TemplafySlideFormConfiguration>
+<TemplafySlideTemplateConfiguration><![CDATA[{"slideVersion":1,"isValidatorEnabled":false,"isLocked":false,"elementsMetadata":[],"slideId":"1480204099429072942","enableDocumentContentUpdater":false,"version":"2.0"}]]></TemplafySlideTemplateConfiguration>
 </file>
 
 <file path=customXml/item76.xml><?xml version="1.0" encoding="utf-8"?>
-<TemplafySlideFormConfiguration><![CDATA[{"formFields":[],"formDataEntries":[]}]]></TemplafySlideFormConfiguration>
+<TemplafySlideTemplateConfiguration><![CDATA[{"slideVersion":1,"isValidatorEnabled":false,"isLocked":false,"elementsMetadata":[],"slideId":"1480204099429072920","enableDocumentContentUpdater":false,"version":"2.0"}]]></TemplafySlideTemplateConfiguration>
 </file>
 
 <file path=customXml/item77.xml><?xml version="1.0" encoding="utf-8"?>
@@ -40091,59 +40099,59 @@
 </file>
 
 <file path=customXml/item78.xml><?xml version="1.0" encoding="utf-8"?>
-<TemplafySlideTemplateConfiguration><![CDATA[{"slideVersion":1,"isValidatorEnabled":false,"isLocked":false,"elementsMetadata":[],"slideId":"1480204099429072966","enableDocumentContentUpdater":false,"version":"2.0"}]]></TemplafySlideTemplateConfiguration>
+<TemplafySlideTemplateConfiguration><![CDATA[{"slideVersion":1,"isValidatorEnabled":false,"isLocked":false,"elementsMetadata":[],"slideId":"1480204099429072979","enableDocumentContentUpdater":false,"version":"2.0"}]]></TemplafySlideTemplateConfiguration>
 </file>
 
 <file path=customXml/item79.xml><?xml version="1.0" encoding="utf-8"?>
-<TemplafySlideTemplateConfiguration><![CDATA[{"slideVersion":1,"isValidatorEnabled":false,"isLocked":false,"elementsMetadata":[],"slideId":"1480204099429072918","enableDocumentContentUpdater":false,"version":"2.0"}]]></TemplafySlideTemplateConfiguration>
+<TemplafySlideTemplateConfiguration><![CDATA[{"slideVersion":1,"isValidatorEnabled":false,"isLocked":false,"elementsMetadata":[],"slideId":"1480204099429072908","enableDocumentContentUpdater":false,"version":"2.0"}]]></TemplafySlideTemplateConfiguration>
 </file>
 
 <file path=customXml/item8.xml><?xml version="1.0" encoding="utf-8"?>
+<TemplafySlideTemplateConfiguration><![CDATA[{"slideVersion":1,"isValidatorEnabled":false,"isLocked":false,"elementsMetadata":[],"slideId":"1480204099429072950","enableDocumentContentUpdater":false,"version":"2.0"}]]></TemplafySlideTemplateConfiguration>
+</file>
+
+<file path=customXml/item80.xml><?xml version="1.0" encoding="utf-8"?>
+<TemplafySlideTemplateConfiguration><![CDATA[{"slideVersion":1,"isValidatorEnabled":false,"isLocked":false,"elementsMetadata":[],"slideId":"1480204099429072937","enableDocumentContentUpdater":false,"version":"2.0"}]]></TemplafySlideTemplateConfiguration>
+</file>
+
+<file path=customXml/item81.xml><?xml version="1.0" encoding="utf-8"?>
+<TemplafySlideTemplateConfiguration><![CDATA[{"slideVersion":1,"isValidatorEnabled":false,"isLocked":false,"elementsMetadata":[],"slideId":"1480204099429072913","enableDocumentContentUpdater":false,"version":"2.0"}]]></TemplafySlideTemplateConfiguration>
+</file>
+
+<file path=customXml/item82.xml><?xml version="1.0" encoding="utf-8"?>
+<TemplafySlideTemplateConfiguration><![CDATA[{"slideVersion":1,"isValidatorEnabled":false,"isLocked":false,"elementsMetadata":[],"slideId":"1480204099429072949","enableDocumentContentUpdater":false,"version":"2.0"}]]></TemplafySlideTemplateConfiguration>
+</file>
+
+<file path=customXml/item83.xml><?xml version="1.0" encoding="utf-8"?>
+<TemplafySlideTemplateConfiguration><![CDATA[{"slideVersion":1,"isValidatorEnabled":false,"isLocked":false,"elementsMetadata":[],"slideId":"1480204099429072896","enableDocumentContentUpdater":false,"version":"2.0"}]]></TemplafySlideTemplateConfiguration>
+</file>
+
+<file path=customXml/item84.xml><?xml version="1.0" encoding="utf-8"?>
 <TemplafySlideFormConfiguration><![CDATA[{"formFields":[],"formDataEntries":[]}]]></TemplafySlideFormConfiguration>
 </file>
 
-<file path=customXml/item80.xml><?xml version="1.0" encoding="utf-8"?>
+<file path=customXml/item85.xml><?xml version="1.0" encoding="utf-8"?>
 <TemplafySlideFormConfiguration><![CDATA[{"formFields":[],"formDataEntries":[]}]]></TemplafySlideFormConfiguration>
 </file>
 
-<file path=customXml/item81.xml><?xml version="1.0" encoding="utf-8"?>
-<TemplafySlideTemplateConfiguration><![CDATA[{"slideVersion":1,"isValidatorEnabled":false,"isLocked":false,"elementsMetadata":[],"slideId":"1480204099429072939","enableDocumentContentUpdater":false,"version":"2.0"}]]></TemplafySlideTemplateConfiguration>
+<file path=customXml/item86.xml><?xml version="1.0" encoding="utf-8"?>
+<TemplafySlideTemplateConfiguration><![CDATA[{"slideVersion":1,"isValidatorEnabled":false,"isLocked":false,"elementsMetadata":[],"slideId":"1480204099429072958","enableDocumentContentUpdater":false,"version":"2.0"}]]></TemplafySlideTemplateConfiguration>
 </file>
 
-<file path=customXml/item82.xml><?xml version="1.0" encoding="utf-8"?>
-<TemplafySlideTemplateConfiguration><![CDATA[{"slideVersion":1,"isValidatorEnabled":false,"isLocked":false,"elementsMetadata":[],"slideId":"1480204099429072908","enableDocumentContentUpdater":false,"version":"2.0"}]]></TemplafySlideTemplateConfiguration>
+<file path=customXml/item87.xml><?xml version="1.0" encoding="utf-8"?>
+<TemplafySlideTemplateConfiguration><![CDATA[{"slideVersion":1,"isValidatorEnabled":false,"isLocked":false,"elementsMetadata":[],"slideId":"1480204099429072963","enableDocumentContentUpdater":false,"version":"2.0"}]]></TemplafySlideTemplateConfiguration>
 </file>
 
-<file path=customXml/item83.xml><?xml version="1.0" encoding="utf-8"?>
-<TemplafySlideTemplateConfiguration><![CDATA[{"slideVersion":1,"isValidatorEnabled":false,"isLocked":false,"elementsMetadata":[],"slideId":"1480204099429072945","enableDocumentContentUpdater":false,"version":"2.0"}]]></TemplafySlideTemplateConfiguration>
-</file>
-
-<file path=customXml/item84.xml><?xml version="1.0" encoding="utf-8"?>
-<TemplafySlideTemplateConfiguration><![CDATA[{"slideVersion":1,"isValidatorEnabled":false,"isLocked":false,"elementsMetadata":[],"slideId":"1480204099429072947","enableDocumentContentUpdater":false,"version":"2.0"}]]></TemplafySlideTemplateConfiguration>
-</file>
-
-<file path=customXml/item85.xml><?xml version="1.0" encoding="utf-8"?>
-<TemplafySlideTemplateConfiguration><![CDATA[{"slideVersion":1,"isValidatorEnabled":false,"isLocked":false,"elementsMetadata":[],"slideId":"1480204099429072976","enableDocumentContentUpdater":false,"version":"2.0"}]]></TemplafySlideTemplateConfiguration>
-</file>
-
-<file path=customXml/item86.xml><?xml version="1.0" encoding="utf-8"?>
+<file path=customXml/item88.xml><?xml version="1.0" encoding="utf-8"?>
 <TemplafySlideFormConfiguration><![CDATA[{"formFields":[],"formDataEntries":[]}]]></TemplafySlideFormConfiguration>
 </file>
 
-<file path=customXml/item87.xml><?xml version="1.0" encoding="utf-8"?>
-<TemplafySlideTemplateConfiguration><![CDATA[{"slideVersion":1,"isValidatorEnabled":false,"isLocked":false,"elementsMetadata":[],"slideId":"1480204099429072941","enableDocumentContentUpdater":false,"version":"2.0"}]]></TemplafySlideTemplateConfiguration>
-</file>
-
-<file path=customXml/item88.xml><?xml version="1.0" encoding="utf-8"?>
-<TemplafySlideTemplateConfiguration><![CDATA[{"slideVersion":1,"isValidatorEnabled":false,"isLocked":false,"elementsMetadata":[],"slideId":"1480204099429072921","enableDocumentContentUpdater":false,"version":"2.0"}]]></TemplafySlideTemplateConfiguration>
-</file>
-
 <file path=customXml/item89.xml><?xml version="1.0" encoding="utf-8"?>
-<TemplafySlideTemplateConfiguration><![CDATA[{"slideVersion":1,"isValidatorEnabled":false,"isLocked":false,"elementsMetadata":[],"slideId":"1480204099429072928","enableDocumentContentUpdater":false,"version":"2.0"}]]></TemplafySlideTemplateConfiguration>
+<TemplafySlideFormConfiguration><![CDATA[{"formFields":[],"formDataEntries":[]}]]></TemplafySlideFormConfiguration>
 </file>
 
 <file path=customXml/item9.xml><?xml version="1.0" encoding="utf-8"?>
-<TemplafySlideTemplateConfiguration><![CDATA[{"slideVersion":1,"isValidatorEnabled":false,"isLocked":false,"elementsMetadata":[],"slideId":"1480204099429072923","enableDocumentContentUpdater":false,"version":"2.0"}]]></TemplafySlideTemplateConfiguration>
+<TemplafySlideFormConfiguration><![CDATA[{"formFields":[],"formDataEntries":[]}]]></TemplafySlideFormConfiguration>
 </file>
 
 <file path=customXml/item90.xml><?xml version="1.0" encoding="utf-8"?>
@@ -40151,15 +40159,15 @@
 </file>
 
 <file path=customXml/item91.xml><?xml version="1.0" encoding="utf-8"?>
-<TemplafySlideTemplateConfiguration><![CDATA[{"slideVersion":1,"isValidatorEnabled":false,"isLocked":false,"elementsMetadata":[],"slideId":"1480204099429072948","enableDocumentContentUpdater":false,"version":"2.0"}]]></TemplafySlideTemplateConfiguration>
+<TemplafySlideFormConfiguration><![CDATA[{"formFields":[],"formDataEntries":[]}]]></TemplafySlideFormConfiguration>
 </file>
 
 <file path=customXml/item92.xml><?xml version="1.0" encoding="utf-8"?>
-<TemplafySlideTemplateConfiguration><![CDATA[{"slideVersion":1,"isValidatorEnabled":false,"isLocked":false,"elementsMetadata":[{"type":"shape","elementConfiguration":{"visibility":"{{IfElse(Equals(Form.Privacy_Information.Name, \"Highly Confidential\"), VisibilityType.Visible, VisibilityType.Hidden)}}","type":"text","disableUpdates":false}},{"type":"shape","elementConfiguration":{"visibility":"{{IfElse(Equals(Form.Privacy_Information.Name, \"Confidential\"), VisibilityType.Visible, VisibilityType.Hidden)}}","type":"text","disableUpdates":false}},{"type":"shape","elementConfiguration":{"visibility":"{{IfElse(Equals(Form.Privacy_Information.Name, \"General\"), VisibilityType.Visible, VisibilityType.Hidden)}}","type":"text","disableUpdates":false}},{"type":"shape","elementConfiguration":{"visibility":"{{IfElse(Equals(Form.Privacy_Information.Name, \"Public\"), VisibilityType.Visible, VisibilityType.Hidden)}}","type":"text","disableUpdates":false}}],"slideId":"1480204099429072900","enableDocumentContentUpdater":false,"version":"2.0"}]]></TemplafySlideTemplateConfiguration>
+<TemplafySlideFormConfiguration><![CDATA[{"formFields":[],"formDataEntries":[]}]]></TemplafySlideFormConfiguration>
 </file>
 
 <file path=customXml/item93.xml><?xml version="1.0" encoding="utf-8"?>
-<TemplafySlideFormConfiguration><![CDATA[{"formFields":[],"formDataEntries":[]}]]></TemplafySlideFormConfiguration>
+<TemplafySlideTemplateConfiguration><![CDATA[{"slideVersion":1,"isValidatorEnabled":false,"isLocked":false,"elementsMetadata":[],"slideId":"1480204099429072909","enableDocumentContentUpdater":false,"version":"2.0"}]]></TemplafySlideTemplateConfiguration>
 </file>
 
 <file path=customXml/item94.xml><?xml version="1.0" encoding="utf-8"?>
@@ -40167,397 +40175,122 @@
 </file>
 
 <file path=customXml/item95.xml><?xml version="1.0" encoding="utf-8"?>
-<TemplafySlideTemplateConfiguration><![CDATA[{"slideVersion":1,"isValidatorEnabled":false,"isLocked":false,"elementsMetadata":[],"slideId":"1480204099429072971","enableDocumentContentUpdater":false,"version":"2.0"}]]></TemplafySlideTemplateConfiguration>
+<TemplafySlideTemplateConfiguration><![CDATA[{"slideVersion":1,"isValidatorEnabled":false,"isLocked":false,"elementsMetadata":[],"slideId":"1480204099429072933","enableDocumentContentUpdater":false,"version":"2.0"}]]></TemplafySlideTemplateConfiguration>
 </file>
 
 <file path=customXml/item96.xml><?xml version="1.0" encoding="utf-8"?>
+<TemplafySlideTemplateConfiguration><![CDATA[{"slideVersion":1,"isValidatorEnabled":false,"isLocked":false,"elementsMetadata":[],"slideId":"1480204099429072946","enableDocumentContentUpdater":false,"version":"2.0"}]]></TemplafySlideTemplateConfiguration>
+</file>
+
+<file path=customXml/item97.xml><?xml version="1.0" encoding="utf-8"?>
+<TemplafySlideTemplateConfiguration><![CDATA[{"slideVersion":1,"isValidatorEnabled":false,"isLocked":false,"elementsMetadata":[],"slideId":"1480204099429072951","enableDocumentContentUpdater":false,"version":"2.0"}]]></TemplafySlideTemplateConfiguration>
+</file>
+
+<file path=customXml/item98.xml><?xml version="1.0" encoding="utf-8"?>
+<TemplafySlideTemplateConfiguration><![CDATA[{"slideVersion":1,"isValidatorEnabled":false,"isLocked":false,"elementsMetadata":[],"slideId":"1480204099429072897","enableDocumentContentUpdater":false,"version":"2.0"}]]></TemplafySlideTemplateConfiguration>
+</file>
+
+<file path=customXml/item99.xml><?xml version="1.0" encoding="utf-8"?>
 <TemplafySlideFormConfiguration><![CDATA[{"formFields":[],"formDataEntries":[]}]]></TemplafySlideFormConfiguration>
 </file>
 
-<file path=customXml/item97.xml><?xml version="1.0" encoding="utf-8"?>
-<TemplafySlideTemplateConfiguration><![CDATA[{"slideVersion":1,"isValidatorEnabled":false,"isLocked":false,"elementsMetadata":[],"slideId":"1480204099429072960","enableDocumentContentUpdater":false,"version":"2.0"}]]></TemplafySlideTemplateConfiguration>
-</file>
-
-<file path=customXml/item98.xml><?xml version="1.0" encoding="utf-8"?>
-<TemplafySlideTemplateConfiguration><![CDATA[{"slideVersion":1,"isValidatorEnabled":false,"isLocked":false,"elementsMetadata":[],"slideId":"1480204099429072909","enableDocumentContentUpdater":false,"version":"2.0"}]]></TemplafySlideTemplateConfiguration>
-</file>
-
-<file path=customXml/item99.xml><?xml version="1.0" encoding="utf-8"?>
-<TemplafySlideTemplateConfiguration><![CDATA[{"slideVersion":1,"isValidatorEnabled":false,"isLocked":false,"elementsMetadata":[],"slideId":"1480204099429072974","enableDocumentContentUpdater":false,"version":"2.0"}]]></TemplafySlideTemplateConfiguration>
-</file>
-
 <file path=customXml/itemProps1.xml><?xml version="1.0" encoding="utf-8"?>
-<ds:datastoreItem xmlns:ds="http://schemas.openxmlformats.org/officeDocument/2006/customXml" ds:itemID="{B7EAA44F-EA67-314D-9554-B764719B6235}">
+<ds:datastoreItem xmlns:ds="http://schemas.openxmlformats.org/officeDocument/2006/customXml" ds:itemID="{8C80DD3F-DE8F-5947-8ECC-607232B4BDAC}">
   <ds:schemaRefs/>
 </ds:datastoreItem>
 </file>
 
 <file path=customXml/itemProps10.xml><?xml version="1.0" encoding="utf-8"?>
+<ds:datastoreItem xmlns:ds="http://schemas.openxmlformats.org/officeDocument/2006/customXml" ds:itemID="{98BA9AEF-FDF4-1946-8259-DDA195E03BE0}">
+  <ds:schemaRefs/>
+</ds:datastoreItem>
+</file>
+
+<file path=customXml/itemProps100.xml><?xml version="1.0" encoding="utf-8"?>
+<ds:datastoreItem xmlns:ds="http://schemas.openxmlformats.org/officeDocument/2006/customXml" ds:itemID="{E0A52C09-F32A-744D-9384-8F69C87A6B7C}">
+  <ds:schemaRefs/>
+</ds:datastoreItem>
+</file>
+
+<file path=customXml/itemProps101.xml><?xml version="1.0" encoding="utf-8"?>
+<ds:datastoreItem xmlns:ds="http://schemas.openxmlformats.org/officeDocument/2006/customXml" ds:itemID="{6B17E808-C069-624C-A5C1-603A8FF1BE0C}">
+  <ds:schemaRefs/>
+</ds:datastoreItem>
+</file>
+
+<file path=customXml/itemProps102.xml><?xml version="1.0" encoding="utf-8"?>
+<ds:datastoreItem xmlns:ds="http://schemas.openxmlformats.org/officeDocument/2006/customXml" ds:itemID="{2A47E9D9-49E4-2342-9800-117D4E9357B3}">
+  <ds:schemaRefs/>
+</ds:datastoreItem>
+</file>
+
+<file path=customXml/itemProps103.xml><?xml version="1.0" encoding="utf-8"?>
+<ds:datastoreItem xmlns:ds="http://schemas.openxmlformats.org/officeDocument/2006/customXml" ds:itemID="{EDD86879-0894-7D42-9F54-E4A714244430}">
+  <ds:schemaRefs/>
+</ds:datastoreItem>
+</file>
+
+<file path=customXml/itemProps104.xml><?xml version="1.0" encoding="utf-8"?>
+<ds:datastoreItem xmlns:ds="http://schemas.openxmlformats.org/officeDocument/2006/customXml" ds:itemID="{4C634F72-AD4A-8547-BB9D-47BB44CCA14A}">
+  <ds:schemaRefs/>
+</ds:datastoreItem>
+</file>
+
+<file path=customXml/itemProps105.xml><?xml version="1.0" encoding="utf-8"?>
+<ds:datastoreItem xmlns:ds="http://schemas.openxmlformats.org/officeDocument/2006/customXml" ds:itemID="{C34C4975-2192-8947-9629-683C88943DB1}">
+  <ds:schemaRefs/>
+</ds:datastoreItem>
+</file>
+
+<file path=customXml/itemProps106.xml><?xml version="1.0" encoding="utf-8"?>
+<ds:datastoreItem xmlns:ds="http://schemas.openxmlformats.org/officeDocument/2006/customXml" ds:itemID="{CDA307FF-483A-402E-BC06-CAF2ADA8EA5D}">
+  <ds:schemaRefs/>
+</ds:datastoreItem>
+</file>
+
+<file path=customXml/itemProps107.xml><?xml version="1.0" encoding="utf-8"?>
+<ds:datastoreItem xmlns:ds="http://schemas.openxmlformats.org/officeDocument/2006/customXml" ds:itemID="{285F1B71-6855-5C45-BF01-4F6FB1F11665}">
+  <ds:schemaRefs/>
+</ds:datastoreItem>
+</file>
+
+<file path=customXml/itemProps108.xml><?xml version="1.0" encoding="utf-8"?>
+<ds:datastoreItem xmlns:ds="http://schemas.openxmlformats.org/officeDocument/2006/customXml" ds:itemID="{88EB69C4-4043-664A-AAF6-8C1D1348DDA4}">
+  <ds:schemaRefs/>
+</ds:datastoreItem>
+</file>
+
+<file path=customXml/itemProps109.xml><?xml version="1.0" encoding="utf-8"?>
+<ds:datastoreItem xmlns:ds="http://schemas.openxmlformats.org/officeDocument/2006/customXml" ds:itemID="{08A943D2-08B8-BB48-8300-E66F8B15FD43}">
+  <ds:schemaRefs/>
+</ds:datastoreItem>
+</file>
+
+<file path=customXml/itemProps11.xml><?xml version="1.0" encoding="utf-8"?>
+<ds:datastoreItem xmlns:ds="http://schemas.openxmlformats.org/officeDocument/2006/customXml" ds:itemID="{918E2903-41FE-1245-A230-EF8311E0EAFA}">
+  <ds:schemaRefs/>
+</ds:datastoreItem>
+</file>
+
+<file path=customXml/itemProps110.xml><?xml version="1.0" encoding="utf-8"?>
+<ds:datastoreItem xmlns:ds="http://schemas.openxmlformats.org/officeDocument/2006/customXml" ds:itemID="{40787C41-3D88-604D-887C-AC86B568CE5C}">
+  <ds:schemaRefs/>
+</ds:datastoreItem>
+</file>
+
+<file path=customXml/itemProps111.xml><?xml version="1.0" encoding="utf-8"?>
+<ds:datastoreItem xmlns:ds="http://schemas.openxmlformats.org/officeDocument/2006/customXml" ds:itemID="{BBD551ED-E01E-494D-AA9E-019679363828}">
+  <ds:schemaRefs/>
+</ds:datastoreItem>
+</file>
+
+<file path=customXml/itemProps112.xml><?xml version="1.0" encoding="utf-8"?>
 <ds:datastoreItem xmlns:ds="http://schemas.openxmlformats.org/officeDocument/2006/customXml" ds:itemID="{A2C14592-1B5D-0C42-B60C-824338B66A0B}">
   <ds:schemaRefs/>
 </ds:datastoreItem>
 </file>
 
-<file path=customXml/itemProps100.xml><?xml version="1.0" encoding="utf-8"?>
-<ds:datastoreItem xmlns:ds="http://schemas.openxmlformats.org/officeDocument/2006/customXml" ds:itemID="{D2C43B9A-008F-9B43-89B8-EB14DBBEE730}">
-  <ds:schemaRefs/>
-</ds:datastoreItem>
-</file>
-
-<file path=customXml/itemProps101.xml><?xml version="1.0" encoding="utf-8"?>
-<ds:datastoreItem xmlns:ds="http://schemas.openxmlformats.org/officeDocument/2006/customXml" ds:itemID="{6F0C1D50-B246-7641-A449-D2495DC10E80}">
-  <ds:schemaRefs/>
-</ds:datastoreItem>
-</file>
-
-<file path=customXml/itemProps102.xml><?xml version="1.0" encoding="utf-8"?>
-<ds:datastoreItem xmlns:ds="http://schemas.openxmlformats.org/officeDocument/2006/customXml" ds:itemID="{D19BEC73-69CB-414A-A7BE-653B795EEE32}">
-  <ds:schemaRefs>
-    <ds:schemaRef ds:uri="http://schemas.openxmlformats.org/package/2006/metadata/core-properties"/>
-    <ds:schemaRef ds:uri="http://schemas.microsoft.com/office/2006/metadata/properties"/>
-    <ds:schemaRef ds:uri="http://schemas.microsoft.com/office/infopath/2007/PartnerControls"/>
-    <ds:schemaRef ds:uri="http://schemas.microsoft.com/office/2006/documentManagement/types"/>
-    <ds:schemaRef ds:uri="http://purl.org/dc/dcmitype/"/>
-    <ds:schemaRef ds:uri="http://purl.org/dc/terms/"/>
-    <ds:schemaRef ds:uri="http://purl.org/dc/elements/1.1/"/>
-    <ds:schemaRef ds:uri="http://www.w3.org/XML/1998/namespace"/>
-    <ds:schemaRef ds:uri="6b2685c3-cb74-402e-89a3-cd359bd59e48"/>
-    <ds:schemaRef ds:uri="2f7262f3-19e3-4c38-834c-996e2cec5b6c"/>
-  </ds:schemaRefs>
-</ds:datastoreItem>
-</file>
-
-<file path=customXml/itemProps103.xml><?xml version="1.0" encoding="utf-8"?>
-<ds:datastoreItem xmlns:ds="http://schemas.openxmlformats.org/officeDocument/2006/customXml" ds:itemID="{A0CB3283-4520-48D0-9091-1EFB3339413D}">
-  <ds:schemaRefs/>
-</ds:datastoreItem>
-</file>
-
-<file path=customXml/itemProps104.xml><?xml version="1.0" encoding="utf-8"?>
-<ds:datastoreItem xmlns:ds="http://schemas.openxmlformats.org/officeDocument/2006/customXml" ds:itemID="{D1C70949-45FC-7D46-873B-668C19E8BC02}">
-  <ds:schemaRefs/>
-</ds:datastoreItem>
-</file>
-
-<file path=customXml/itemProps105.xml><?xml version="1.0" encoding="utf-8"?>
-<ds:datastoreItem xmlns:ds="http://schemas.openxmlformats.org/officeDocument/2006/customXml" ds:itemID="{D83B34BF-0AA8-5844-9412-430C44A1B21E}">
-  <ds:schemaRefs/>
-</ds:datastoreItem>
-</file>
-
-<file path=customXml/itemProps106.xml><?xml version="1.0" encoding="utf-8"?>
-<ds:datastoreItem xmlns:ds="http://schemas.openxmlformats.org/officeDocument/2006/customXml" ds:itemID="{40787C41-3D88-604D-887C-AC86B568CE5C}">
-  <ds:schemaRefs/>
-</ds:datastoreItem>
-</file>
-
-<file path=customXml/itemProps107.xml><?xml version="1.0" encoding="utf-8"?>
-<ds:datastoreItem xmlns:ds="http://schemas.openxmlformats.org/officeDocument/2006/customXml" ds:itemID="{545DC2FB-D078-1045-9D39-2E74DEB3BB76}">
-  <ds:schemaRefs/>
-</ds:datastoreItem>
-</file>
-
-<file path=customXml/itemProps108.xml><?xml version="1.0" encoding="utf-8"?>
-<ds:datastoreItem xmlns:ds="http://schemas.openxmlformats.org/officeDocument/2006/customXml" ds:itemID="{14B1E3FB-316F-604A-8B28-173695A2940B}">
-  <ds:schemaRefs/>
-</ds:datastoreItem>
-</file>
-
-<file path=customXml/itemProps109.xml><?xml version="1.0" encoding="utf-8"?>
-<ds:datastoreItem xmlns:ds="http://schemas.openxmlformats.org/officeDocument/2006/customXml" ds:itemID="{258DC87B-8348-114D-9083-9C716D22F16D}">
-  <ds:schemaRefs/>
-</ds:datastoreItem>
-</file>
-
-<file path=customXml/itemProps11.xml><?xml version="1.0" encoding="utf-8"?>
-<ds:datastoreItem xmlns:ds="http://schemas.openxmlformats.org/officeDocument/2006/customXml" ds:itemID="{20879C7B-0541-094E-93EC-0BA0ADF71017}">
-  <ds:schemaRefs/>
-</ds:datastoreItem>
-</file>
-
-<file path=customXml/itemProps110.xml><?xml version="1.0" encoding="utf-8"?>
-<ds:datastoreItem xmlns:ds="http://schemas.openxmlformats.org/officeDocument/2006/customXml" ds:itemID="{8D644A9D-B313-DE4F-B71D-42EC9821F32D}">
-  <ds:schemaRefs/>
-</ds:datastoreItem>
-</file>
-
-<file path=customXml/itemProps111.xml><?xml version="1.0" encoding="utf-8"?>
-<ds:datastoreItem xmlns:ds="http://schemas.openxmlformats.org/officeDocument/2006/customXml" ds:itemID="{C34C4975-2192-8947-9629-683C88943DB1}">
-  <ds:schemaRefs/>
-</ds:datastoreItem>
-</file>
-
-<file path=customXml/itemProps112.xml><?xml version="1.0" encoding="utf-8"?>
-<ds:datastoreItem xmlns:ds="http://schemas.openxmlformats.org/officeDocument/2006/customXml" ds:itemID="{5E29D5F9-6444-1140-88BE-AEC8DDB57F68}">
-  <ds:schemaRefs/>
-</ds:datastoreItem>
-</file>
-
 <file path=customXml/itemProps113.xml><?xml version="1.0" encoding="utf-8"?>
-<ds:datastoreItem xmlns:ds="http://schemas.openxmlformats.org/officeDocument/2006/customXml" ds:itemID="{B4A29460-AA96-B842-B40F-0D419007261A}">
-  <ds:schemaRefs/>
-</ds:datastoreItem>
-</file>
-
-<file path=customXml/itemProps114.xml><?xml version="1.0" encoding="utf-8"?>
-<ds:datastoreItem xmlns:ds="http://schemas.openxmlformats.org/officeDocument/2006/customXml" ds:itemID="{E66C6F0A-FDBA-AF40-8357-086B1BC37E7D}">
-  <ds:schemaRefs/>
-</ds:datastoreItem>
-</file>
-
-<file path=customXml/itemProps115.xml><?xml version="1.0" encoding="utf-8"?>
-<ds:datastoreItem xmlns:ds="http://schemas.openxmlformats.org/officeDocument/2006/customXml" ds:itemID="{3D19E2BC-FDCE-4046-8EF3-B8F1A2FD8B4C}">
-  <ds:schemaRefs/>
-</ds:datastoreItem>
-</file>
-
-<file path=customXml/itemProps116.xml><?xml version="1.0" encoding="utf-8"?>
-<ds:datastoreItem xmlns:ds="http://schemas.openxmlformats.org/officeDocument/2006/customXml" ds:itemID="{A0F1B3AB-C9B7-734B-9E79-23AB848C7652}">
-  <ds:schemaRefs/>
-</ds:datastoreItem>
-</file>
-
-<file path=customXml/itemProps117.xml><?xml version="1.0" encoding="utf-8"?>
-<ds:datastoreItem xmlns:ds="http://schemas.openxmlformats.org/officeDocument/2006/customXml" ds:itemID="{8C80DD3F-DE8F-5947-8ECC-607232B4BDAC}">
-  <ds:schemaRefs/>
-</ds:datastoreItem>
-</file>
-
-<file path=customXml/itemProps118.xml><?xml version="1.0" encoding="utf-8"?>
-<ds:datastoreItem xmlns:ds="http://schemas.openxmlformats.org/officeDocument/2006/customXml" ds:itemID="{A2CED703-3E28-7449-A83C-099D81EAF757}">
-  <ds:schemaRefs/>
-</ds:datastoreItem>
-</file>
-
-<file path=customXml/itemProps119.xml><?xml version="1.0" encoding="utf-8"?>
-<ds:datastoreItem xmlns:ds="http://schemas.openxmlformats.org/officeDocument/2006/customXml" ds:itemID="{794A1948-2851-D943-A34A-290DD8291F8E}">
-  <ds:schemaRefs/>
-</ds:datastoreItem>
-</file>
-
-<file path=customXml/itemProps12.xml><?xml version="1.0" encoding="utf-8"?>
-<ds:datastoreItem xmlns:ds="http://schemas.openxmlformats.org/officeDocument/2006/customXml" ds:itemID="{91634BD2-50C3-174F-8B56-B51A18DBA181}">
-  <ds:schemaRefs/>
-</ds:datastoreItem>
-</file>
-
-<file path=customXml/itemProps120.xml><?xml version="1.0" encoding="utf-8"?>
-<ds:datastoreItem xmlns:ds="http://schemas.openxmlformats.org/officeDocument/2006/customXml" ds:itemID="{38036F99-7968-1E4E-A509-CDD48CA6BCB3}">
-  <ds:schemaRefs/>
-</ds:datastoreItem>
-</file>
-
-<file path=customXml/itemProps121.xml><?xml version="1.0" encoding="utf-8"?>
-<ds:datastoreItem xmlns:ds="http://schemas.openxmlformats.org/officeDocument/2006/customXml" ds:itemID="{BCE338FD-0C37-9148-B918-CD08A13B5568}">
-  <ds:schemaRefs/>
-</ds:datastoreItem>
-</file>
-
-<file path=customXml/itemProps122.xml><?xml version="1.0" encoding="utf-8"?>
-<ds:datastoreItem xmlns:ds="http://schemas.openxmlformats.org/officeDocument/2006/customXml" ds:itemID="{A742691B-1461-5E49-B52C-F97BAD3A7408}">
-  <ds:schemaRefs/>
-</ds:datastoreItem>
-</file>
-
-<file path=customXml/itemProps123.xml><?xml version="1.0" encoding="utf-8"?>
-<ds:datastoreItem xmlns:ds="http://schemas.openxmlformats.org/officeDocument/2006/customXml" ds:itemID="{DAB1AE5F-4401-FE4F-9F19-20054F0FA149}">
-  <ds:schemaRefs/>
-</ds:datastoreItem>
-</file>
-
-<file path=customXml/itemProps124.xml><?xml version="1.0" encoding="utf-8"?>
-<ds:datastoreItem xmlns:ds="http://schemas.openxmlformats.org/officeDocument/2006/customXml" ds:itemID="{6C5FC660-95D5-5B49-BB74-C08817BA7E5D}">
-  <ds:schemaRefs/>
-</ds:datastoreItem>
-</file>
-
-<file path=customXml/itemProps125.xml><?xml version="1.0" encoding="utf-8"?>
-<ds:datastoreItem xmlns:ds="http://schemas.openxmlformats.org/officeDocument/2006/customXml" ds:itemID="{5B987C67-F680-2646-98DC-47621C6D599B}">
-  <ds:schemaRefs/>
-</ds:datastoreItem>
-</file>
-
-<file path=customXml/itemProps126.xml><?xml version="1.0" encoding="utf-8"?>
-<ds:datastoreItem xmlns:ds="http://schemas.openxmlformats.org/officeDocument/2006/customXml" ds:itemID="{4FF3F3C9-FF93-1243-8662-BB9286383151}">
-  <ds:schemaRefs/>
-</ds:datastoreItem>
-</file>
-
-<file path=customXml/itemProps127.xml><?xml version="1.0" encoding="utf-8"?>
-<ds:datastoreItem xmlns:ds="http://schemas.openxmlformats.org/officeDocument/2006/customXml" ds:itemID="{BBD551ED-E01E-494D-AA9E-019679363828}">
-  <ds:schemaRefs/>
-</ds:datastoreItem>
-</file>
-
-<file path=customXml/itemProps128.xml><?xml version="1.0" encoding="utf-8"?>
-<ds:datastoreItem xmlns:ds="http://schemas.openxmlformats.org/officeDocument/2006/customXml" ds:itemID="{918E2903-41FE-1245-A230-EF8311E0EAFA}">
-  <ds:schemaRefs/>
-</ds:datastoreItem>
-</file>
-
-<file path=customXml/itemProps129.xml><?xml version="1.0" encoding="utf-8"?>
-<ds:datastoreItem xmlns:ds="http://schemas.openxmlformats.org/officeDocument/2006/customXml" ds:itemID="{5BA3632D-DEC2-C441-B200-1180D41B0F3F}">
-  <ds:schemaRefs/>
-</ds:datastoreItem>
-</file>
-
-<file path=customXml/itemProps13.xml><?xml version="1.0" encoding="utf-8"?>
-<ds:datastoreItem xmlns:ds="http://schemas.openxmlformats.org/officeDocument/2006/customXml" ds:itemID="{89A5DBBB-7E05-3940-B508-34E839373020}">
-  <ds:schemaRefs/>
-</ds:datastoreItem>
-</file>
-
-<file path=customXml/itemProps130.xml><?xml version="1.0" encoding="utf-8"?>
-<ds:datastoreItem xmlns:ds="http://schemas.openxmlformats.org/officeDocument/2006/customXml" ds:itemID="{0499A919-79B3-E240-ABDB-38933614D137}">
-  <ds:schemaRefs/>
-</ds:datastoreItem>
-</file>
-
-<file path=customXml/itemProps131.xml><?xml version="1.0" encoding="utf-8"?>
-<ds:datastoreItem xmlns:ds="http://schemas.openxmlformats.org/officeDocument/2006/customXml" ds:itemID="{A4BB7BA0-6077-4948-B399-E72E6338AFE0}">
-  <ds:schemaRefs/>
-</ds:datastoreItem>
-</file>
-
-<file path=customXml/itemProps132.xml><?xml version="1.0" encoding="utf-8"?>
-<ds:datastoreItem xmlns:ds="http://schemas.openxmlformats.org/officeDocument/2006/customXml" ds:itemID="{CDA307FF-483A-402E-BC06-CAF2ADA8EA5D}">
-  <ds:schemaRefs/>
-</ds:datastoreItem>
-</file>
-
-<file path=customXml/itemProps133.xml><?xml version="1.0" encoding="utf-8"?>
-<ds:datastoreItem xmlns:ds="http://schemas.openxmlformats.org/officeDocument/2006/customXml" ds:itemID="{A7CF46B5-46D3-1445-AF32-36392277098D}">
-  <ds:schemaRefs/>
-</ds:datastoreItem>
-</file>
-
-<file path=customXml/itemProps134.xml><?xml version="1.0" encoding="utf-8"?>
-<ds:datastoreItem xmlns:ds="http://schemas.openxmlformats.org/officeDocument/2006/customXml" ds:itemID="{3612DEF4-CF16-9B4B-A882-EEBB48AAB2DC}">
-  <ds:schemaRefs/>
-</ds:datastoreItem>
-</file>
-
-<file path=customXml/itemProps135.xml><?xml version="1.0" encoding="utf-8"?>
-<ds:datastoreItem xmlns:ds="http://schemas.openxmlformats.org/officeDocument/2006/customXml" ds:itemID="{4DA52614-8C3A-CF46-91D4-616265C21BC4}">
-  <ds:schemaRefs/>
-</ds:datastoreItem>
-</file>
-
-<file path=customXml/itemProps14.xml><?xml version="1.0" encoding="utf-8"?>
-<ds:datastoreItem xmlns:ds="http://schemas.openxmlformats.org/officeDocument/2006/customXml" ds:itemID="{7E45526E-4021-7C41-8709-DBD91FDFF293}">
-  <ds:schemaRefs/>
-</ds:datastoreItem>
-</file>
-
-<file path=customXml/itemProps15.xml><?xml version="1.0" encoding="utf-8"?>
-<ds:datastoreItem xmlns:ds="http://schemas.openxmlformats.org/officeDocument/2006/customXml" ds:itemID="{285F1B71-6855-5C45-BF01-4F6FB1F11665}">
-  <ds:schemaRefs/>
-</ds:datastoreItem>
-</file>
-
-<file path=customXml/itemProps16.xml><?xml version="1.0" encoding="utf-8"?>
-<ds:datastoreItem xmlns:ds="http://schemas.openxmlformats.org/officeDocument/2006/customXml" ds:itemID="{C3819906-1648-4F4E-B720-7DF67884D638}">
-  <ds:schemaRefs/>
-</ds:datastoreItem>
-</file>
-
-<file path=customXml/itemProps17.xml><?xml version="1.0" encoding="utf-8"?>
-<ds:datastoreItem xmlns:ds="http://schemas.openxmlformats.org/officeDocument/2006/customXml" ds:itemID="{3555EF9A-BE5D-5146-84EC-CAD1B19810AF}">
-  <ds:schemaRefs/>
-</ds:datastoreItem>
-</file>
-
-<file path=customXml/itemProps18.xml><?xml version="1.0" encoding="utf-8"?>
-<ds:datastoreItem xmlns:ds="http://schemas.openxmlformats.org/officeDocument/2006/customXml" ds:itemID="{48B2E131-2C6C-9C47-A468-0A5506CC83BB}">
-  <ds:schemaRefs/>
-</ds:datastoreItem>
-</file>
-
-<file path=customXml/itemProps19.xml><?xml version="1.0" encoding="utf-8"?>
-<ds:datastoreItem xmlns:ds="http://schemas.openxmlformats.org/officeDocument/2006/customXml" ds:itemID="{775568C5-529A-454C-8791-D9AB4747E3F6}">
-  <ds:schemaRefs/>
-</ds:datastoreItem>
-</file>
-
-<file path=customXml/itemProps2.xml><?xml version="1.0" encoding="utf-8"?>
-<ds:datastoreItem xmlns:ds="http://schemas.openxmlformats.org/officeDocument/2006/customXml" ds:itemID="{2A0B6F7D-938D-4897-9BBD-4D92EDFE5FA0}">
-  <ds:schemaRefs/>
-</ds:datastoreItem>
-</file>
-
-<file path=customXml/itemProps20.xml><?xml version="1.0" encoding="utf-8"?>
-<ds:datastoreItem xmlns:ds="http://schemas.openxmlformats.org/officeDocument/2006/customXml" ds:itemID="{E0A52C09-F32A-744D-9384-8F69C87A6B7C}">
-  <ds:schemaRefs/>
-</ds:datastoreItem>
-</file>
-
-<file path=customXml/itemProps21.xml><?xml version="1.0" encoding="utf-8"?>
-<ds:datastoreItem xmlns:ds="http://schemas.openxmlformats.org/officeDocument/2006/customXml" ds:itemID="{255E5229-2711-0A44-B4DD-08DF813C10E6}">
-  <ds:schemaRefs/>
-</ds:datastoreItem>
-</file>
-
-<file path=customXml/itemProps22.xml><?xml version="1.0" encoding="utf-8"?>
-<ds:datastoreItem xmlns:ds="http://schemas.openxmlformats.org/officeDocument/2006/customXml" ds:itemID="{FE98CE46-5481-6C45-BD2A-0D5092119E3D}">
-  <ds:schemaRefs/>
-</ds:datastoreItem>
-</file>
-
-<file path=customXml/itemProps23.xml><?xml version="1.0" encoding="utf-8"?>
-<ds:datastoreItem xmlns:ds="http://schemas.openxmlformats.org/officeDocument/2006/customXml" ds:itemID="{5E625B5D-9DA9-9548-B88C-169736F8187A}">
-  <ds:schemaRefs/>
-</ds:datastoreItem>
-</file>
-
-<file path=customXml/itemProps24.xml><?xml version="1.0" encoding="utf-8"?>
-<ds:datastoreItem xmlns:ds="http://schemas.openxmlformats.org/officeDocument/2006/customXml" ds:itemID="{842FD731-0B4E-8E4E-A50B-D5B1478770F6}">
-  <ds:schemaRefs/>
-</ds:datastoreItem>
-</file>
-
-<file path=customXml/itemProps25.xml><?xml version="1.0" encoding="utf-8"?>
-<ds:datastoreItem xmlns:ds="http://schemas.openxmlformats.org/officeDocument/2006/customXml" ds:itemID="{586B46D8-2966-4A45-9D78-7ECB2CB2E8B7}">
-  <ds:schemaRefs/>
-</ds:datastoreItem>
-</file>
-
-<file path=customXml/itemProps26.xml><?xml version="1.0" encoding="utf-8"?>
-<ds:datastoreItem xmlns:ds="http://schemas.openxmlformats.org/officeDocument/2006/customXml" ds:itemID="{390A16D5-CBCD-6F45-B6C7-22CF3906FEA4}">
-  <ds:schemaRefs/>
-</ds:datastoreItem>
-</file>
-
-<file path=customXml/itemProps27.xml><?xml version="1.0" encoding="utf-8"?>
-<ds:datastoreItem xmlns:ds="http://schemas.openxmlformats.org/officeDocument/2006/customXml" ds:itemID="{B59AD7C8-81B9-423E-89C7-0F75F1D849C8}">
-  <ds:schemaRefs/>
-</ds:datastoreItem>
-</file>
-
-<file path=customXml/itemProps28.xml><?xml version="1.0" encoding="utf-8"?>
-<ds:datastoreItem xmlns:ds="http://schemas.openxmlformats.org/officeDocument/2006/customXml" ds:itemID="{16DB2144-AEA5-7E4E-8202-0DC9965BB998}">
-  <ds:schemaRefs/>
-</ds:datastoreItem>
-</file>
-
-<file path=customXml/itemProps29.xml><?xml version="1.0" encoding="utf-8"?>
-<ds:datastoreItem xmlns:ds="http://schemas.openxmlformats.org/officeDocument/2006/customXml" ds:itemID="{9C878288-4363-7845-909D-C584D3760488}">
-  <ds:schemaRefs/>
-</ds:datastoreItem>
-</file>
-
-<file path=customXml/itemProps3.xml><?xml version="1.0" encoding="utf-8"?>
-<ds:datastoreItem xmlns:ds="http://schemas.openxmlformats.org/officeDocument/2006/customXml" ds:itemID="{1767E9AD-0C4B-2A4E-8562-BEBD9AE35509}">
-  <ds:schemaRefs/>
-</ds:datastoreItem>
-</file>
-
-<file path=customXml/itemProps30.xml><?xml version="1.0" encoding="utf-8"?>
-<ds:datastoreItem xmlns:ds="http://schemas.openxmlformats.org/officeDocument/2006/customXml" ds:itemID="{43CB3E3F-D98F-7F46-907F-6B811AB66CDF}">
-  <ds:schemaRefs/>
-</ds:datastoreItem>
-</file>
-
-<file path=customXml/itemProps31.xml><?xml version="1.0" encoding="utf-8"?>
 <ds:datastoreItem xmlns:ds="http://schemas.openxmlformats.org/officeDocument/2006/customXml" ds:itemID="{D23F4B8C-B399-4A98-A80F-6FF5F587E67C}">
   <ds:schemaRefs>
     <ds:schemaRef ds:uri="http://schemas.microsoft.com/office/2006/metadata/contentType"/>
@@ -40576,127 +40309,450 @@
 </ds:datastoreItem>
 </file>
 
+<file path=customXml/itemProps114.xml><?xml version="1.0" encoding="utf-8"?>
+<ds:datastoreItem xmlns:ds="http://schemas.openxmlformats.org/officeDocument/2006/customXml" ds:itemID="{08D8D361-3686-2445-9F03-73AF79C154B3}">
+  <ds:schemaRefs/>
+</ds:datastoreItem>
+</file>
+
+<file path=customXml/itemProps115.xml><?xml version="1.0" encoding="utf-8"?>
+<ds:datastoreItem xmlns:ds="http://schemas.openxmlformats.org/officeDocument/2006/customXml" ds:itemID="{DD247416-4E47-DE42-994A-4D84AE2DBE6B}">
+  <ds:schemaRefs/>
+</ds:datastoreItem>
+</file>
+
+<file path=customXml/itemProps116.xml><?xml version="1.0" encoding="utf-8"?>
+<ds:datastoreItem xmlns:ds="http://schemas.openxmlformats.org/officeDocument/2006/customXml" ds:itemID="{AAAEE516-28E3-F246-BAAB-20DFE080C19A}">
+  <ds:schemaRefs/>
+</ds:datastoreItem>
+</file>
+
+<file path=customXml/itemProps117.xml><?xml version="1.0" encoding="utf-8"?>
+<ds:datastoreItem xmlns:ds="http://schemas.openxmlformats.org/officeDocument/2006/customXml" ds:itemID="{A712C57A-BE82-A34B-9BB4-79316C3ABF59}">
+  <ds:schemaRefs/>
+</ds:datastoreItem>
+</file>
+
+<file path=customXml/itemProps118.xml><?xml version="1.0" encoding="utf-8"?>
+<ds:datastoreItem xmlns:ds="http://schemas.openxmlformats.org/officeDocument/2006/customXml" ds:itemID="{4F7F6BED-D6D8-1F4A-B9C6-FF4FD5486B04}">
+  <ds:schemaRefs/>
+</ds:datastoreItem>
+</file>
+
+<file path=customXml/itemProps119.xml><?xml version="1.0" encoding="utf-8"?>
+<ds:datastoreItem xmlns:ds="http://schemas.openxmlformats.org/officeDocument/2006/customXml" ds:itemID="{6F0C1D50-B246-7641-A449-D2495DC10E80}">
+  <ds:schemaRefs/>
+</ds:datastoreItem>
+</file>
+
+<file path=customXml/itemProps12.xml><?xml version="1.0" encoding="utf-8"?>
+<ds:datastoreItem xmlns:ds="http://schemas.openxmlformats.org/officeDocument/2006/customXml" ds:itemID="{59C90489-0264-4F41-9805-552490471221}">
+  <ds:schemaRefs/>
+</ds:datastoreItem>
+</file>
+
+<file path=customXml/itemProps120.xml><?xml version="1.0" encoding="utf-8"?>
+<ds:datastoreItem xmlns:ds="http://schemas.openxmlformats.org/officeDocument/2006/customXml" ds:itemID="{A742691B-1461-5E49-B52C-F97BAD3A7408}">
+  <ds:schemaRefs/>
+</ds:datastoreItem>
+</file>
+
+<file path=customXml/itemProps121.xml><?xml version="1.0" encoding="utf-8"?>
+<ds:datastoreItem xmlns:ds="http://schemas.openxmlformats.org/officeDocument/2006/customXml" ds:itemID="{644F423D-2682-B94E-95AD-BF164FB1D80D}">
+  <ds:schemaRefs/>
+</ds:datastoreItem>
+</file>
+
+<file path=customXml/itemProps122.xml><?xml version="1.0" encoding="utf-8"?>
+<ds:datastoreItem xmlns:ds="http://schemas.openxmlformats.org/officeDocument/2006/customXml" ds:itemID="{F281106E-2C4F-4E80-AE54-10D0E3AF4D22}">
+  <ds:schemaRefs/>
+</ds:datastoreItem>
+</file>
+
+<file path=customXml/itemProps123.xml><?xml version="1.0" encoding="utf-8"?>
+<ds:datastoreItem xmlns:ds="http://schemas.openxmlformats.org/officeDocument/2006/customXml" ds:itemID="{390A16D5-CBCD-6F45-B6C7-22CF3906FEA4}">
+  <ds:schemaRefs/>
+</ds:datastoreItem>
+</file>
+
+<file path=customXml/itemProps124.xml><?xml version="1.0" encoding="utf-8"?>
+<ds:datastoreItem xmlns:ds="http://schemas.openxmlformats.org/officeDocument/2006/customXml" ds:itemID="{2B245DD0-1864-0541-BDA6-A8A5DAC5C54E}">
+  <ds:schemaRefs/>
+</ds:datastoreItem>
+</file>
+
+<file path=customXml/itemProps125.xml><?xml version="1.0" encoding="utf-8"?>
+<ds:datastoreItem xmlns:ds="http://schemas.openxmlformats.org/officeDocument/2006/customXml" ds:itemID="{11D8D825-9615-414A-845D-D4253F92C999}">
+  <ds:schemaRefs/>
+</ds:datastoreItem>
+</file>
+
+<file path=customXml/itemProps126.xml><?xml version="1.0" encoding="utf-8"?>
+<ds:datastoreItem xmlns:ds="http://schemas.openxmlformats.org/officeDocument/2006/customXml" ds:itemID="{5102CBF8-5594-1848-B89F-27BE664B1719}">
+  <ds:schemaRefs/>
+</ds:datastoreItem>
+</file>
+
+<file path=customXml/itemProps127.xml><?xml version="1.0" encoding="utf-8"?>
+<ds:datastoreItem xmlns:ds="http://schemas.openxmlformats.org/officeDocument/2006/customXml" ds:itemID="{5E29D5F9-6444-1140-88BE-AEC8DDB57F68}">
+  <ds:schemaRefs/>
+</ds:datastoreItem>
+</file>
+
+<file path=customXml/itemProps128.xml><?xml version="1.0" encoding="utf-8"?>
+<ds:datastoreItem xmlns:ds="http://schemas.openxmlformats.org/officeDocument/2006/customXml" ds:itemID="{A7CF46B5-46D3-1445-AF32-36392277098D}">
+  <ds:schemaRefs/>
+</ds:datastoreItem>
+</file>
+
+<file path=customXml/itemProps129.xml><?xml version="1.0" encoding="utf-8"?>
+<ds:datastoreItem xmlns:ds="http://schemas.openxmlformats.org/officeDocument/2006/customXml" ds:itemID="{C3819906-1648-4F4E-B720-7DF67884D638}">
+  <ds:schemaRefs/>
+</ds:datastoreItem>
+</file>
+
+<file path=customXml/itemProps13.xml><?xml version="1.0" encoding="utf-8"?>
+<ds:datastoreItem xmlns:ds="http://schemas.openxmlformats.org/officeDocument/2006/customXml" ds:itemID="{24EE2B10-D711-4440-A902-6816EB84EE62}">
+  <ds:schemaRefs/>
+</ds:datastoreItem>
+</file>
+
+<file path=customXml/itemProps130.xml><?xml version="1.0" encoding="utf-8"?>
+<ds:datastoreItem xmlns:ds="http://schemas.openxmlformats.org/officeDocument/2006/customXml" ds:itemID="{D5431F8D-114B-7D47-9EAB-CE5AC1A11C2E}">
+  <ds:schemaRefs/>
+</ds:datastoreItem>
+</file>
+
+<file path=customXml/itemProps131.xml><?xml version="1.0" encoding="utf-8"?>
+<ds:datastoreItem xmlns:ds="http://schemas.openxmlformats.org/officeDocument/2006/customXml" ds:itemID="{2F66468B-D119-B944-BC92-9091FAE67380}">
+  <ds:schemaRefs/>
+</ds:datastoreItem>
+</file>
+
+<file path=customXml/itemProps132.xml><?xml version="1.0" encoding="utf-8"?>
+<ds:datastoreItem xmlns:ds="http://schemas.openxmlformats.org/officeDocument/2006/customXml" ds:itemID="{ACDEFF1F-7D60-044C-9E4D-F90B787991A7}">
+  <ds:schemaRefs/>
+</ds:datastoreItem>
+</file>
+
+<file path=customXml/itemProps133.xml><?xml version="1.0" encoding="utf-8"?>
+<ds:datastoreItem xmlns:ds="http://schemas.openxmlformats.org/officeDocument/2006/customXml" ds:itemID="{D19BEC73-69CB-414A-A7BE-653B795EEE32}">
+  <ds:schemaRefs>
+    <ds:schemaRef ds:uri="http://schemas.openxmlformats.org/package/2006/metadata/core-properties"/>
+    <ds:schemaRef ds:uri="http://schemas.microsoft.com/office/2006/metadata/properties"/>
+    <ds:schemaRef ds:uri="http://schemas.microsoft.com/office/infopath/2007/PartnerControls"/>
+    <ds:schemaRef ds:uri="http://schemas.microsoft.com/office/2006/documentManagement/types"/>
+    <ds:schemaRef ds:uri="http://purl.org/dc/dcmitype/"/>
+    <ds:schemaRef ds:uri="http://purl.org/dc/terms/"/>
+    <ds:schemaRef ds:uri="http://purl.org/dc/elements/1.1/"/>
+    <ds:schemaRef ds:uri="http://www.w3.org/XML/1998/namespace"/>
+    <ds:schemaRef ds:uri="6b2685c3-cb74-402e-89a3-cd359bd59e48"/>
+    <ds:schemaRef ds:uri="2f7262f3-19e3-4c38-834c-996e2cec5b6c"/>
+  </ds:schemaRefs>
+</ds:datastoreItem>
+</file>
+
+<file path=customXml/itemProps134.xml><?xml version="1.0" encoding="utf-8"?>
+<ds:datastoreItem xmlns:ds="http://schemas.openxmlformats.org/officeDocument/2006/customXml" ds:itemID="{DAB1AE5F-4401-FE4F-9F19-20054F0FA149}">
+  <ds:schemaRefs/>
+</ds:datastoreItem>
+</file>
+
+<file path=customXml/itemProps135.xml><?xml version="1.0" encoding="utf-8"?>
+<ds:datastoreItem xmlns:ds="http://schemas.openxmlformats.org/officeDocument/2006/customXml" ds:itemID="{F2FCF759-7E5A-C840-8E9B-1DABD2170E27}">
+  <ds:schemaRefs/>
+</ds:datastoreItem>
+</file>
+
+<file path=customXml/itemProps14.xml><?xml version="1.0" encoding="utf-8"?>
+<ds:datastoreItem xmlns:ds="http://schemas.openxmlformats.org/officeDocument/2006/customXml" ds:itemID="{FE98CE46-5481-6C45-BD2A-0D5092119E3D}">
+  <ds:schemaRefs/>
+</ds:datastoreItem>
+</file>
+
+<file path=customXml/itemProps15.xml><?xml version="1.0" encoding="utf-8"?>
+<ds:datastoreItem xmlns:ds="http://schemas.openxmlformats.org/officeDocument/2006/customXml" ds:itemID="{B59AD7C8-81B9-423E-89C7-0F75F1D849C8}">
+  <ds:schemaRefs/>
+</ds:datastoreItem>
+</file>
+
+<file path=customXml/itemProps16.xml><?xml version="1.0" encoding="utf-8"?>
+<ds:datastoreItem xmlns:ds="http://schemas.openxmlformats.org/officeDocument/2006/customXml" ds:itemID="{16507967-4620-074B-BD47-235D0C6032C0}">
+  <ds:schemaRefs/>
+</ds:datastoreItem>
+</file>
+
+<file path=customXml/itemProps17.xml><?xml version="1.0" encoding="utf-8"?>
+<ds:datastoreItem xmlns:ds="http://schemas.openxmlformats.org/officeDocument/2006/customXml" ds:itemID="{9B925B77-5773-EE4C-B0D5-D06D127409D2}">
+  <ds:schemaRefs/>
+</ds:datastoreItem>
+</file>
+
+<file path=customXml/itemProps18.xml><?xml version="1.0" encoding="utf-8"?>
+<ds:datastoreItem xmlns:ds="http://schemas.openxmlformats.org/officeDocument/2006/customXml" ds:itemID="{8FA9B5B9-F170-1543-810F-14BD1AD9C098}">
+  <ds:schemaRefs/>
+</ds:datastoreItem>
+</file>
+
+<file path=customXml/itemProps19.xml><?xml version="1.0" encoding="utf-8"?>
+<ds:datastoreItem xmlns:ds="http://schemas.openxmlformats.org/officeDocument/2006/customXml" ds:itemID="{9071C123-D82B-6A40-B9BD-7EA7EDC4A509}">
+  <ds:schemaRefs/>
+</ds:datastoreItem>
+</file>
+
+<file path=customXml/itemProps2.xml><?xml version="1.0" encoding="utf-8"?>
+<ds:datastoreItem xmlns:ds="http://schemas.openxmlformats.org/officeDocument/2006/customXml" ds:itemID="{255E5229-2711-0A44-B4DD-08DF813C10E6}">
+  <ds:schemaRefs/>
+</ds:datastoreItem>
+</file>
+
+<file path=customXml/itemProps20.xml><?xml version="1.0" encoding="utf-8"?>
+<ds:datastoreItem xmlns:ds="http://schemas.openxmlformats.org/officeDocument/2006/customXml" ds:itemID="{B4A29460-AA96-B842-B40F-0D419007261A}">
+  <ds:schemaRefs/>
+</ds:datastoreItem>
+</file>
+
+<file path=customXml/itemProps21.xml><?xml version="1.0" encoding="utf-8"?>
+<ds:datastoreItem xmlns:ds="http://schemas.openxmlformats.org/officeDocument/2006/customXml" ds:itemID="{A2CED703-3E28-7449-A83C-099D81EAF757}">
+  <ds:schemaRefs/>
+</ds:datastoreItem>
+</file>
+
+<file path=customXml/itemProps22.xml><?xml version="1.0" encoding="utf-8"?>
+<ds:datastoreItem xmlns:ds="http://schemas.openxmlformats.org/officeDocument/2006/customXml" ds:itemID="{3612DEF4-CF16-9B4B-A882-EEBB48AAB2DC}">
+  <ds:schemaRefs/>
+</ds:datastoreItem>
+</file>
+
+<file path=customXml/itemProps23.xml><?xml version="1.0" encoding="utf-8"?>
+<ds:datastoreItem xmlns:ds="http://schemas.openxmlformats.org/officeDocument/2006/customXml" ds:itemID="{FAF24D88-9894-2D4A-B969-C5EED3B41183}">
+  <ds:schemaRefs/>
+</ds:datastoreItem>
+</file>
+
+<file path=customXml/itemProps24.xml><?xml version="1.0" encoding="utf-8"?>
+<ds:datastoreItem xmlns:ds="http://schemas.openxmlformats.org/officeDocument/2006/customXml" ds:itemID="{CC718065-0776-1845-B807-D6E25B378813}">
+  <ds:schemaRefs/>
+</ds:datastoreItem>
+</file>
+
+<file path=customXml/itemProps25.xml><?xml version="1.0" encoding="utf-8"?>
+<ds:datastoreItem xmlns:ds="http://schemas.openxmlformats.org/officeDocument/2006/customXml" ds:itemID="{91634BD2-50C3-174F-8B56-B51A18DBA181}">
+  <ds:schemaRefs/>
+</ds:datastoreItem>
+</file>
+
+<file path=customXml/itemProps26.xml><?xml version="1.0" encoding="utf-8"?>
+<ds:datastoreItem xmlns:ds="http://schemas.openxmlformats.org/officeDocument/2006/customXml" ds:itemID="{3555EF9A-BE5D-5146-84EC-CAD1B19810AF}">
+  <ds:schemaRefs/>
+</ds:datastoreItem>
+</file>
+
+<file path=customXml/itemProps27.xml><?xml version="1.0" encoding="utf-8"?>
+<ds:datastoreItem xmlns:ds="http://schemas.openxmlformats.org/officeDocument/2006/customXml" ds:itemID="{CD86F582-6CE5-A344-8B0E-5F1D92506B88}">
+  <ds:schemaRefs/>
+</ds:datastoreItem>
+</file>
+
+<file path=customXml/itemProps28.xml><?xml version="1.0" encoding="utf-8"?>
+<ds:datastoreItem xmlns:ds="http://schemas.openxmlformats.org/officeDocument/2006/customXml" ds:itemID="{DD5C987F-589F-7141-A445-608657E27150}">
+  <ds:schemaRefs/>
+</ds:datastoreItem>
+</file>
+
+<file path=customXml/itemProps29.xml><?xml version="1.0" encoding="utf-8"?>
+<ds:datastoreItem xmlns:ds="http://schemas.openxmlformats.org/officeDocument/2006/customXml" ds:itemID="{B229D9C2-9F66-8848-86B9-A962DBF55142}">
+  <ds:schemaRefs/>
+</ds:datastoreItem>
+</file>
+
+<file path=customXml/itemProps3.xml><?xml version="1.0" encoding="utf-8"?>
+<ds:datastoreItem xmlns:ds="http://schemas.openxmlformats.org/officeDocument/2006/customXml" ds:itemID="{E7E27ED9-AF52-EF4B-82CA-8A6153E1F833}">
+  <ds:schemaRefs/>
+</ds:datastoreItem>
+</file>
+
+<file path=customXml/itemProps30.xml><?xml version="1.0" encoding="utf-8"?>
+<ds:datastoreItem xmlns:ds="http://schemas.openxmlformats.org/officeDocument/2006/customXml" ds:itemID="{A0CB3283-4520-48D0-9091-1EFB3339413D}">
+  <ds:schemaRefs/>
+</ds:datastoreItem>
+</file>
+
+<file path=customXml/itemProps31.xml><?xml version="1.0" encoding="utf-8"?>
+<ds:datastoreItem xmlns:ds="http://schemas.openxmlformats.org/officeDocument/2006/customXml" ds:itemID="{14B1E3FB-316F-604A-8B28-173695A2940B}">
+  <ds:schemaRefs/>
+</ds:datastoreItem>
+</file>
+
 <file path=customXml/itemProps32.xml><?xml version="1.0" encoding="utf-8"?>
-<ds:datastoreItem xmlns:ds="http://schemas.openxmlformats.org/officeDocument/2006/customXml" ds:itemID="{A33184A5-69A5-4C8A-A8C6-88F1D913BC1B}">
+<ds:datastoreItem xmlns:ds="http://schemas.openxmlformats.org/officeDocument/2006/customXml" ds:itemID="{6C5FC660-95D5-5B49-BB74-C08817BA7E5D}">
   <ds:schemaRefs/>
 </ds:datastoreItem>
 </file>
 
 <file path=customXml/itemProps33.xml><?xml version="1.0" encoding="utf-8"?>
-<ds:datastoreItem xmlns:ds="http://schemas.openxmlformats.org/officeDocument/2006/customXml" ds:itemID="{CD86F582-6CE5-A344-8B0E-5F1D92506B88}">
+<ds:datastoreItem xmlns:ds="http://schemas.openxmlformats.org/officeDocument/2006/customXml" ds:itemID="{5BA3632D-DEC2-C441-B200-1180D41B0F3F}">
   <ds:schemaRefs/>
 </ds:datastoreItem>
 </file>
 
 <file path=customXml/itemProps34.xml><?xml version="1.0" encoding="utf-8"?>
+<ds:datastoreItem xmlns:ds="http://schemas.openxmlformats.org/officeDocument/2006/customXml" ds:itemID="{47F228FF-6E11-4D4F-8530-29D1C1C2B56D}">
+  <ds:schemaRefs/>
+</ds:datastoreItem>
+</file>
+
+<file path=customXml/itemProps35.xml><?xml version="1.0" encoding="utf-8"?>
+<ds:datastoreItem xmlns:ds="http://schemas.openxmlformats.org/officeDocument/2006/customXml" ds:itemID="{8103E372-BF38-4215-B88A-1143DC5923C6}">
+  <ds:schemaRefs/>
+</ds:datastoreItem>
+</file>
+
+<file path=customXml/itemProps36.xml><?xml version="1.0" encoding="utf-8"?>
+<ds:datastoreItem xmlns:ds="http://schemas.openxmlformats.org/officeDocument/2006/customXml" ds:itemID="{2FC87E82-0F5A-524A-B36F-35EBCA1F4902}">
+  <ds:schemaRefs/>
+</ds:datastoreItem>
+</file>
+
+<file path=customXml/itemProps37.xml><?xml version="1.0" encoding="utf-8"?>
+<ds:datastoreItem xmlns:ds="http://schemas.openxmlformats.org/officeDocument/2006/customXml" ds:itemID="{34E0A1F0-A93B-3D43-A282-45030E7A015C}">
+  <ds:schemaRefs/>
+</ds:datastoreItem>
+</file>
+
+<file path=customXml/itemProps38.xml><?xml version="1.0" encoding="utf-8"?>
+<ds:datastoreItem xmlns:ds="http://schemas.openxmlformats.org/officeDocument/2006/customXml" ds:itemID="{342BB3F3-2368-BA40-8F30-D5BB7CD458F4}">
+  <ds:schemaRefs/>
+</ds:datastoreItem>
+</file>
+
+<file path=customXml/itemProps39.xml><?xml version="1.0" encoding="utf-8"?>
+<ds:datastoreItem xmlns:ds="http://schemas.openxmlformats.org/officeDocument/2006/customXml" ds:itemID="{B7EAA44F-EA67-314D-9554-B764719B6235}">
+  <ds:schemaRefs/>
+</ds:datastoreItem>
+</file>
+
+<file path=customXml/itemProps4.xml><?xml version="1.0" encoding="utf-8"?>
+<ds:datastoreItem xmlns:ds="http://schemas.openxmlformats.org/officeDocument/2006/customXml" ds:itemID="{127E6D31-6E9C-D94C-9A6A-CC8AB0B19154}">
+  <ds:schemaRefs/>
+</ds:datastoreItem>
+</file>
+
+<file path=customXml/itemProps40.xml><?xml version="1.0" encoding="utf-8"?>
+<ds:datastoreItem xmlns:ds="http://schemas.openxmlformats.org/officeDocument/2006/customXml" ds:itemID="{CA485EBB-3C0F-E348-A301-8C1356476838}">
+  <ds:schemaRefs/>
+</ds:datastoreItem>
+</file>
+
+<file path=customXml/itemProps41.xml><?xml version="1.0" encoding="utf-8"?>
+<ds:datastoreItem xmlns:ds="http://schemas.openxmlformats.org/officeDocument/2006/customXml" ds:itemID="{5E625B5D-9DA9-9548-B88C-169736F8187A}">
+  <ds:schemaRefs/>
+</ds:datastoreItem>
+</file>
+
+<file path=customXml/itemProps42.xml><?xml version="1.0" encoding="utf-8"?>
+<ds:datastoreItem xmlns:ds="http://schemas.openxmlformats.org/officeDocument/2006/customXml" ds:itemID="{16DB2144-AEA5-7E4E-8202-0DC9965BB998}">
+  <ds:schemaRefs/>
+</ds:datastoreItem>
+</file>
+
+<file path=customXml/itemProps43.xml><?xml version="1.0" encoding="utf-8"?>
+<ds:datastoreItem xmlns:ds="http://schemas.openxmlformats.org/officeDocument/2006/customXml" ds:itemID="{ACF1CA53-D682-CF4D-8ACE-D12C2833F8D2}">
+  <ds:schemaRefs/>
+</ds:datastoreItem>
+</file>
+
+<file path=customXml/itemProps44.xml><?xml version="1.0" encoding="utf-8"?>
+<ds:datastoreItem xmlns:ds="http://schemas.openxmlformats.org/officeDocument/2006/customXml" ds:itemID="{E66C6F0A-FDBA-AF40-8357-086B1BC37E7D}">
+  <ds:schemaRefs/>
+</ds:datastoreItem>
+</file>
+
+<file path=customXml/itemProps45.xml><?xml version="1.0" encoding="utf-8"?>
+<ds:datastoreItem xmlns:ds="http://schemas.openxmlformats.org/officeDocument/2006/customXml" ds:itemID="{794A1948-2851-D943-A34A-290DD8291F8E}">
+  <ds:schemaRefs/>
+</ds:datastoreItem>
+</file>
+
+<file path=customXml/itemProps46.xml><?xml version="1.0" encoding="utf-8"?>
+<ds:datastoreItem xmlns:ds="http://schemas.openxmlformats.org/officeDocument/2006/customXml" ds:itemID="{A3949035-361D-9148-9E92-5549EB6A9408}">
+  <ds:schemaRefs/>
+</ds:datastoreItem>
+</file>
+
+<file path=customXml/itemProps47.xml><?xml version="1.0" encoding="utf-8"?>
+<ds:datastoreItem xmlns:ds="http://schemas.openxmlformats.org/officeDocument/2006/customXml" ds:itemID="{4A4B88C1-64A1-9442-BFB9-8D56DCD242E4}">
+  <ds:schemaRefs/>
+</ds:datastoreItem>
+</file>
+
+<file path=customXml/itemProps48.xml><?xml version="1.0" encoding="utf-8"?>
+<ds:datastoreItem xmlns:ds="http://schemas.openxmlformats.org/officeDocument/2006/customXml" ds:itemID="{727A10E5-F806-8E4F-99BA-434A7B8ABED2}">
+  <ds:schemaRefs/>
+</ds:datastoreItem>
+</file>
+
+<file path=customXml/itemProps49.xml><?xml version="1.0" encoding="utf-8"?>
+<ds:datastoreItem xmlns:ds="http://schemas.openxmlformats.org/officeDocument/2006/customXml" ds:itemID="{EBB88059-6AC3-5C4D-88E9-27D623487880}">
+  <ds:schemaRefs/>
+</ds:datastoreItem>
+</file>
+
+<file path=customXml/itemProps5.xml><?xml version="1.0" encoding="utf-8"?>
+<ds:datastoreItem xmlns:ds="http://schemas.openxmlformats.org/officeDocument/2006/customXml" ds:itemID="{A0157F43-06F5-4947-95CA-60CF01236E6F}">
+  <ds:schemaRefs/>
+</ds:datastoreItem>
+</file>
+
+<file path=customXml/itemProps50.xml><?xml version="1.0" encoding="utf-8"?>
+<ds:datastoreItem xmlns:ds="http://schemas.openxmlformats.org/officeDocument/2006/customXml" ds:itemID="{0CACF658-519F-E046-9D2F-A57D1C490B37}">
+  <ds:schemaRefs/>
+</ds:datastoreItem>
+</file>
+
+<file path=customXml/itemProps51.xml><?xml version="1.0" encoding="utf-8"?>
+<ds:datastoreItem xmlns:ds="http://schemas.openxmlformats.org/officeDocument/2006/customXml" ds:itemID="{0499A919-79B3-E240-ABDB-38933614D137}">
+  <ds:schemaRefs/>
+</ds:datastoreItem>
+</file>
+
+<file path=customXml/itemProps52.xml><?xml version="1.0" encoding="utf-8"?>
+<ds:datastoreItem xmlns:ds="http://schemas.openxmlformats.org/officeDocument/2006/customXml" ds:itemID="{4DA52614-8C3A-CF46-91D4-616265C21BC4}">
+  <ds:schemaRefs/>
+</ds:datastoreItem>
+</file>
+
+<file path=customXml/itemProps53.xml><?xml version="1.0" encoding="utf-8"?>
+<ds:datastoreItem xmlns:ds="http://schemas.openxmlformats.org/officeDocument/2006/customXml" ds:itemID="{89A5DBBB-7E05-3940-B508-34E839373020}">
+  <ds:schemaRefs/>
+</ds:datastoreItem>
+</file>
+
+<file path=customXml/itemProps54.xml><?xml version="1.0" encoding="utf-8"?>
+<ds:datastoreItem xmlns:ds="http://schemas.openxmlformats.org/officeDocument/2006/customXml" ds:itemID="{48B2E131-2C6C-9C47-A468-0A5506CC83BB}">
+  <ds:schemaRefs/>
+</ds:datastoreItem>
+</file>
+
+<file path=customXml/itemProps55.xml><?xml version="1.0" encoding="utf-8"?>
+<ds:datastoreItem xmlns:ds="http://schemas.openxmlformats.org/officeDocument/2006/customXml" ds:itemID="{76CC9DF2-974E-44D0-948A-851376CB6489}">
+  <ds:schemaRefs/>
+</ds:datastoreItem>
+</file>
+
+<file path=customXml/itemProps56.xml><?xml version="1.0" encoding="utf-8"?>
+<ds:datastoreItem xmlns:ds="http://schemas.openxmlformats.org/officeDocument/2006/customXml" ds:itemID="{258DC87B-8348-114D-9083-9C716D22F16D}">
+  <ds:schemaRefs/>
+</ds:datastoreItem>
+</file>
+
+<file path=customXml/itemProps57.xml><?xml version="1.0" encoding="utf-8"?>
 <ds:datastoreItem xmlns:ds="http://schemas.openxmlformats.org/officeDocument/2006/customXml" ds:itemID="{800F4A94-9351-4792-ACB0-6822B68D1355}">
   <ds:schemaRefs/>
 </ds:datastoreItem>
 </file>
 
-<file path=customXml/itemProps35.xml><?xml version="1.0" encoding="utf-8"?>
-<ds:datastoreItem xmlns:ds="http://schemas.openxmlformats.org/officeDocument/2006/customXml" ds:itemID="{CAD727EE-ECC3-484A-BC6E-D825C1A697C5}">
-  <ds:schemaRefs/>
-</ds:datastoreItem>
-</file>
-
-<file path=customXml/itemProps36.xml><?xml version="1.0" encoding="utf-8"?>
-<ds:datastoreItem xmlns:ds="http://schemas.openxmlformats.org/officeDocument/2006/customXml" ds:itemID="{88EB69C4-4043-664A-AAF6-8C1D1348DDA4}">
-  <ds:schemaRefs/>
-</ds:datastoreItem>
-</file>
-
-<file path=customXml/itemProps37.xml><?xml version="1.0" encoding="utf-8"?>
-<ds:datastoreItem xmlns:ds="http://schemas.openxmlformats.org/officeDocument/2006/customXml" ds:itemID="{D5431F8D-114B-7D47-9EAB-CE5AC1A11C2E}">
-  <ds:schemaRefs/>
-</ds:datastoreItem>
-</file>
-
-<file path=customXml/itemProps38.xml><?xml version="1.0" encoding="utf-8"?>
-<ds:datastoreItem xmlns:ds="http://schemas.openxmlformats.org/officeDocument/2006/customXml" ds:itemID="{DD5C987F-589F-7141-A445-608657E27150}">
-  <ds:schemaRefs/>
-</ds:datastoreItem>
-</file>
-
-<file path=customXml/itemProps39.xml><?xml version="1.0" encoding="utf-8"?>
-<ds:datastoreItem xmlns:ds="http://schemas.openxmlformats.org/officeDocument/2006/customXml" ds:itemID="{76CC9DF2-974E-44D0-948A-851376CB6489}">
-  <ds:schemaRefs/>
-</ds:datastoreItem>
-</file>
-
-<file path=customXml/itemProps4.xml><?xml version="1.0" encoding="utf-8"?>
-<ds:datastoreItem xmlns:ds="http://schemas.openxmlformats.org/officeDocument/2006/customXml" ds:itemID="{644F423D-2682-B94E-95AD-BF164FB1D80D}">
-  <ds:schemaRefs/>
-</ds:datastoreItem>
-</file>
-
-<file path=customXml/itemProps40.xml><?xml version="1.0" encoding="utf-8"?>
-<ds:datastoreItem xmlns:ds="http://schemas.openxmlformats.org/officeDocument/2006/customXml" ds:itemID="{B72179C4-8F97-7940-8CC3-DAAAFF5479E6}">
-  <ds:schemaRefs/>
-</ds:datastoreItem>
-</file>
-
-<file path=customXml/itemProps41.xml><?xml version="1.0" encoding="utf-8"?>
-<ds:datastoreItem xmlns:ds="http://schemas.openxmlformats.org/officeDocument/2006/customXml" ds:itemID="{6B17E808-C069-624C-A5C1-603A8FF1BE0C}">
-  <ds:schemaRefs/>
-</ds:datastoreItem>
-</file>
-
-<file path=customXml/itemProps42.xml><?xml version="1.0" encoding="utf-8"?>
-<ds:datastoreItem xmlns:ds="http://schemas.openxmlformats.org/officeDocument/2006/customXml" ds:itemID="{E7E27ED9-AF52-EF4B-82CA-8A6153E1F833}">
-  <ds:schemaRefs/>
-</ds:datastoreItem>
-</file>
-
-<file path=customXml/itemProps43.xml><?xml version="1.0" encoding="utf-8"?>
-<ds:datastoreItem xmlns:ds="http://schemas.openxmlformats.org/officeDocument/2006/customXml" ds:itemID="{16507967-4620-074B-BD47-235D0C6032C0}">
-  <ds:schemaRefs/>
-</ds:datastoreItem>
-</file>
-
-<file path=customXml/itemProps44.xml><?xml version="1.0" encoding="utf-8"?>
-<ds:datastoreItem xmlns:ds="http://schemas.openxmlformats.org/officeDocument/2006/customXml" ds:itemID="{A3949035-361D-9148-9E92-5549EB6A9408}">
-  <ds:schemaRefs/>
-</ds:datastoreItem>
-</file>
-
-<file path=customXml/itemProps45.xml><?xml version="1.0" encoding="utf-8"?>
-<ds:datastoreItem xmlns:ds="http://schemas.openxmlformats.org/officeDocument/2006/customXml" ds:itemID="{8ECE685F-992C-4340-A2BA-0F7F9183BA57}">
-  <ds:schemaRefs/>
-</ds:datastoreItem>
-</file>
-
-<file path=customXml/itemProps46.xml><?xml version="1.0" encoding="utf-8"?>
-<ds:datastoreItem xmlns:ds="http://schemas.openxmlformats.org/officeDocument/2006/customXml" ds:itemID="{4D3AD489-D4EE-FD4E-923E-F02226D44C34}">
-  <ds:schemaRefs/>
-</ds:datastoreItem>
-</file>
-
-<file path=customXml/itemProps47.xml><?xml version="1.0" encoding="utf-8"?>
-<ds:datastoreItem xmlns:ds="http://schemas.openxmlformats.org/officeDocument/2006/customXml" ds:itemID="{2B245DD0-1864-0541-BDA6-A8A5DAC5C54E}">
-  <ds:schemaRefs/>
-</ds:datastoreItem>
-</file>
-
-<file path=customXml/itemProps48.xml><?xml version="1.0" encoding="utf-8"?>
-<ds:datastoreItem xmlns:ds="http://schemas.openxmlformats.org/officeDocument/2006/customXml" ds:itemID="{9B925B77-5773-EE4C-B0D5-D06D127409D2}">
-  <ds:schemaRefs/>
-</ds:datastoreItem>
-</file>
-
-<file path=customXml/itemProps49.xml><?xml version="1.0" encoding="utf-8"?>
-<ds:datastoreItem xmlns:ds="http://schemas.openxmlformats.org/officeDocument/2006/customXml" ds:itemID="{ACF1CA53-D682-CF4D-8ACE-D12C2833F8D2}">
-  <ds:schemaRefs/>
-</ds:datastoreItem>
-</file>
-
-<file path=customXml/itemProps5.xml><?xml version="1.0" encoding="utf-8"?>
-<ds:datastoreItem xmlns:ds="http://schemas.openxmlformats.org/officeDocument/2006/customXml" ds:itemID="{59C90489-0264-4F41-9805-552490471221}">
-  <ds:schemaRefs/>
-</ds:datastoreItem>
-</file>
-
-<file path=customXml/itemProps50.xml><?xml version="1.0" encoding="utf-8"?>
+<file path=customXml/itemProps58.xml><?xml version="1.0" encoding="utf-8"?>
 <ds:datastoreItem xmlns:ds="http://schemas.openxmlformats.org/officeDocument/2006/customXml" ds:itemID="{D76696FF-6F99-4BF8-BD28-5EEAF2578D78}">
   <ds:schemaRefs>
     <ds:schemaRef ds:uri="http://schemas.microsoft.com/sharepoint/v3/contenttype/forms"/>
@@ -40704,320 +40760,272 @@
 </ds:datastoreItem>
 </file>
 
-<file path=customXml/itemProps51.xml><?xml version="1.0" encoding="utf-8"?>
+<file path=customXml/itemProps59.xml><?xml version="1.0" encoding="utf-8"?>
+<ds:datastoreItem xmlns:ds="http://schemas.openxmlformats.org/officeDocument/2006/customXml" ds:itemID="{87CABD9B-EF38-E648-9BA4-9233C26846F3}">
+  <ds:schemaRefs/>
+</ds:datastoreItem>
+</file>
+
+<file path=customXml/itemProps6.xml><?xml version="1.0" encoding="utf-8"?>
+<ds:datastoreItem xmlns:ds="http://schemas.openxmlformats.org/officeDocument/2006/customXml" ds:itemID="{545DC2FB-D078-1045-9D39-2E74DEB3BB76}">
+  <ds:schemaRefs/>
+</ds:datastoreItem>
+</file>
+
+<file path=customXml/itemProps60.xml><?xml version="1.0" encoding="utf-8"?>
+<ds:datastoreItem xmlns:ds="http://schemas.openxmlformats.org/officeDocument/2006/customXml" ds:itemID="{74DC7B89-9450-874E-B95F-A3B2AE838A56}">
+  <ds:schemaRefs/>
+</ds:datastoreItem>
+</file>
+
+<file path=customXml/itemProps61.xml><?xml version="1.0" encoding="utf-8"?>
+<ds:datastoreItem xmlns:ds="http://schemas.openxmlformats.org/officeDocument/2006/customXml" ds:itemID="{B376EA77-A36F-4140-BF89-06AA0FADEBC9}">
+  <ds:schemaRefs/>
+</ds:datastoreItem>
+</file>
+
+<file path=customXml/itemProps62.xml><?xml version="1.0" encoding="utf-8"?>
+<ds:datastoreItem xmlns:ds="http://schemas.openxmlformats.org/officeDocument/2006/customXml" ds:itemID="{D1C70949-45FC-7D46-873B-668C19E8BC02}">
+  <ds:schemaRefs/>
+</ds:datastoreItem>
+</file>
+
+<file path=customXml/itemProps63.xml><?xml version="1.0" encoding="utf-8"?>
+<ds:datastoreItem xmlns:ds="http://schemas.openxmlformats.org/officeDocument/2006/customXml" ds:itemID="{38036F99-7968-1E4E-A509-CDD48CA6BCB3}">
+  <ds:schemaRefs/>
+</ds:datastoreItem>
+</file>
+
+<file path=customXml/itemProps64.xml><?xml version="1.0" encoding="utf-8"?>
+<ds:datastoreItem xmlns:ds="http://schemas.openxmlformats.org/officeDocument/2006/customXml" ds:itemID="{5B987C67-F680-2646-98DC-47621C6D599B}">
+  <ds:schemaRefs/>
+</ds:datastoreItem>
+</file>
+
+<file path=customXml/itemProps65.xml><?xml version="1.0" encoding="utf-8"?>
+<ds:datastoreItem xmlns:ds="http://schemas.openxmlformats.org/officeDocument/2006/customXml" ds:itemID="{28C85CB8-C4E2-42B6-9E95-8E3EDB1A7CC4}">
+  <ds:schemaRefs/>
+</ds:datastoreItem>
+</file>
+
+<file path=customXml/itemProps66.xml><?xml version="1.0" encoding="utf-8"?>
+<ds:datastoreItem xmlns:ds="http://schemas.openxmlformats.org/officeDocument/2006/customXml" ds:itemID="{E8415C14-3AD0-2F46-8AC3-3C1F82DADFF8}">
+  <ds:schemaRefs/>
+</ds:datastoreItem>
+</file>
+
+<file path=customXml/itemProps67.xml><?xml version="1.0" encoding="utf-8"?>
+<ds:datastoreItem xmlns:ds="http://schemas.openxmlformats.org/officeDocument/2006/customXml" ds:itemID="{571A13A5-C892-D241-B493-E7A56AD1D0FC}">
+  <ds:schemaRefs/>
+</ds:datastoreItem>
+</file>
+
+<file path=customXml/itemProps68.xml><?xml version="1.0" encoding="utf-8"?>
+<ds:datastoreItem xmlns:ds="http://schemas.openxmlformats.org/officeDocument/2006/customXml" ds:itemID="{2A0B6F7D-938D-4897-9BBD-4D92EDFE5FA0}">
+  <ds:schemaRefs/>
+</ds:datastoreItem>
+</file>
+
+<file path=customXml/itemProps69.xml><?xml version="1.0" encoding="utf-8"?>
+<ds:datastoreItem xmlns:ds="http://schemas.openxmlformats.org/officeDocument/2006/customXml" ds:itemID="{9C878288-4363-7845-909D-C584D3760488}">
+  <ds:schemaRefs/>
+</ds:datastoreItem>
+</file>
+
+<file path=customXml/itemProps7.xml><?xml version="1.0" encoding="utf-8"?>
+<ds:datastoreItem xmlns:ds="http://schemas.openxmlformats.org/officeDocument/2006/customXml" ds:itemID="{20879C7B-0541-094E-93EC-0BA0ADF71017}">
+  <ds:schemaRefs/>
+</ds:datastoreItem>
+</file>
+
+<file path=customXml/itemProps70.xml><?xml version="1.0" encoding="utf-8"?>
+<ds:datastoreItem xmlns:ds="http://schemas.openxmlformats.org/officeDocument/2006/customXml" ds:itemID="{842FD731-0B4E-8E4E-A50B-D5B1478770F6}">
+  <ds:schemaRefs/>
+</ds:datastoreItem>
+</file>
+
+<file path=customXml/itemProps71.xml><?xml version="1.0" encoding="utf-8"?>
+<ds:datastoreItem xmlns:ds="http://schemas.openxmlformats.org/officeDocument/2006/customXml" ds:itemID="{B72179C4-8F97-7940-8CC3-DAAAFF5479E6}">
+  <ds:schemaRefs/>
+</ds:datastoreItem>
+</file>
+
+<file path=customXml/itemProps72.xml><?xml version="1.0" encoding="utf-8"?>
+<ds:datastoreItem xmlns:ds="http://schemas.openxmlformats.org/officeDocument/2006/customXml" ds:itemID="{8ECE685F-992C-4340-A2BA-0F7F9183BA57}">
+  <ds:schemaRefs/>
+</ds:datastoreItem>
+</file>
+
+<file path=customXml/itemProps73.xml><?xml version="1.0" encoding="utf-8"?>
+<ds:datastoreItem xmlns:ds="http://schemas.openxmlformats.org/officeDocument/2006/customXml" ds:itemID="{9ABE1B5F-FBFF-554E-91B5-065B62777414}">
+  <ds:schemaRefs/>
+</ds:datastoreItem>
+</file>
+
+<file path=customXml/itemProps74.xml><?xml version="1.0" encoding="utf-8"?>
+<ds:datastoreItem xmlns:ds="http://schemas.openxmlformats.org/officeDocument/2006/customXml" ds:itemID="{3C8BE6D2-1299-EC4A-B29F-8EBF33328F58}">
+  <ds:schemaRefs/>
+</ds:datastoreItem>
+</file>
+
+<file path=customXml/itemProps75.xml><?xml version="1.0" encoding="utf-8"?>
+<ds:datastoreItem xmlns:ds="http://schemas.openxmlformats.org/officeDocument/2006/customXml" ds:itemID="{8D644A9D-B313-DE4F-B71D-42EC9821F32D}">
+  <ds:schemaRefs/>
+</ds:datastoreItem>
+</file>
+
+<file path=customXml/itemProps76.xml><?xml version="1.0" encoding="utf-8"?>
+<ds:datastoreItem xmlns:ds="http://schemas.openxmlformats.org/officeDocument/2006/customXml" ds:itemID="{3D19E2BC-FDCE-4046-8EF3-B8F1A2FD8B4C}">
+  <ds:schemaRefs/>
+</ds:datastoreItem>
+</file>
+
+<file path=customXml/itemProps77.xml><?xml version="1.0" encoding="utf-8"?>
+<ds:datastoreItem xmlns:ds="http://schemas.openxmlformats.org/officeDocument/2006/customXml" ds:itemID="{A4BB7BA0-6077-4948-B399-E72E6338AFE0}">
+  <ds:schemaRefs/>
+</ds:datastoreItem>
+</file>
+
+<file path=customXml/itemProps78.xml><?xml version="1.0" encoding="utf-8"?>
+<ds:datastoreItem xmlns:ds="http://schemas.openxmlformats.org/officeDocument/2006/customXml" ds:itemID="{8857C3F8-6B99-804E-9260-2D26CDF45626}">
+  <ds:schemaRefs/>
+</ds:datastoreItem>
+</file>
+
+<file path=customXml/itemProps79.xml><?xml version="1.0" encoding="utf-8"?>
+<ds:datastoreItem xmlns:ds="http://schemas.openxmlformats.org/officeDocument/2006/customXml" ds:itemID="{C2EED620-3B9B-4849-A4EA-19DE5A675321}">
+  <ds:schemaRefs/>
+</ds:datastoreItem>
+</file>
+
+<file path=customXml/itemProps8.xml><?xml version="1.0" encoding="utf-8"?>
+<ds:datastoreItem xmlns:ds="http://schemas.openxmlformats.org/officeDocument/2006/customXml" ds:itemID="{A33184A5-69A5-4C8A-A8C6-88F1D913BC1B}">
+  <ds:schemaRefs/>
+</ds:datastoreItem>
+</file>
+
+<file path=customXml/itemProps80.xml><?xml version="1.0" encoding="utf-8"?>
+<ds:datastoreItem xmlns:ds="http://schemas.openxmlformats.org/officeDocument/2006/customXml" ds:itemID="{775568C5-529A-454C-8791-D9AB4747E3F6}">
+  <ds:schemaRefs/>
+</ds:datastoreItem>
+</file>
+
+<file path=customXml/itemProps81.xml><?xml version="1.0" encoding="utf-8"?>
+<ds:datastoreItem xmlns:ds="http://schemas.openxmlformats.org/officeDocument/2006/customXml" ds:itemID="{7E45526E-4021-7C41-8709-DBD91FDFF293}">
+  <ds:schemaRefs/>
+</ds:datastoreItem>
+</file>
+
+<file path=customXml/itemProps82.xml><?xml version="1.0" encoding="utf-8"?>
+<ds:datastoreItem xmlns:ds="http://schemas.openxmlformats.org/officeDocument/2006/customXml" ds:itemID="{43CB3E3F-D98F-7F46-907F-6B811AB66CDF}">
+  <ds:schemaRefs/>
+</ds:datastoreItem>
+</file>
+
+<file path=customXml/itemProps83.xml><?xml version="1.0" encoding="utf-8"?>
+<ds:datastoreItem xmlns:ds="http://schemas.openxmlformats.org/officeDocument/2006/customXml" ds:itemID="{CAD727EE-ECC3-484A-BC6E-D825C1A697C5}">
+  <ds:schemaRefs/>
+</ds:datastoreItem>
+</file>
+
+<file path=customXml/itemProps84.xml><?xml version="1.0" encoding="utf-8"?>
+<ds:datastoreItem xmlns:ds="http://schemas.openxmlformats.org/officeDocument/2006/customXml" ds:itemID="{D7BE6DF5-3D11-7C4D-9AB7-B8E47DCB9E0E}">
+  <ds:schemaRefs/>
+</ds:datastoreItem>
+</file>
+
+<file path=customXml/itemProps85.xml><?xml version="1.0" encoding="utf-8"?>
+<ds:datastoreItem xmlns:ds="http://schemas.openxmlformats.org/officeDocument/2006/customXml" ds:itemID="{231B28A0-C4F9-F342-9CB5-024D548557FB}">
+  <ds:schemaRefs/>
+</ds:datastoreItem>
+</file>
+
+<file path=customXml/itemProps86.xml><?xml version="1.0" encoding="utf-8"?>
+<ds:datastoreItem xmlns:ds="http://schemas.openxmlformats.org/officeDocument/2006/customXml" ds:itemID="{D2C43B9A-008F-9B43-89B8-EB14DBBEE730}">
+  <ds:schemaRefs/>
+</ds:datastoreItem>
+</file>
+
+<file path=customXml/itemProps87.xml><?xml version="1.0" encoding="utf-8"?>
+<ds:datastoreItem xmlns:ds="http://schemas.openxmlformats.org/officeDocument/2006/customXml" ds:itemID="{D83B34BF-0AA8-5844-9412-430C44A1B21E}">
+  <ds:schemaRefs/>
+</ds:datastoreItem>
+</file>
+
+<file path=customXml/itemProps88.xml><?xml version="1.0" encoding="utf-8"?>
+<ds:datastoreItem xmlns:ds="http://schemas.openxmlformats.org/officeDocument/2006/customXml" ds:itemID="{4FF3F3C9-FF93-1243-8662-BB9286383151}">
+  <ds:schemaRefs/>
+</ds:datastoreItem>
+</file>
+
+<file path=customXml/itemProps89.xml><?xml version="1.0" encoding="utf-8"?>
+<ds:datastoreItem xmlns:ds="http://schemas.openxmlformats.org/officeDocument/2006/customXml" ds:itemID="{BAF86078-6178-5441-913A-27609A575C53}">
+  <ds:schemaRefs/>
+</ds:datastoreItem>
+</file>
+
+<file path=customXml/itemProps9.xml><?xml version="1.0" encoding="utf-8"?>
+<ds:datastoreItem xmlns:ds="http://schemas.openxmlformats.org/officeDocument/2006/customXml" ds:itemID="{AB4892BD-F884-9643-80EA-4B78C32BAA97}">
+  <ds:schemaRefs/>
+</ds:datastoreItem>
+</file>
+
+<file path=customXml/itemProps90.xml><?xml version="1.0" encoding="utf-8"?>
 <ds:datastoreItem xmlns:ds="http://schemas.openxmlformats.org/officeDocument/2006/customXml" ds:itemID="{9B66094B-3696-174F-8F7E-BFADA0783000}">
   <ds:schemaRefs/>
 </ds:datastoreItem>
 </file>
 
-<file path=customXml/itemProps52.xml><?xml version="1.0" encoding="utf-8"?>
-<ds:datastoreItem xmlns:ds="http://schemas.openxmlformats.org/officeDocument/2006/customXml" ds:itemID="{08D8D361-3686-2445-9F03-73AF79C154B3}">
+<file path=customXml/itemProps91.xml><?xml version="1.0" encoding="utf-8"?>
+<ds:datastoreItem xmlns:ds="http://schemas.openxmlformats.org/officeDocument/2006/customXml" ds:itemID="{2CEA8186-7D83-AF47-8A94-15F6751DC4E2}">
   <ds:schemaRefs/>
 </ds:datastoreItem>
 </file>
 
-<file path=customXml/itemProps53.xml><?xml version="1.0" encoding="utf-8"?>
-<ds:datastoreItem xmlns:ds="http://schemas.openxmlformats.org/officeDocument/2006/customXml" ds:itemID="{AB4892BD-F884-9643-80EA-4B78C32BAA97}">
+<file path=customXml/itemProps92.xml><?xml version="1.0" encoding="utf-8"?>
+<ds:datastoreItem xmlns:ds="http://schemas.openxmlformats.org/officeDocument/2006/customXml" ds:itemID="{4898415C-2754-2F46-9E7C-D30919D3CAC3}">
   <ds:schemaRefs/>
 </ds:datastoreItem>
 </file>
 
-<file path=customXml/itemProps54.xml><?xml version="1.0" encoding="utf-8"?>
-<ds:datastoreItem xmlns:ds="http://schemas.openxmlformats.org/officeDocument/2006/customXml" ds:itemID="{47F228FF-6E11-4D4F-8530-29D1C1C2B56D}">
+<file path=customXml/itemProps93.xml><?xml version="1.0" encoding="utf-8"?>
+<ds:datastoreItem xmlns:ds="http://schemas.openxmlformats.org/officeDocument/2006/customXml" ds:itemID="{9005F8EA-2E3D-9B43-8722-EA53E007B555}">
   <ds:schemaRefs/>
 </ds:datastoreItem>
 </file>
 
-<file path=customXml/itemProps55.xml><?xml version="1.0" encoding="utf-8"?>
-<ds:datastoreItem xmlns:ds="http://schemas.openxmlformats.org/officeDocument/2006/customXml" ds:itemID="{87CABD9B-EF38-E648-9BA4-9233C26846F3}">
+<file path=customXml/itemProps94.xml><?xml version="1.0" encoding="utf-8"?>
+<ds:datastoreItem xmlns:ds="http://schemas.openxmlformats.org/officeDocument/2006/customXml" ds:itemID="{BCE338FD-0C37-9148-B918-CD08A13B5568}">
   <ds:schemaRefs/>
 </ds:datastoreItem>
 </file>
 
-<file path=customXml/itemProps56.xml><?xml version="1.0" encoding="utf-8"?>
-<ds:datastoreItem xmlns:ds="http://schemas.openxmlformats.org/officeDocument/2006/customXml" ds:itemID="{D7BE6DF5-3D11-7C4D-9AB7-B8E47DCB9E0E}">
+<file path=customXml/itemProps95.xml><?xml version="1.0" encoding="utf-8"?>
+<ds:datastoreItem xmlns:ds="http://schemas.openxmlformats.org/officeDocument/2006/customXml" ds:itemID="{1767E9AD-0C4B-2A4E-8562-BEBD9AE35509}">
   <ds:schemaRefs/>
 </ds:datastoreItem>
 </file>
 
-<file path=customXml/itemProps57.xml><?xml version="1.0" encoding="utf-8"?>
-<ds:datastoreItem xmlns:ds="http://schemas.openxmlformats.org/officeDocument/2006/customXml" ds:itemID="{08A943D2-08B8-BB48-8300-E66F8B15FD43}">
+<file path=customXml/itemProps96.xml><?xml version="1.0" encoding="utf-8"?>
+<ds:datastoreItem xmlns:ds="http://schemas.openxmlformats.org/officeDocument/2006/customXml" ds:itemID="{586B46D8-2966-4A45-9D78-7ECB2CB2E8B7}">
   <ds:schemaRefs/>
 </ds:datastoreItem>
 </file>
 
-<file path=customXml/itemProps58.xml><?xml version="1.0" encoding="utf-8"?>
-<ds:datastoreItem xmlns:ds="http://schemas.openxmlformats.org/officeDocument/2006/customXml" ds:itemID="{2F66468B-D119-B944-BC92-9091FAE67380}">
+<file path=customXml/itemProps97.xml><?xml version="1.0" encoding="utf-8"?>
+<ds:datastoreItem xmlns:ds="http://schemas.openxmlformats.org/officeDocument/2006/customXml" ds:itemID="{4D3AD489-D4EE-FD4E-923E-F02226D44C34}">
   <ds:schemaRefs/>
 </ds:datastoreItem>
 </file>
 
-<file path=customXml/itemProps59.xml><?xml version="1.0" encoding="utf-8"?>
-<ds:datastoreItem xmlns:ds="http://schemas.openxmlformats.org/officeDocument/2006/customXml" ds:itemID="{B229D9C2-9F66-8848-86B9-A962DBF55142}">
-  <ds:schemaRefs/>
-</ds:datastoreItem>
-</file>
-
-<file path=customXml/itemProps6.xml><?xml version="1.0" encoding="utf-8"?>
-<ds:datastoreItem xmlns:ds="http://schemas.openxmlformats.org/officeDocument/2006/customXml" ds:itemID="{CA485EBB-3C0F-E348-A301-8C1356476838}">
-  <ds:schemaRefs/>
-</ds:datastoreItem>
-</file>
-
-<file path=customXml/itemProps60.xml><?xml version="1.0" encoding="utf-8"?>
-<ds:datastoreItem xmlns:ds="http://schemas.openxmlformats.org/officeDocument/2006/customXml" ds:itemID="{4A4B88C1-64A1-9442-BFB9-8D56DCD242E4}">
-  <ds:schemaRefs/>
-</ds:datastoreItem>
-</file>
-
-<file path=customXml/itemProps61.xml><?xml version="1.0" encoding="utf-8"?>
-<ds:datastoreItem xmlns:ds="http://schemas.openxmlformats.org/officeDocument/2006/customXml" ds:itemID="{8857C3F8-6B99-804E-9260-2D26CDF45626}">
-  <ds:schemaRefs/>
-</ds:datastoreItem>
-</file>
-
-<file path=customXml/itemProps62.xml><?xml version="1.0" encoding="utf-8"?>
-<ds:datastoreItem xmlns:ds="http://schemas.openxmlformats.org/officeDocument/2006/customXml" ds:itemID="{2A47E9D9-49E4-2342-9800-117D4E9357B3}">
-  <ds:schemaRefs/>
-</ds:datastoreItem>
-</file>
-
-<file path=customXml/itemProps63.xml><?xml version="1.0" encoding="utf-8"?>
-<ds:datastoreItem xmlns:ds="http://schemas.openxmlformats.org/officeDocument/2006/customXml" ds:itemID="{127E6D31-6E9C-D94C-9A6A-CC8AB0B19154}">
-  <ds:schemaRefs/>
-</ds:datastoreItem>
-</file>
-
-<file path=customXml/itemProps64.xml><?xml version="1.0" encoding="utf-8"?>
-<ds:datastoreItem xmlns:ds="http://schemas.openxmlformats.org/officeDocument/2006/customXml" ds:itemID="{8FA9B5B9-F170-1543-810F-14BD1AD9C098}">
-  <ds:schemaRefs/>
-</ds:datastoreItem>
-</file>
-
-<file path=customXml/itemProps65.xml><?xml version="1.0" encoding="utf-8"?>
-<ds:datastoreItem xmlns:ds="http://schemas.openxmlformats.org/officeDocument/2006/customXml" ds:itemID="{727A10E5-F806-8E4F-99BA-434A7B8ABED2}">
-  <ds:schemaRefs/>
-</ds:datastoreItem>
-</file>
-
-<file path=customXml/itemProps66.xml><?xml version="1.0" encoding="utf-8"?>
-<ds:datastoreItem xmlns:ds="http://schemas.openxmlformats.org/officeDocument/2006/customXml" ds:itemID="{9ABE1B5F-FBFF-554E-91B5-065B62777414}">
-  <ds:schemaRefs/>
-</ds:datastoreItem>
-</file>
-
-<file path=customXml/itemProps67.xml><?xml version="1.0" encoding="utf-8"?>
+<file path=customXml/itemProps98.xml><?xml version="1.0" encoding="utf-8"?>
 <ds:datastoreItem xmlns:ds="http://schemas.openxmlformats.org/officeDocument/2006/customXml" ds:itemID="{8CCBDF61-236A-7043-804B-3BB09BDC6FE3}">
   <ds:schemaRefs/>
 </ds:datastoreItem>
 </file>
 
-<file path=customXml/itemProps68.xml><?xml version="1.0" encoding="utf-8"?>
-<ds:datastoreItem xmlns:ds="http://schemas.openxmlformats.org/officeDocument/2006/customXml" ds:itemID="{11D8D825-9615-414A-845D-D4253F92C999}">
-  <ds:schemaRefs/>
-</ds:datastoreItem>
-</file>
-
-<file path=customXml/itemProps69.xml><?xml version="1.0" encoding="utf-8"?>
-<ds:datastoreItem xmlns:ds="http://schemas.openxmlformats.org/officeDocument/2006/customXml" ds:itemID="{9071C123-D82B-6A40-B9BD-7EA7EDC4A509}">
-  <ds:schemaRefs/>
-</ds:datastoreItem>
-</file>
-
-<file path=customXml/itemProps7.xml><?xml version="1.0" encoding="utf-8"?>
-<ds:datastoreItem xmlns:ds="http://schemas.openxmlformats.org/officeDocument/2006/customXml" ds:itemID="{28C85CB8-C4E2-42B6-9E95-8E3EDB1A7CC4}">
-  <ds:schemaRefs/>
-</ds:datastoreItem>
-</file>
-
-<file path=customXml/itemProps70.xml><?xml version="1.0" encoding="utf-8"?>
-<ds:datastoreItem xmlns:ds="http://schemas.openxmlformats.org/officeDocument/2006/customXml" ds:itemID="{8103E372-BF38-4215-B88A-1143DC5923C6}">
-  <ds:schemaRefs/>
-</ds:datastoreItem>
-</file>
-
-<file path=customXml/itemProps71.xml><?xml version="1.0" encoding="utf-8"?>
-<ds:datastoreItem xmlns:ds="http://schemas.openxmlformats.org/officeDocument/2006/customXml" ds:itemID="{E8415C14-3AD0-2F46-8AC3-3C1F82DADFF8}">
-  <ds:schemaRefs/>
-</ds:datastoreItem>
-</file>
-
-<file path=customXml/itemProps72.xml><?xml version="1.0" encoding="utf-8"?>
-<ds:datastoreItem xmlns:ds="http://schemas.openxmlformats.org/officeDocument/2006/customXml" ds:itemID="{2CEA8186-7D83-AF47-8A94-15F6751DC4E2}">
-  <ds:schemaRefs/>
-</ds:datastoreItem>
-</file>
-
-<file path=customXml/itemProps73.xml><?xml version="1.0" encoding="utf-8"?>
-<ds:datastoreItem xmlns:ds="http://schemas.openxmlformats.org/officeDocument/2006/customXml" ds:itemID="{DD247416-4E47-DE42-994A-4D84AE2DBE6B}">
-  <ds:schemaRefs/>
-</ds:datastoreItem>
-</file>
-
-<file path=customXml/itemProps74.xml><?xml version="1.0" encoding="utf-8"?>
-<ds:datastoreItem xmlns:ds="http://schemas.openxmlformats.org/officeDocument/2006/customXml" ds:itemID="{98BA9AEF-FDF4-1946-8259-DDA195E03BE0}">
-  <ds:schemaRefs/>
-</ds:datastoreItem>
-</file>
-
-<file path=customXml/itemProps75.xml><?xml version="1.0" encoding="utf-8"?>
-<ds:datastoreItem xmlns:ds="http://schemas.openxmlformats.org/officeDocument/2006/customXml" ds:itemID="{2FC87E82-0F5A-524A-B36F-35EBCA1F4902}">
-  <ds:schemaRefs/>
-</ds:datastoreItem>
-</file>
-
-<file path=customXml/itemProps76.xml><?xml version="1.0" encoding="utf-8"?>
-<ds:datastoreItem xmlns:ds="http://schemas.openxmlformats.org/officeDocument/2006/customXml" ds:itemID="{74DC7B89-9450-874E-B95F-A3B2AE838A56}">
-  <ds:schemaRefs/>
-</ds:datastoreItem>
-</file>
-
-<file path=customXml/itemProps77.xml><?xml version="1.0" encoding="utf-8"?>
-<ds:datastoreItem xmlns:ds="http://schemas.openxmlformats.org/officeDocument/2006/customXml" ds:itemID="{231B28A0-C4F9-F342-9CB5-024D548557FB}">
-  <ds:schemaRefs/>
-</ds:datastoreItem>
-</file>
-
-<file path=customXml/itemProps78.xml><?xml version="1.0" encoding="utf-8"?>
-<ds:datastoreItem xmlns:ds="http://schemas.openxmlformats.org/officeDocument/2006/customXml" ds:itemID="{AAAEE516-28E3-F246-BAAB-20DFE080C19A}">
-  <ds:schemaRefs/>
-</ds:datastoreItem>
-</file>
-
-<file path=customXml/itemProps79.xml><?xml version="1.0" encoding="utf-8"?>
-<ds:datastoreItem xmlns:ds="http://schemas.openxmlformats.org/officeDocument/2006/customXml" ds:itemID="{ACDEFF1F-7D60-044C-9E4D-F90B787991A7}">
-  <ds:schemaRefs/>
-</ds:datastoreItem>
-</file>
-
-<file path=customXml/itemProps8.xml><?xml version="1.0" encoding="utf-8"?>
-<ds:datastoreItem xmlns:ds="http://schemas.openxmlformats.org/officeDocument/2006/customXml" ds:itemID="{BAF86078-6178-5441-913A-27609A575C53}">
-  <ds:schemaRefs/>
-</ds:datastoreItem>
-</file>
-
-<file path=customXml/itemProps80.xml><?xml version="1.0" encoding="utf-8"?>
-<ds:datastoreItem xmlns:ds="http://schemas.openxmlformats.org/officeDocument/2006/customXml" ds:itemID="{FAF24D88-9894-2D4A-B969-C5EED3B41183}">
-  <ds:schemaRefs/>
-</ds:datastoreItem>
-</file>
-
-<file path=customXml/itemProps81.xml><?xml version="1.0" encoding="utf-8"?>
-<ds:datastoreItem xmlns:ds="http://schemas.openxmlformats.org/officeDocument/2006/customXml" ds:itemID="{EBB88059-6AC3-5C4D-88E9-27D623487880}">
-  <ds:schemaRefs/>
-</ds:datastoreItem>
-</file>
-
-<file path=customXml/itemProps82.xml><?xml version="1.0" encoding="utf-8"?>
-<ds:datastoreItem xmlns:ds="http://schemas.openxmlformats.org/officeDocument/2006/customXml" ds:itemID="{C2EED620-3B9B-4849-A4EA-19DE5A675321}">
-  <ds:schemaRefs/>
-</ds:datastoreItem>
-</file>
-
-<file path=customXml/itemProps83.xml><?xml version="1.0" encoding="utf-8"?>
-<ds:datastoreItem xmlns:ds="http://schemas.openxmlformats.org/officeDocument/2006/customXml" ds:itemID="{EDD86879-0894-7D42-9F54-E4A714244430}">
-  <ds:schemaRefs/>
-</ds:datastoreItem>
-</file>
-
-<file path=customXml/itemProps84.xml><?xml version="1.0" encoding="utf-8"?>
-<ds:datastoreItem xmlns:ds="http://schemas.openxmlformats.org/officeDocument/2006/customXml" ds:itemID="{A0157F43-06F5-4947-95CA-60CF01236E6F}">
-  <ds:schemaRefs/>
-</ds:datastoreItem>
-</file>
-
-<file path=customXml/itemProps85.xml><?xml version="1.0" encoding="utf-8"?>
-<ds:datastoreItem xmlns:ds="http://schemas.openxmlformats.org/officeDocument/2006/customXml" ds:itemID="{CC718065-0776-1845-B807-D6E25B378813}">
-  <ds:schemaRefs/>
-</ds:datastoreItem>
-</file>
-
-<file path=customXml/itemProps86.xml><?xml version="1.0" encoding="utf-8"?>
-<ds:datastoreItem xmlns:ds="http://schemas.openxmlformats.org/officeDocument/2006/customXml" ds:itemID="{0CACF658-519F-E046-9D2F-A57D1C490B37}">
-  <ds:schemaRefs/>
-</ds:datastoreItem>
-</file>
-
-<file path=customXml/itemProps87.xml><?xml version="1.0" encoding="utf-8"?>
-<ds:datastoreItem xmlns:ds="http://schemas.openxmlformats.org/officeDocument/2006/customXml" ds:itemID="{3C8BE6D2-1299-EC4A-B29F-8EBF33328F58}">
-  <ds:schemaRefs/>
-</ds:datastoreItem>
-</file>
-
-<file path=customXml/itemProps88.xml><?xml version="1.0" encoding="utf-8"?>
-<ds:datastoreItem xmlns:ds="http://schemas.openxmlformats.org/officeDocument/2006/customXml" ds:itemID="{4C634F72-AD4A-8547-BB9D-47BB44CCA14A}">
-  <ds:schemaRefs/>
-</ds:datastoreItem>
-</file>
-
-<file path=customXml/itemProps89.xml><?xml version="1.0" encoding="utf-8"?>
-<ds:datastoreItem xmlns:ds="http://schemas.openxmlformats.org/officeDocument/2006/customXml" ds:itemID="{5102CBF8-5594-1848-B89F-27BE664B1719}">
-  <ds:schemaRefs/>
-</ds:datastoreItem>
-</file>
-
-<file path=customXml/itemProps9.xml><?xml version="1.0" encoding="utf-8"?>
-<ds:datastoreItem xmlns:ds="http://schemas.openxmlformats.org/officeDocument/2006/customXml" ds:itemID="{F281106E-2C4F-4E80-AE54-10D0E3AF4D22}">
-  <ds:schemaRefs/>
-</ds:datastoreItem>
-</file>
-
-<file path=customXml/itemProps90.xml><?xml version="1.0" encoding="utf-8"?>
-<ds:datastoreItem xmlns:ds="http://schemas.openxmlformats.org/officeDocument/2006/customXml" ds:itemID="{F2FCF759-7E5A-C840-8E9B-1DABD2170E27}">
-  <ds:schemaRefs/>
-</ds:datastoreItem>
-</file>
-
-<file path=customXml/itemProps91.xml><?xml version="1.0" encoding="utf-8"?>
-<ds:datastoreItem xmlns:ds="http://schemas.openxmlformats.org/officeDocument/2006/customXml" ds:itemID="{34E0A1F0-A93B-3D43-A282-45030E7A015C}">
-  <ds:schemaRefs/>
-</ds:datastoreItem>
-</file>
-
-<file path=customXml/itemProps92.xml><?xml version="1.0" encoding="utf-8"?>
-<ds:datastoreItem xmlns:ds="http://schemas.openxmlformats.org/officeDocument/2006/customXml" ds:itemID="{571A13A5-C892-D241-B493-E7A56AD1D0FC}">
-  <ds:schemaRefs/>
-</ds:datastoreItem>
-</file>
-
-<file path=customXml/itemProps93.xml><?xml version="1.0" encoding="utf-8"?>
-<ds:datastoreItem xmlns:ds="http://schemas.openxmlformats.org/officeDocument/2006/customXml" ds:itemID="{4898415C-2754-2F46-9E7C-D30919D3CAC3}">
-  <ds:schemaRefs/>
-</ds:datastoreItem>
-</file>
-
-<file path=customXml/itemProps94.xml><?xml version="1.0" encoding="utf-8"?>
-<ds:datastoreItem xmlns:ds="http://schemas.openxmlformats.org/officeDocument/2006/customXml" ds:itemID="{A712C57A-BE82-A34B-9BB4-79316C3ABF59}">
-  <ds:schemaRefs/>
-</ds:datastoreItem>
-</file>
-
-<file path=customXml/itemProps95.xml><?xml version="1.0" encoding="utf-8"?>
-<ds:datastoreItem xmlns:ds="http://schemas.openxmlformats.org/officeDocument/2006/customXml" ds:itemID="{24EE2B10-D711-4440-A902-6816EB84EE62}">
-  <ds:schemaRefs/>
-</ds:datastoreItem>
-</file>
-
-<file path=customXml/itemProps96.xml><?xml version="1.0" encoding="utf-8"?>
-<ds:datastoreItem xmlns:ds="http://schemas.openxmlformats.org/officeDocument/2006/customXml" ds:itemID="{342BB3F3-2368-BA40-8F30-D5BB7CD458F4}">
-  <ds:schemaRefs/>
-</ds:datastoreItem>
-</file>
-
-<file path=customXml/itemProps97.xml><?xml version="1.0" encoding="utf-8"?>
-<ds:datastoreItem xmlns:ds="http://schemas.openxmlformats.org/officeDocument/2006/customXml" ds:itemID="{B376EA77-A36F-4140-BF89-06AA0FADEBC9}">
-  <ds:schemaRefs/>
-</ds:datastoreItem>
-</file>
-
-<file path=customXml/itemProps98.xml><?xml version="1.0" encoding="utf-8"?>
-<ds:datastoreItem xmlns:ds="http://schemas.openxmlformats.org/officeDocument/2006/customXml" ds:itemID="{9005F8EA-2E3D-9B43-8722-EA53E007B555}">
-  <ds:schemaRefs/>
-</ds:datastoreItem>
-</file>
-
 <file path=customXml/itemProps99.xml><?xml version="1.0" encoding="utf-8"?>
-<ds:datastoreItem xmlns:ds="http://schemas.openxmlformats.org/officeDocument/2006/customXml" ds:itemID="{4F7F6BED-D6D8-1F4A-B9C6-FF4FD5486B04}">
+<ds:datastoreItem xmlns:ds="http://schemas.openxmlformats.org/officeDocument/2006/customXml" ds:itemID="{A0F1B3AB-C9B7-734B-9E79-23AB848C7652}">
   <ds:schemaRefs/>
 </ds:datastoreItem>
 </file>